--- a/clase2/teorica_2.pptx
+++ b/clase2/teorica_2.pptx
@@ -10,7 +10,7 @@
   <p:sldIdLst>
     <p:sldId id="256" r:id="rId2"/>
     <p:sldId id="264" r:id="rId3"/>
-    <p:sldId id="344" r:id="rId4"/>
+    <p:sldId id="345" r:id="rId4"/>
     <p:sldId id="265" r:id="rId5"/>
     <p:sldId id="267" r:id="rId6"/>
     <p:sldId id="268" r:id="rId7"/>
@@ -3223,7 +3223,11 @@
               </a:spcAft>
               <a:buNone/>
             </a:pPr>
-            <a:endParaRPr/>
+            <a:r>
+              <a:rPr lang="es-MX" dirty="0"/>
+              <a:t>En todos los casos mostramos ejemplos</a:t>
+            </a:r>
+            <a:endParaRPr dirty="0"/>
           </a:p>
         </p:txBody>
       </p:sp>
@@ -10362,8 +10366,8 @@
           </p:sp>
         </mc:Fallback>
       </mc:AlternateContent>
-      <mc:AlternateContent xmlns:mc="http://schemas.openxmlformats.org/markup-compatibility/2006">
-        <mc:Choice xmlns:a14="http://schemas.microsoft.com/office/drawing/2010/main" Requires="a14">
+      <mc:AlternateContent xmlns:mc="http://schemas.openxmlformats.org/markup-compatibility/2006" xmlns:a14="http://schemas.microsoft.com/office/drawing/2010/main">
+        <mc:Choice Requires="a14">
           <p:sp>
             <p:nvSpPr>
               <p:cNvPr id="176" name="Google Shape;176;p30"/>
@@ -10496,7 +10500,7 @@
             </p:txBody>
           </p:sp>
         </mc:Choice>
-        <mc:Fallback>
+        <mc:Fallback xmlns="">
           <p:sp>
             <p:nvSpPr>
               <p:cNvPr id="176" name="Google Shape;176;p30"/>
@@ -13249,19 +13253,25 @@
       </p:sp>
       <p:graphicFrame>
         <p:nvGraphicFramePr>
-          <p:cNvPr id="121" name="Google Shape;121;p21"/>
+          <p:cNvPr id="4" name="Google Shape;121;p21">
+            <a:extLst>
+              <a:ext uri="{FF2B5EF4-FFF2-40B4-BE49-F238E27FC236}">
+                <a16:creationId xmlns:a16="http://schemas.microsoft.com/office/drawing/2014/main" id="{F81E4752-98D5-42E9-8D8A-CA8282B3B932}"/>
+              </a:ext>
+            </a:extLst>
+          </p:cNvPr>
           <p:cNvGraphicFramePr/>
           <p:nvPr>
             <p:extLst>
               <p:ext uri="{D42A27DB-BD31-4B8C-83A1-F6EECF244321}">
-                <p14:modId xmlns:p14="http://schemas.microsoft.com/office/powerpoint/2010/main" val="1067394496"/>
+                <p14:modId xmlns:p14="http://schemas.microsoft.com/office/powerpoint/2010/main" val="1951850552"/>
               </p:ext>
             </p:extLst>
           </p:nvPr>
         </p:nvGraphicFramePr>
         <p:xfrm>
           <a:off x="311750" y="1238250"/>
-          <a:ext cx="8520550" cy="3728890"/>
+          <a:ext cx="8584913" cy="3708502"/>
         </p:xfrm>
         <a:graphic>
           <a:graphicData uri="http://schemas.openxmlformats.org/drawingml/2006/table">
@@ -13271,28 +13281,21 @@
                 <a:tableStyleId>{272BD5B9-A1A1-4B16-8F28-979374803D1B}</a:tableStyleId>
               </a:tblPr>
               <a:tblGrid>
-                <a:gridCol w="936758">
+                <a:gridCol w="1093973">
                   <a:extLst>
                     <a:ext uri="{9D8B030D-6E8A-4147-A177-3AD203B41FA5}">
                       <a16:colId xmlns:a16="http://schemas.microsoft.com/office/drawing/2014/main" val="20000"/>
                     </a:ext>
                   </a:extLst>
                 </a:gridCol>
-                <a:gridCol w="1169377">
-                  <a:extLst>
-                    <a:ext uri="{9D8B030D-6E8A-4147-A177-3AD203B41FA5}">
-                      <a16:colId xmlns:a16="http://schemas.microsoft.com/office/drawing/2014/main" val="20001"/>
-                    </a:ext>
-                  </a:extLst>
-                </a:gridCol>
-                <a:gridCol w="3648807">
+                <a:gridCol w="3915870">
                   <a:extLst>
                     <a:ext uri="{9D8B030D-6E8A-4147-A177-3AD203B41FA5}">
                       <a16:colId xmlns:a16="http://schemas.microsoft.com/office/drawing/2014/main" val="20002"/>
                     </a:ext>
                   </a:extLst>
                 </a:gridCol>
-                <a:gridCol w="2765608">
+                <a:gridCol w="3575070">
                   <a:extLst>
                     <a:ext uri="{9D8B030D-6E8A-4147-A177-3AD203B41FA5}">
                       <a16:colId xmlns:a16="http://schemas.microsoft.com/office/drawing/2014/main" val="20003"/>
@@ -13300,7 +13303,7 @@
                   </a:extLst>
                 </a:gridCol>
               </a:tblGrid>
-              <a:tr h="505525">
+              <a:tr h="514654">
                 <a:tc>
                   <a:txBody>
                     <a:bodyPr/>
@@ -13316,7 +13319,7 @@
                         <a:buNone/>
                       </a:pPr>
                       <a:r>
-                        <a:rPr lang="en-GB" b="1">
+                        <a:rPr lang="en-GB" b="1" dirty="0" err="1">
                           <a:solidFill>
                             <a:srgbClr val="FFFFFF"/>
                           </a:solidFill>
@@ -13327,94 +13330,7 @@
                         </a:rPr>
                         <a:t>Clase</a:t>
                       </a:r>
-                      <a:endParaRPr b="1">
-                        <a:solidFill>
-                          <a:srgbClr val="FFFFFF"/>
-                        </a:solidFill>
-                        <a:latin typeface="Proxima Nova"/>
-                        <a:ea typeface="Proxima Nova"/>
-                        <a:cs typeface="Proxima Nova"/>
-                        <a:sym typeface="Proxima Nova"/>
-                      </a:endParaRPr>
-                    </a:p>
-                  </a:txBody>
-                  <a:tcPr marL="91425" marR="91425" marT="91425" marB="91425" anchor="ctr">
-                    <a:lnL w="9525" cap="flat" cmpd="sng">
-                      <a:solidFill>
-                        <a:srgbClr val="9E9E9E">
-                          <a:alpha val="0"/>
-                        </a:srgbClr>
-                      </a:solidFill>
-                      <a:prstDash val="solid"/>
-                      <a:round/>
-                      <a:headEnd type="none" w="sm" len="sm"/>
-                      <a:tailEnd type="none" w="sm" len="sm"/>
-                    </a:lnL>
-                    <a:lnR w="9525" cap="flat" cmpd="sng">
-                      <a:solidFill>
-                        <a:srgbClr val="9E9E9E">
-                          <a:alpha val="0"/>
-                        </a:srgbClr>
-                      </a:solidFill>
-                      <a:prstDash val="solid"/>
-                      <a:round/>
-                      <a:headEnd type="none" w="sm" len="sm"/>
-                      <a:tailEnd type="none" w="sm" len="sm"/>
-                    </a:lnR>
-                    <a:lnT w="9525" cap="flat" cmpd="sng">
-                      <a:solidFill>
-                        <a:srgbClr val="9E9E9E">
-                          <a:alpha val="0"/>
-                        </a:srgbClr>
-                      </a:solidFill>
-                      <a:prstDash val="solid"/>
-                      <a:round/>
-                      <a:headEnd type="none" w="sm" len="sm"/>
-                      <a:tailEnd type="none" w="sm" len="sm"/>
-                    </a:lnT>
-                    <a:lnB w="9525" cap="flat" cmpd="sng">
-                      <a:solidFill>
-                        <a:srgbClr val="9E9E9E">
-                          <a:alpha val="0"/>
-                        </a:srgbClr>
-                      </a:solidFill>
-                      <a:prstDash val="solid"/>
-                      <a:round/>
-                      <a:headEnd type="none" w="sm" len="sm"/>
-                      <a:tailEnd type="none" w="sm" len="sm"/>
-                    </a:lnB>
-                    <a:solidFill>
-                      <a:schemeClr val="dk2"/>
-                    </a:solidFill>
-                  </a:tcPr>
-                </a:tc>
-                <a:tc>
-                  <a:txBody>
-                    <a:bodyPr/>
-                    <a:lstStyle/>
-                    <a:p>
-                      <a:pPr marL="0" lvl="0" indent="0" algn="ctr" rtl="0">
-                        <a:spcBef>
-                          <a:spcPts val="0"/>
-                        </a:spcBef>
-                        <a:spcAft>
-                          <a:spcPts val="0"/>
-                        </a:spcAft>
-                        <a:buNone/>
-                      </a:pPr>
-                      <a:r>
-                        <a:rPr lang="en-GB" b="1">
-                          <a:solidFill>
-                            <a:srgbClr val="FFFFFF"/>
-                          </a:solidFill>
-                          <a:latin typeface="Proxima Nova"/>
-                          <a:ea typeface="Proxima Nova"/>
-                          <a:cs typeface="Proxima Nova"/>
-                          <a:sym typeface="Proxima Nova"/>
-                        </a:rPr>
-                        <a:t>Fecha</a:t>
-                      </a:r>
-                      <a:endParaRPr b="1">
+                      <a:endParaRPr b="1" dirty="0">
                         <a:solidFill>
                           <a:srgbClr val="FFFFFF"/>
                         </a:solidFill>
@@ -13513,7 +13429,7 @@
                     </a:p>
                   </a:txBody>
                   <a:tcPr marL="91425" marR="91425" marT="91425" marB="91425" anchor="ctr">
-                    <a:lnL w="9525" cap="flat" cmpd="sng">
+                    <a:lnL w="9525" cap="flat" cmpd="sng" algn="ctr">
                       <a:solidFill>
                         <a:srgbClr val="9E9E9E">
                           <a:alpha val="0"/>
@@ -13546,7 +13462,7 @@
                       <a:headEnd type="none" w="sm" len="sm"/>
                       <a:tailEnd type="none" w="sm" len="sm"/>
                     </a:lnT>
-                    <a:lnB w="9525" cap="flat" cmpd="sng">
+                    <a:lnB w="9525" cap="flat" cmpd="sng" algn="ctr">
                       <a:solidFill>
                         <a:srgbClr val="9E9E9E">
                           <a:alpha val="0"/>
@@ -13655,362 +13571,7 @@
                   </a:ext>
                 </a:extLst>
               </a:tr>
-              <a:tr h="505525">
-                <a:tc>
-                  <a:txBody>
-                    <a:bodyPr/>
-                    <a:lstStyle/>
-                    <a:p>
-                      <a:pPr marL="0" lvl="0" indent="0" algn="ctr" rtl="0">
-                        <a:spcBef>
-                          <a:spcPts val="0"/>
-                        </a:spcBef>
-                        <a:spcAft>
-                          <a:spcPts val="0"/>
-                        </a:spcAft>
-                        <a:buNone/>
-                      </a:pPr>
-                      <a:r>
-                        <a:rPr lang="en-GB">
-                          <a:latin typeface="Proxima Nova"/>
-                          <a:ea typeface="Proxima Nova"/>
-                          <a:cs typeface="Proxima Nova"/>
-                          <a:sym typeface="Proxima Nova"/>
-                        </a:rPr>
-                        <a:t>1</a:t>
-                      </a:r>
-                      <a:endParaRPr>
-                        <a:latin typeface="Proxima Nova"/>
-                        <a:ea typeface="Proxima Nova"/>
-                        <a:cs typeface="Proxima Nova"/>
-                        <a:sym typeface="Proxima Nova"/>
-                      </a:endParaRPr>
-                    </a:p>
-                  </a:txBody>
-                  <a:tcPr marL="91425" marR="91425" marT="91425" marB="91425" anchor="ctr">
-                    <a:lnL w="9525" cap="flat" cmpd="sng">
-                      <a:solidFill>
-                        <a:srgbClr val="9E9E9E">
-                          <a:alpha val="0"/>
-                        </a:srgbClr>
-                      </a:solidFill>
-                      <a:prstDash val="solid"/>
-                      <a:round/>
-                      <a:headEnd type="none" w="sm" len="sm"/>
-                      <a:tailEnd type="none" w="sm" len="sm"/>
-                    </a:lnL>
-                    <a:lnR w="9525" cap="flat" cmpd="sng">
-                      <a:solidFill>
-                        <a:srgbClr val="9E9E9E">
-                          <a:alpha val="0"/>
-                        </a:srgbClr>
-                      </a:solidFill>
-                      <a:prstDash val="solid"/>
-                      <a:round/>
-                      <a:headEnd type="none" w="sm" len="sm"/>
-                      <a:tailEnd type="none" w="sm" len="sm"/>
-                    </a:lnR>
-                    <a:lnT w="9525" cap="flat" cmpd="sng">
-                      <a:solidFill>
-                        <a:srgbClr val="9E9E9E">
-                          <a:alpha val="0"/>
-                        </a:srgbClr>
-                      </a:solidFill>
-                      <a:prstDash val="solid"/>
-                      <a:round/>
-                      <a:headEnd type="none" w="sm" len="sm"/>
-                      <a:tailEnd type="none" w="sm" len="sm"/>
-                    </a:lnT>
-                    <a:lnB w="9525" cap="flat" cmpd="sng">
-                      <a:solidFill>
-                        <a:srgbClr val="9E9E9E">
-                          <a:alpha val="0"/>
-                        </a:srgbClr>
-                      </a:solidFill>
-                      <a:prstDash val="solid"/>
-                      <a:round/>
-                      <a:headEnd type="none" w="sm" len="sm"/>
-                      <a:tailEnd type="none" w="sm" len="sm"/>
-                    </a:lnB>
-                  </a:tcPr>
-                </a:tc>
-                <a:tc>
-                  <a:txBody>
-                    <a:bodyPr/>
-                    <a:lstStyle/>
-                    <a:p>
-                      <a:pPr marL="0" lvl="0" indent="0" algn="ctr" rtl="0">
-                        <a:spcBef>
-                          <a:spcPts val="0"/>
-                        </a:spcBef>
-                        <a:spcAft>
-                          <a:spcPts val="0"/>
-                        </a:spcAft>
-                        <a:buNone/>
-                      </a:pPr>
-                      <a:r>
-                        <a:rPr lang="en-GB" dirty="0">
-                          <a:latin typeface="Proxima Nova"/>
-                          <a:ea typeface="Proxima Nova"/>
-                          <a:cs typeface="Proxima Nova"/>
-                          <a:sym typeface="Proxima Nova"/>
-                        </a:rPr>
-                        <a:t>13/8</a:t>
-                      </a:r>
-                      <a:endParaRPr dirty="0">
-                        <a:latin typeface="Proxima Nova"/>
-                        <a:ea typeface="Proxima Nova"/>
-                        <a:cs typeface="Proxima Nova"/>
-                        <a:sym typeface="Proxima Nova"/>
-                      </a:endParaRPr>
-                    </a:p>
-                  </a:txBody>
-                  <a:tcPr marL="91425" marR="91425" marT="91425" marB="91425" anchor="ctr">
-                    <a:lnL w="9525" cap="flat" cmpd="sng">
-                      <a:solidFill>
-                        <a:srgbClr val="9E9E9E">
-                          <a:alpha val="0"/>
-                        </a:srgbClr>
-                      </a:solidFill>
-                      <a:prstDash val="solid"/>
-                      <a:round/>
-                      <a:headEnd type="none" w="sm" len="sm"/>
-                      <a:tailEnd type="none" w="sm" len="sm"/>
-                    </a:lnL>
-                    <a:lnR w="9525" cap="flat" cmpd="sng">
-                      <a:solidFill>
-                        <a:srgbClr val="9E9E9E">
-                          <a:alpha val="0"/>
-                        </a:srgbClr>
-                      </a:solidFill>
-                      <a:prstDash val="solid"/>
-                      <a:round/>
-                      <a:headEnd type="none" w="sm" len="sm"/>
-                      <a:tailEnd type="none" w="sm" len="sm"/>
-                    </a:lnR>
-                    <a:lnT w="9525" cap="flat" cmpd="sng">
-                      <a:solidFill>
-                        <a:srgbClr val="9E9E9E">
-                          <a:alpha val="0"/>
-                        </a:srgbClr>
-                      </a:solidFill>
-                      <a:prstDash val="solid"/>
-                      <a:round/>
-                      <a:headEnd type="none" w="sm" len="sm"/>
-                      <a:tailEnd type="none" w="sm" len="sm"/>
-                    </a:lnT>
-                    <a:lnB w="9525" cap="flat" cmpd="sng">
-                      <a:solidFill>
-                        <a:srgbClr val="9E9E9E">
-                          <a:alpha val="0"/>
-                        </a:srgbClr>
-                      </a:solidFill>
-                      <a:prstDash val="solid"/>
-                      <a:round/>
-                      <a:headEnd type="none" w="sm" len="sm"/>
-                      <a:tailEnd type="none" w="sm" len="sm"/>
-                    </a:lnB>
-                  </a:tcPr>
-                </a:tc>
-                <a:tc>
-                  <a:txBody>
-                    <a:bodyPr/>
-                    <a:lstStyle/>
-                    <a:p>
-                      <a:pPr marL="0" lvl="0" indent="0" algn="ctr" rtl="0">
-                        <a:spcBef>
-                          <a:spcPts val="0"/>
-                        </a:spcBef>
-                        <a:spcAft>
-                          <a:spcPts val="0"/>
-                        </a:spcAft>
-                        <a:buNone/>
-                      </a:pPr>
-                      <a:r>
-                        <a:rPr lang="en-GB" dirty="0">
-                          <a:latin typeface="Proxima Nova"/>
-                          <a:ea typeface="Proxima Nova"/>
-                          <a:cs typeface="Proxima Nova"/>
-                          <a:sym typeface="Proxima Nova"/>
-                        </a:rPr>
-                        <a:t>Intro, </a:t>
-                      </a:r>
-                      <a:r>
-                        <a:rPr lang="en-GB" dirty="0" err="1">
-                          <a:latin typeface="Proxima Nova"/>
-                          <a:ea typeface="Proxima Nova"/>
-                          <a:cs typeface="Proxima Nova"/>
-                          <a:sym typeface="Proxima Nova"/>
-                        </a:rPr>
-                        <a:t>tipos</a:t>
-                      </a:r>
-                      <a:r>
-                        <a:rPr lang="en-GB" dirty="0">
-                          <a:latin typeface="Proxima Nova"/>
-                          <a:ea typeface="Proxima Nova"/>
-                          <a:cs typeface="Proxima Nova"/>
-                          <a:sym typeface="Proxima Nova"/>
-                        </a:rPr>
-                        <a:t> de </a:t>
-                      </a:r>
-                      <a:r>
-                        <a:rPr lang="en-GB" dirty="0" err="1">
-                          <a:latin typeface="Proxima Nova"/>
-                          <a:ea typeface="Proxima Nova"/>
-                          <a:cs typeface="Proxima Nova"/>
-                          <a:sym typeface="Proxima Nova"/>
-                        </a:rPr>
-                        <a:t>modelos</a:t>
-                      </a:r>
-                      <a:r>
-                        <a:rPr lang="en-GB" dirty="0">
-                          <a:latin typeface="Proxima Nova"/>
-                          <a:ea typeface="Proxima Nova"/>
-                          <a:cs typeface="Proxima Nova"/>
-                          <a:sym typeface="Proxima Nova"/>
-                        </a:rPr>
-                        <a:t>, trade-offs</a:t>
-                      </a:r>
-                      <a:endParaRPr dirty="0">
-                        <a:latin typeface="Proxima Nova"/>
-                        <a:ea typeface="Proxima Nova"/>
-                        <a:cs typeface="Proxima Nova"/>
-                        <a:sym typeface="Proxima Nova"/>
-                      </a:endParaRPr>
-                    </a:p>
-                  </a:txBody>
-                  <a:tcPr marL="91425" marR="91425" marT="91425" marB="91425" anchor="ctr">
-                    <a:lnL w="9525" cap="flat" cmpd="sng">
-                      <a:solidFill>
-                        <a:srgbClr val="9E9E9E">
-                          <a:alpha val="0"/>
-                        </a:srgbClr>
-                      </a:solidFill>
-                      <a:prstDash val="solid"/>
-                      <a:round/>
-                      <a:headEnd type="none" w="sm" len="sm"/>
-                      <a:tailEnd type="none" w="sm" len="sm"/>
-                    </a:lnL>
-                    <a:lnR w="9525" cap="flat" cmpd="sng">
-                      <a:solidFill>
-                        <a:srgbClr val="9E9E9E">
-                          <a:alpha val="0"/>
-                        </a:srgbClr>
-                      </a:solidFill>
-                      <a:prstDash val="solid"/>
-                      <a:round/>
-                      <a:headEnd type="none" w="sm" len="sm"/>
-                      <a:tailEnd type="none" w="sm" len="sm"/>
-                    </a:lnR>
-                    <a:lnT w="9525" cap="flat" cmpd="sng">
-                      <a:solidFill>
-                        <a:srgbClr val="9E9E9E">
-                          <a:alpha val="0"/>
-                        </a:srgbClr>
-                      </a:solidFill>
-                      <a:prstDash val="solid"/>
-                      <a:round/>
-                      <a:headEnd type="none" w="sm" len="sm"/>
-                      <a:tailEnd type="none" w="sm" len="sm"/>
-                    </a:lnT>
-                    <a:lnB w="9525" cap="flat" cmpd="sng">
-                      <a:solidFill>
-                        <a:srgbClr val="9E9E9E">
-                          <a:alpha val="0"/>
-                        </a:srgbClr>
-                      </a:solidFill>
-                      <a:prstDash val="solid"/>
-                      <a:round/>
-                      <a:headEnd type="none" w="sm" len="sm"/>
-                      <a:tailEnd type="none" w="sm" len="sm"/>
-                    </a:lnB>
-                  </a:tcPr>
-                </a:tc>
-                <a:tc>
-                  <a:txBody>
-                    <a:bodyPr/>
-                    <a:lstStyle/>
-                    <a:p>
-                      <a:pPr marL="0" lvl="0" indent="0" algn="ctr" rtl="0">
-                        <a:spcBef>
-                          <a:spcPts val="0"/>
-                        </a:spcBef>
-                        <a:spcAft>
-                          <a:spcPts val="0"/>
-                        </a:spcAft>
-                        <a:buNone/>
-                      </a:pPr>
-                      <a:r>
-                        <a:rPr lang="en-GB" sz="1200" dirty="0">
-                          <a:latin typeface="Proxima Nova"/>
-                          <a:ea typeface="Proxima Nova"/>
-                          <a:cs typeface="Proxima Nova"/>
-                          <a:sym typeface="Proxima Nova"/>
-                        </a:rPr>
-                        <a:t>Cap 2 ISLR + Cap 1 TMR + Caps 4 y 5 IMS</a:t>
-                      </a:r>
-                      <a:endParaRPr sz="1200" dirty="0">
-                        <a:latin typeface="Proxima Nova"/>
-                        <a:ea typeface="Proxima Nova"/>
-                        <a:cs typeface="Proxima Nova"/>
-                        <a:sym typeface="Proxima Nova"/>
-                      </a:endParaRPr>
-                    </a:p>
-                  </a:txBody>
-                  <a:tcPr marL="91425" marR="91425" marT="91425" marB="91425" anchor="ctr">
-                    <a:lnL w="9525" cap="flat" cmpd="sng">
-                      <a:solidFill>
-                        <a:srgbClr val="9E9E9E">
-                          <a:alpha val="0"/>
-                        </a:srgbClr>
-                      </a:solidFill>
-                      <a:prstDash val="solid"/>
-                      <a:round/>
-                      <a:headEnd type="none" w="sm" len="sm"/>
-                      <a:tailEnd type="none" w="sm" len="sm"/>
-                    </a:lnL>
-                    <a:lnR w="9525" cap="flat" cmpd="sng">
-                      <a:solidFill>
-                        <a:srgbClr val="9E9E9E">
-                          <a:alpha val="0"/>
-                        </a:srgbClr>
-                      </a:solidFill>
-                      <a:prstDash val="solid"/>
-                      <a:round/>
-                      <a:headEnd type="none" w="sm" len="sm"/>
-                      <a:tailEnd type="none" w="sm" len="sm"/>
-                    </a:lnR>
-                    <a:lnT w="9525" cap="flat" cmpd="sng">
-                      <a:solidFill>
-                        <a:srgbClr val="9E9E9E">
-                          <a:alpha val="0"/>
-                        </a:srgbClr>
-                      </a:solidFill>
-                      <a:prstDash val="solid"/>
-                      <a:round/>
-                      <a:headEnd type="none" w="sm" len="sm"/>
-                      <a:tailEnd type="none" w="sm" len="sm"/>
-                    </a:lnT>
-                    <a:lnB w="9525" cap="flat" cmpd="sng">
-                      <a:solidFill>
-                        <a:srgbClr val="9E9E9E">
-                          <a:alpha val="0"/>
-                        </a:srgbClr>
-                      </a:solidFill>
-                      <a:prstDash val="solid"/>
-                      <a:round/>
-                      <a:headEnd type="none" w="sm" len="sm"/>
-                      <a:tailEnd type="none" w="sm" len="sm"/>
-                    </a:lnB>
-                  </a:tcPr>
-                </a:tc>
-                <a:extLst>
-                  <a:ext uri="{0D108BD9-81ED-4DB2-BD59-A6C34878D82A}">
-                    <a16:rowId xmlns:a16="http://schemas.microsoft.com/office/drawing/2014/main" val="10001"/>
-                  </a:ext>
-                </a:extLst>
-              </a:tr>
-              <a:tr h="505525">
+              <a:tr h="514654">
                 <a:tc>
                   <a:txBody>
                     <a:bodyPr/>
@@ -14028,18 +13589,18 @@
                       <a:r>
                         <a:rPr lang="en-GB" dirty="0">
                           <a:solidFill>
-                            <a:srgbClr val="4BA173"/>
+                            <a:schemeClr val="tx1"/>
                           </a:solidFill>
                           <a:latin typeface="Proxima Nova"/>
                           <a:ea typeface="Proxima Nova"/>
                           <a:cs typeface="Proxima Nova"/>
                           <a:sym typeface="Proxima Nova"/>
                         </a:rPr>
-                        <a:t>2</a:t>
+                        <a:t>1</a:t>
                       </a:r>
                       <a:endParaRPr dirty="0">
                         <a:solidFill>
-                          <a:srgbClr val="4BA173"/>
+                          <a:schemeClr val="tx1"/>
                         </a:solidFill>
                         <a:latin typeface="Proxima Nova"/>
                         <a:ea typeface="Proxima Nova"/>
@@ -14112,15 +13673,156 @@
                       <a:r>
                         <a:rPr lang="en-GB" dirty="0">
                           <a:solidFill>
-                            <a:srgbClr val="4BA173"/>
+                            <a:schemeClr val="tx1"/>
                           </a:solidFill>
                           <a:latin typeface="Proxima Nova"/>
                           <a:ea typeface="Proxima Nova"/>
                           <a:cs typeface="Proxima Nova"/>
                           <a:sym typeface="Proxima Nova"/>
                         </a:rPr>
-                        <a:t>20/8</a:t>
+                        <a:t>Intro, </a:t>
                       </a:r>
+                      <a:r>
+                        <a:rPr lang="en-GB" dirty="0" err="1">
+                          <a:solidFill>
+                            <a:schemeClr val="tx1"/>
+                          </a:solidFill>
+                          <a:latin typeface="Proxima Nova"/>
+                          <a:ea typeface="Proxima Nova"/>
+                          <a:cs typeface="Proxima Nova"/>
+                          <a:sym typeface="Proxima Nova"/>
+                        </a:rPr>
+                        <a:t>tipos</a:t>
+                      </a:r>
+                      <a:r>
+                        <a:rPr lang="en-GB" dirty="0">
+                          <a:solidFill>
+                            <a:schemeClr val="tx1"/>
+                          </a:solidFill>
+                          <a:latin typeface="Proxima Nova"/>
+                          <a:ea typeface="Proxima Nova"/>
+                          <a:cs typeface="Proxima Nova"/>
+                          <a:sym typeface="Proxima Nova"/>
+                        </a:rPr>
+                        <a:t> de </a:t>
+                      </a:r>
+                      <a:r>
+                        <a:rPr lang="en-GB" dirty="0" err="1">
+                          <a:solidFill>
+                            <a:schemeClr val="tx1"/>
+                          </a:solidFill>
+                          <a:latin typeface="Proxima Nova"/>
+                          <a:ea typeface="Proxima Nova"/>
+                          <a:cs typeface="Proxima Nova"/>
+                          <a:sym typeface="Proxima Nova"/>
+                        </a:rPr>
+                        <a:t>modelos</a:t>
+                      </a:r>
+                      <a:r>
+                        <a:rPr lang="en-GB" dirty="0">
+                          <a:solidFill>
+                            <a:schemeClr val="tx1"/>
+                          </a:solidFill>
+                          <a:latin typeface="Proxima Nova"/>
+                          <a:ea typeface="Proxima Nova"/>
+                          <a:cs typeface="Proxima Nova"/>
+                          <a:sym typeface="Proxima Nova"/>
+                        </a:rPr>
+                        <a:t>, trade-offs</a:t>
+                      </a:r>
+                      <a:endParaRPr dirty="0">
+                        <a:solidFill>
+                          <a:schemeClr val="tx1"/>
+                        </a:solidFill>
+                        <a:latin typeface="Proxima Nova"/>
+                        <a:ea typeface="Proxima Nova"/>
+                        <a:cs typeface="Proxima Nova"/>
+                        <a:sym typeface="Proxima Nova"/>
+                      </a:endParaRPr>
+                    </a:p>
+                  </a:txBody>
+                  <a:tcPr marL="91425" marR="91425" marT="91425" marB="91425" anchor="ctr">
+                    <a:lnL w="9525" cap="flat" cmpd="sng" algn="ctr">
+                      <a:solidFill>
+                        <a:srgbClr val="9E9E9E">
+                          <a:alpha val="0"/>
+                        </a:srgbClr>
+                      </a:solidFill>
+                      <a:prstDash val="solid"/>
+                      <a:round/>
+                      <a:headEnd type="none" w="sm" len="sm"/>
+                      <a:tailEnd type="none" w="sm" len="sm"/>
+                    </a:lnL>
+                    <a:lnR w="9525" cap="flat" cmpd="sng">
+                      <a:solidFill>
+                        <a:srgbClr val="9E9E9E">
+                          <a:alpha val="0"/>
+                        </a:srgbClr>
+                      </a:solidFill>
+                      <a:prstDash val="solid"/>
+                      <a:round/>
+                      <a:headEnd type="none" w="sm" len="sm"/>
+                      <a:tailEnd type="none" w="sm" len="sm"/>
+                    </a:lnR>
+                    <a:lnT w="9525" cap="flat" cmpd="sng" algn="ctr">
+                      <a:solidFill>
+                        <a:srgbClr val="9E9E9E">
+                          <a:alpha val="0"/>
+                        </a:srgbClr>
+                      </a:solidFill>
+                      <a:prstDash val="solid"/>
+                      <a:round/>
+                      <a:headEnd type="none" w="sm" len="sm"/>
+                      <a:tailEnd type="none" w="sm" len="sm"/>
+                    </a:lnT>
+                    <a:lnB w="9525" cap="flat" cmpd="sng" algn="ctr">
+                      <a:solidFill>
+                        <a:srgbClr val="9E9E9E">
+                          <a:alpha val="0"/>
+                        </a:srgbClr>
+                      </a:solidFill>
+                      <a:prstDash val="solid"/>
+                      <a:round/>
+                      <a:headEnd type="none" w="sm" len="sm"/>
+                      <a:tailEnd type="none" w="sm" len="sm"/>
+                    </a:lnB>
+                  </a:tcPr>
+                </a:tc>
+                <a:tc>
+                  <a:txBody>
+                    <a:bodyPr/>
+                    <a:lstStyle/>
+                    <a:p>
+                      <a:pPr marL="0" lvl="0" indent="0" algn="ctr" rtl="0">
+                        <a:spcBef>
+                          <a:spcPts val="0"/>
+                        </a:spcBef>
+                        <a:spcAft>
+                          <a:spcPts val="0"/>
+                        </a:spcAft>
+                        <a:buNone/>
+                      </a:pPr>
+                      <a:r>
+                        <a:rPr lang="en-GB" sz="1200" dirty="0">
+                          <a:solidFill>
+                            <a:schemeClr val="tx1"/>
+                          </a:solidFill>
+                          <a:latin typeface="Proxima Nova"/>
+                          <a:ea typeface="Proxima Nova"/>
+                          <a:cs typeface="Proxima Nova"/>
+                          <a:sym typeface="Proxima Nova"/>
+                        </a:rPr>
+                        <a:t>Cap 2 ISLR + Cap 1 TMR + Caps 4 y 5 IMS</a:t>
+                      </a:r>
+                      <a:endParaRPr sz="1200" dirty="0">
+                        <a:solidFill>
+                          <a:schemeClr val="tx1"/>
+                        </a:solidFill>
+                        <a:latin typeface="Proxima Nova"/>
+                        <a:ea typeface="Proxima Nova"/>
+                        <a:cs typeface="Proxima Nova"/>
+                        <a:sym typeface="Proxima Nova"/>
+                      </a:endParaRPr>
                     </a:p>
                   </a:txBody>
                   <a:tcPr marL="91425" marR="91425" marT="91425" marB="91425" anchor="ctr">
@@ -14170,6 +13872,13 @@
                     </a:lnB>
                   </a:tcPr>
                 </a:tc>
+                <a:extLst>
+                  <a:ext uri="{0D108BD9-81ED-4DB2-BD59-A6C34878D82A}">
+                    <a16:rowId xmlns:a16="http://schemas.microsoft.com/office/drawing/2014/main" val="10001"/>
+                  </a:ext>
+                </a:extLst>
+              </a:tr>
+              <a:tr h="620578">
                 <a:tc>
                   <a:txBody>
                     <a:bodyPr/>
@@ -14185,55 +13894,20 @@
                         <a:buNone/>
                       </a:pPr>
                       <a:r>
-                        <a:rPr lang="es-AR" dirty="0">
+                        <a:rPr lang="en-GB" dirty="0">
                           <a:solidFill>
-                            <a:srgbClr val="4BA173"/>
+                            <a:schemeClr val="bg2"/>
                           </a:solidFill>
                           <a:latin typeface="Proxima Nova"/>
                           <a:ea typeface="Proxima Nova"/>
                           <a:cs typeface="Proxima Nova"/>
                           <a:sym typeface="Proxima Nova"/>
                         </a:rPr>
-                        <a:t>Explorando y transformando variables. </a:t>
-                      </a:r>
-                    </a:p>
-                    <a:p>
-                      <a:pPr marL="0" lvl="0" indent="0" algn="ctr" rtl="0">
-                        <a:spcBef>
-                          <a:spcPts val="0"/>
-                        </a:spcBef>
-                        <a:spcAft>
-                          <a:spcPts val="0"/>
-                        </a:spcAft>
-                        <a:buNone/>
-                      </a:pPr>
-                      <a:r>
-                        <a:rPr lang="es-AR" dirty="0" err="1">
-                          <a:solidFill>
-                            <a:srgbClr val="4BA173"/>
-                          </a:solidFill>
-                          <a:latin typeface="Proxima Nova"/>
-                          <a:ea typeface="Proxima Nova"/>
-                          <a:cs typeface="Proxima Nova"/>
-                          <a:sym typeface="Proxima Nova"/>
-                        </a:rPr>
-                        <a:t>Intro</a:t>
-                      </a:r>
-                      <a:r>
-                        <a:rPr lang="es-AR" dirty="0">
-                          <a:solidFill>
-                            <a:srgbClr val="4BA173"/>
-                          </a:solidFill>
-                          <a:latin typeface="Proxima Nova"/>
-                          <a:ea typeface="Proxima Nova"/>
-                          <a:cs typeface="Proxima Nova"/>
-                          <a:sym typeface="Proxima Nova"/>
-                        </a:rPr>
-                        <a:t> a regresión lineal simple</a:t>
+                        <a:t>2</a:t>
                       </a:r>
                       <a:endParaRPr dirty="0">
                         <a:solidFill>
-                          <a:srgbClr val="4BA173"/>
+                          <a:schemeClr val="bg2"/>
                         </a:solidFill>
                         <a:latin typeface="Proxima Nova"/>
                         <a:ea typeface="Proxima Nova"/>
@@ -14304,33 +13978,140 @@
                         <a:buNone/>
                       </a:pPr>
                       <a:r>
-                        <a:rPr lang="es-AR" sz="1200" dirty="0" err="1">
+                        <a:rPr lang="es-AR" dirty="0">
                           <a:solidFill>
-                            <a:srgbClr val="4BA173"/>
+                            <a:schemeClr val="bg2"/>
                           </a:solidFill>
                           <a:latin typeface="Proxima Nova"/>
                           <a:ea typeface="Proxima Nova"/>
                           <a:cs typeface="Proxima Nova"/>
                           <a:sym typeface="Proxima Nova"/>
                         </a:rPr>
-                        <a:t>Cap</a:t>
+                        <a:t>Explorando y transformando variables. </a:t>
                       </a:r>
+                    </a:p>
+                    <a:p>
+                      <a:pPr marL="0" lvl="0" indent="0" algn="ctr" rtl="0">
+                        <a:spcBef>
+                          <a:spcPts val="0"/>
+                        </a:spcBef>
+                        <a:spcAft>
+                          <a:spcPts val="0"/>
+                        </a:spcAft>
+                        <a:buNone/>
+                      </a:pPr>
                       <a:r>
-                        <a:rPr lang="es-AR" sz="1200">
+                        <a:rPr lang="es-AR" dirty="0" err="1">
                           <a:solidFill>
-                            <a:srgbClr val="4BA173"/>
+                            <a:schemeClr val="bg2"/>
                           </a:solidFill>
                           <a:latin typeface="Proxima Nova"/>
                           <a:ea typeface="Proxima Nova"/>
                           <a:cs typeface="Proxima Nova"/>
                           <a:sym typeface="Proxima Nova"/>
                         </a:rPr>
-                        <a:t> 3 </a:t>
+                        <a:t>Intro</a:t>
                       </a:r>
                       <a:r>
-                        <a:rPr lang="en-GB" sz="1200">
+                        <a:rPr lang="es-AR" dirty="0">
                           <a:solidFill>
-                            <a:srgbClr val="4BA173"/>
+                            <a:schemeClr val="bg2"/>
+                          </a:solidFill>
+                          <a:latin typeface="Proxima Nova"/>
+                          <a:ea typeface="Proxima Nova"/>
+                          <a:cs typeface="Proxima Nova"/>
+                          <a:sym typeface="Proxima Nova"/>
+                        </a:rPr>
+                        <a:t> a regresión lineal simple</a:t>
+                      </a:r>
+                      <a:endParaRPr dirty="0">
+                        <a:solidFill>
+                          <a:schemeClr val="bg2"/>
+                        </a:solidFill>
+                        <a:latin typeface="Proxima Nova"/>
+                        <a:ea typeface="Proxima Nova"/>
+                        <a:cs typeface="Proxima Nova"/>
+                        <a:sym typeface="Proxima Nova"/>
+                      </a:endParaRPr>
+                    </a:p>
+                  </a:txBody>
+                  <a:tcPr marL="91425" marR="91425" marT="91425" marB="91425" anchor="ctr">
+                    <a:lnL w="9525" cap="flat" cmpd="sng" algn="ctr">
+                      <a:solidFill>
+                        <a:srgbClr val="9E9E9E">
+                          <a:alpha val="0"/>
+                        </a:srgbClr>
+                      </a:solidFill>
+                      <a:prstDash val="solid"/>
+                      <a:round/>
+                      <a:headEnd type="none" w="sm" len="sm"/>
+                      <a:tailEnd type="none" w="sm" len="sm"/>
+                    </a:lnL>
+                    <a:lnR w="9525" cap="flat" cmpd="sng">
+                      <a:solidFill>
+                        <a:srgbClr val="9E9E9E">
+                          <a:alpha val="0"/>
+                        </a:srgbClr>
+                      </a:solidFill>
+                      <a:prstDash val="solid"/>
+                      <a:round/>
+                      <a:headEnd type="none" w="sm" len="sm"/>
+                      <a:tailEnd type="none" w="sm" len="sm"/>
+                    </a:lnR>
+                    <a:lnT w="9525" cap="flat" cmpd="sng" algn="ctr">
+                      <a:solidFill>
+                        <a:srgbClr val="9E9E9E">
+                          <a:alpha val="0"/>
+                        </a:srgbClr>
+                      </a:solidFill>
+                      <a:prstDash val="solid"/>
+                      <a:round/>
+                      <a:headEnd type="none" w="sm" len="sm"/>
+                      <a:tailEnd type="none" w="sm" len="sm"/>
+                    </a:lnT>
+                    <a:lnB w="9525" cap="flat" cmpd="sng" algn="ctr">
+                      <a:solidFill>
+                        <a:srgbClr val="9E9E9E">
+                          <a:alpha val="0"/>
+                        </a:srgbClr>
+                      </a:solidFill>
+                      <a:prstDash val="solid"/>
+                      <a:round/>
+                      <a:headEnd type="none" w="sm" len="sm"/>
+                      <a:tailEnd type="none" w="sm" len="sm"/>
+                    </a:lnB>
+                  </a:tcPr>
+                </a:tc>
+                <a:tc>
+                  <a:txBody>
+                    <a:bodyPr/>
+                    <a:lstStyle/>
+                    <a:p>
+                      <a:pPr marL="0" lvl="0" indent="0" algn="ctr" rtl="0">
+                        <a:spcBef>
+                          <a:spcPts val="0"/>
+                        </a:spcBef>
+                        <a:spcAft>
+                          <a:spcPts val="0"/>
+                        </a:spcAft>
+                        <a:buNone/>
+                      </a:pPr>
+                      <a:r>
+                        <a:rPr lang="es-AR" sz="1200" dirty="0">
+                          <a:solidFill>
+                            <a:schemeClr val="bg2"/>
+                          </a:solidFill>
+                          <a:latin typeface="Proxima Nova"/>
+                          <a:ea typeface="Proxima Nova"/>
+                          <a:cs typeface="Proxima Nova"/>
+                          <a:sym typeface="Proxima Nova"/>
+                        </a:rPr>
+                        <a:t>Cap 3.1 </a:t>
+                      </a:r>
+                      <a:r>
+                        <a:rPr lang="en-GB" sz="1200" dirty="0">
+                          <a:solidFill>
+                            <a:schemeClr val="bg2"/>
                           </a:solidFill>
                           <a:latin typeface="Proxima Nova"/>
                           <a:ea typeface="Proxima Nova"/>
@@ -14342,7 +14123,7 @@
                       <a:r>
                         <a:rPr lang="es-AR" sz="1200" dirty="0">
                           <a:solidFill>
-                            <a:srgbClr val="4BA173"/>
+                            <a:schemeClr val="bg2"/>
                           </a:solidFill>
                           <a:latin typeface="Proxima Nova"/>
                           <a:ea typeface="Proxima Nova"/>
@@ -14354,7 +14135,7 @@
                       <a:r>
                         <a:rPr lang="es-AR" sz="1200" dirty="0" err="1">
                           <a:solidFill>
-                            <a:srgbClr val="4BA173"/>
+                            <a:schemeClr val="bg2"/>
                           </a:solidFill>
                           <a:latin typeface="Proxima Nova"/>
                           <a:ea typeface="Proxima Nova"/>
@@ -14366,7 +14147,7 @@
                       <a:r>
                         <a:rPr lang="es-AR" sz="1200" dirty="0">
                           <a:solidFill>
-                            <a:srgbClr val="4BA173"/>
+                            <a:schemeClr val="bg2"/>
                           </a:solidFill>
                           <a:latin typeface="Proxima Nova"/>
                           <a:ea typeface="Proxima Nova"/>
@@ -14378,7 +14159,7 @@
                       <a:r>
                         <a:rPr lang="es-AR" sz="1200" dirty="0" err="1">
                           <a:solidFill>
-                            <a:srgbClr val="4BA173"/>
+                            <a:schemeClr val="bg2"/>
                           </a:solidFill>
                           <a:latin typeface="Proxima Nova"/>
                           <a:ea typeface="Proxima Nova"/>
@@ -14390,7 +14171,7 @@
                       <a:r>
                         <a:rPr lang="es-AR" sz="1200" dirty="0">
                           <a:solidFill>
-                            <a:srgbClr val="4BA173"/>
+                            <a:schemeClr val="bg2"/>
                           </a:solidFill>
                           <a:latin typeface="Proxima Nova"/>
                           <a:ea typeface="Proxima Nova"/>
@@ -14454,7 +14235,7 @@
                   </a:ext>
                 </a:extLst>
               </a:tr>
-              <a:tr h="505525">
+              <a:tr h="514654">
                 <a:tc>
                   <a:txBody>
                     <a:bodyPr/>
@@ -14548,18 +14329,24 @@
                         <a:buNone/>
                       </a:pPr>
                       <a:r>
-                        <a:rPr lang="en-GB" dirty="0">
+                        <a:rPr lang="es-AR" dirty="0">
                           <a:latin typeface="Proxima Nova"/>
                           <a:ea typeface="Proxima Nova"/>
                           <a:cs typeface="Proxima Nova"/>
                           <a:sym typeface="Proxima Nova"/>
                         </a:rPr>
-                        <a:t>27/8</a:t>
+                        <a:t>Regresión lineal múltiple</a:t>
                       </a:r>
+                      <a:endParaRPr dirty="0">
+                        <a:latin typeface="Proxima Nova"/>
+                        <a:ea typeface="Proxima Nova"/>
+                        <a:cs typeface="Proxima Nova"/>
+                        <a:sym typeface="Proxima Nova"/>
+                      </a:endParaRPr>
                     </a:p>
                   </a:txBody>
                   <a:tcPr marL="91425" marR="91425" marT="91425" marB="91425" anchor="ctr">
-                    <a:lnL w="9525" cap="flat" cmpd="sng">
+                    <a:lnL w="9525" cap="flat" cmpd="sng" algn="ctr">
                       <a:solidFill>
                         <a:srgbClr val="9E9E9E">
                           <a:alpha val="0"/>
@@ -14581,7 +14368,7 @@
                       <a:headEnd type="none" w="sm" len="sm"/>
                       <a:tailEnd type="none" w="sm" len="sm"/>
                     </a:lnR>
-                    <a:lnT w="9525" cap="flat" cmpd="sng">
+                    <a:lnT w="9525" cap="flat" cmpd="sng" algn="ctr">
                       <a:solidFill>
                         <a:srgbClr val="9E9E9E">
                           <a:alpha val="0"/>
@@ -14592,7 +14379,7 @@
                       <a:headEnd type="none" w="sm" len="sm"/>
                       <a:tailEnd type="none" w="sm" len="sm"/>
                     </a:lnT>
-                    <a:lnB w="9525" cap="flat" cmpd="sng">
+                    <a:lnB w="9525" cap="flat" cmpd="sng" algn="ctr">
                       <a:solidFill>
                         <a:srgbClr val="9E9E9E">
                           <a:alpha val="0"/>
@@ -14620,100 +14407,13 @@
                         <a:buNone/>
                       </a:pPr>
                       <a:r>
-                        <a:rPr lang="es-AR" dirty="0">
-                          <a:latin typeface="Proxima Nova"/>
-                          <a:ea typeface="Proxima Nova"/>
-                          <a:cs typeface="Proxima Nova"/>
-                          <a:sym typeface="Proxima Nova"/>
-                        </a:rPr>
-                        <a:t>Regresión lineal múltiple</a:t>
-                      </a:r>
-                      <a:endParaRPr dirty="0">
-                        <a:latin typeface="Proxima Nova"/>
-                        <a:ea typeface="Proxima Nova"/>
-                        <a:cs typeface="Proxima Nova"/>
-                        <a:sym typeface="Proxima Nova"/>
-                      </a:endParaRPr>
-                    </a:p>
-                  </a:txBody>
-                  <a:tcPr marL="91425" marR="91425" marT="91425" marB="91425" anchor="ctr">
-                    <a:lnL w="9525" cap="flat" cmpd="sng">
-                      <a:solidFill>
-                        <a:srgbClr val="9E9E9E">
-                          <a:alpha val="0"/>
-                        </a:srgbClr>
-                      </a:solidFill>
-                      <a:prstDash val="solid"/>
-                      <a:round/>
-                      <a:headEnd type="none" w="sm" len="sm"/>
-                      <a:tailEnd type="none" w="sm" len="sm"/>
-                    </a:lnL>
-                    <a:lnR w="9525" cap="flat" cmpd="sng">
-                      <a:solidFill>
-                        <a:srgbClr val="9E9E9E">
-                          <a:alpha val="0"/>
-                        </a:srgbClr>
-                      </a:solidFill>
-                      <a:prstDash val="solid"/>
-                      <a:round/>
-                      <a:headEnd type="none" w="sm" len="sm"/>
-                      <a:tailEnd type="none" w="sm" len="sm"/>
-                    </a:lnR>
-                    <a:lnT w="9525" cap="flat" cmpd="sng">
-                      <a:solidFill>
-                        <a:srgbClr val="9E9E9E">
-                          <a:alpha val="0"/>
-                        </a:srgbClr>
-                      </a:solidFill>
-                      <a:prstDash val="solid"/>
-                      <a:round/>
-                      <a:headEnd type="none" w="sm" len="sm"/>
-                      <a:tailEnd type="none" w="sm" len="sm"/>
-                    </a:lnT>
-                    <a:lnB w="9525" cap="flat" cmpd="sng">
-                      <a:solidFill>
-                        <a:srgbClr val="9E9E9E">
-                          <a:alpha val="0"/>
-                        </a:srgbClr>
-                      </a:solidFill>
-                      <a:prstDash val="solid"/>
-                      <a:round/>
-                      <a:headEnd type="none" w="sm" len="sm"/>
-                      <a:tailEnd type="none" w="sm" len="sm"/>
-                    </a:lnB>
-                  </a:tcPr>
-                </a:tc>
-                <a:tc>
-                  <a:txBody>
-                    <a:bodyPr/>
-                    <a:lstStyle/>
-                    <a:p>
-                      <a:pPr marL="0" lvl="0" indent="0" algn="ctr" rtl="0">
-                        <a:spcBef>
-                          <a:spcPts val="0"/>
-                        </a:spcBef>
-                        <a:spcAft>
-                          <a:spcPts val="0"/>
-                        </a:spcAft>
-                        <a:buNone/>
-                      </a:pPr>
-                      <a:r>
-                        <a:rPr lang="es-AR" sz="1200" dirty="0" err="1">
-                          <a:latin typeface="Proxima Nova"/>
-                          <a:ea typeface="Proxima Nova"/>
-                          <a:cs typeface="Proxima Nova"/>
-                          <a:sym typeface="Proxima Nova"/>
-                        </a:rPr>
-                        <a:t>Cap</a:t>
-                      </a:r>
-                      <a:r>
                         <a:rPr lang="es-AR" sz="1200" dirty="0">
                           <a:latin typeface="Proxima Nova"/>
                           <a:ea typeface="Proxima Nova"/>
                           <a:cs typeface="Proxima Nova"/>
                           <a:sym typeface="Proxima Nova"/>
                         </a:rPr>
-                        <a:t> 3 </a:t>
+                        <a:t>Cap 3.2 a 3.6 </a:t>
                       </a:r>
                       <a:r>
                         <a:rPr lang="en-GB" sz="1200" dirty="0">
@@ -14824,7 +14524,7 @@
                   </a:ext>
                 </a:extLst>
               </a:tr>
-              <a:tr h="505525">
+              <a:tr h="514654">
                 <a:tc>
                   <a:txBody>
                     <a:bodyPr/>
@@ -14918,96 +14618,6 @@
                         <a:buNone/>
                       </a:pPr>
                       <a:r>
-                        <a:rPr lang="en-GB" dirty="0">
-                          <a:latin typeface="Proxima Nova"/>
-                          <a:ea typeface="Proxima Nova"/>
-                          <a:cs typeface="Proxima Nova"/>
-                          <a:sym typeface="Proxima Nova"/>
-                        </a:rPr>
-                        <a:t>3/9</a:t>
-                      </a:r>
-                    </a:p>
-                  </a:txBody>
-                  <a:tcPr marL="91425" marR="91425" marT="91425" marB="91425" anchor="ctr">
-                    <a:lnL w="9525" cap="flat" cmpd="sng">
-                      <a:solidFill>
-                        <a:srgbClr val="9E9E9E">
-                          <a:alpha val="0"/>
-                        </a:srgbClr>
-                      </a:solidFill>
-                      <a:prstDash val="solid"/>
-                      <a:round/>
-                      <a:headEnd type="none" w="sm" len="sm"/>
-                      <a:tailEnd type="none" w="sm" len="sm"/>
-                    </a:lnL>
-                    <a:lnR w="9525" cap="flat" cmpd="sng">
-                      <a:solidFill>
-                        <a:srgbClr val="9E9E9E">
-                          <a:alpha val="0"/>
-                        </a:srgbClr>
-                      </a:solidFill>
-                      <a:prstDash val="solid"/>
-                      <a:round/>
-                      <a:headEnd type="none" w="sm" len="sm"/>
-                      <a:tailEnd type="none" w="sm" len="sm"/>
-                    </a:lnR>
-                    <a:lnT w="9525" cap="flat" cmpd="sng">
-                      <a:solidFill>
-                        <a:srgbClr val="9E9E9E">
-                          <a:alpha val="0"/>
-                        </a:srgbClr>
-                      </a:solidFill>
-                      <a:prstDash val="solid"/>
-                      <a:round/>
-                      <a:headEnd type="none" w="sm" len="sm"/>
-                      <a:tailEnd type="none" w="sm" len="sm"/>
-                    </a:lnT>
-                    <a:lnB w="9525" cap="flat" cmpd="sng">
-                      <a:solidFill>
-                        <a:srgbClr val="9E9E9E">
-                          <a:alpha val="0"/>
-                        </a:srgbClr>
-                      </a:solidFill>
-                      <a:prstDash val="solid"/>
-                      <a:round/>
-                      <a:headEnd type="none" w="sm" len="sm"/>
-                      <a:tailEnd type="none" w="sm" len="sm"/>
-                    </a:lnB>
-                  </a:tcPr>
-                </a:tc>
-                <a:tc>
-                  <a:txBody>
-                    <a:bodyPr/>
-                    <a:lstStyle/>
-                    <a:p>
-                      <a:pPr marL="0" lvl="0" indent="0" algn="ctr" rtl="0">
-                        <a:spcBef>
-                          <a:spcPts val="0"/>
-                        </a:spcBef>
-                        <a:spcAft>
-                          <a:spcPts val="0"/>
-                        </a:spcAft>
-                        <a:buNone/>
-                      </a:pPr>
-                      <a:r>
-                        <a:rPr lang="en-GB" dirty="0" err="1">
-                          <a:latin typeface="Proxima Nova"/>
-                          <a:ea typeface="Proxima Nova"/>
-                          <a:cs typeface="Proxima Nova"/>
-                          <a:sym typeface="Proxima Nova"/>
-                        </a:rPr>
-                        <a:t>Clasificación</a:t>
-                      </a:r>
-                      <a:r>
-                        <a:rPr lang="en-GB" dirty="0">
-                          <a:latin typeface="Proxima Nova"/>
-                          <a:ea typeface="Proxima Nova"/>
-                          <a:cs typeface="Proxima Nova"/>
-                          <a:sym typeface="Proxima Nova"/>
-                        </a:rPr>
-                        <a:t> 1 - </a:t>
-                      </a:r>
-                      <a:r>
                         <a:rPr lang="en-GB" dirty="0" err="1">
                           <a:latin typeface="Proxima Nova"/>
                           <a:ea typeface="Proxima Nova"/>
@@ -15043,7 +14653,7 @@
                     </a:p>
                   </a:txBody>
                   <a:tcPr marL="91425" marR="91425" marT="91425" marB="91425" anchor="ctr">
-                    <a:lnL w="9525" cap="flat" cmpd="sng">
+                    <a:lnL w="9525" cap="flat" cmpd="sng" algn="ctr">
                       <a:solidFill>
                         <a:srgbClr val="9E9E9E">
                           <a:alpha val="0"/>
@@ -15065,7 +14675,7 @@
                       <a:headEnd type="none" w="sm" len="sm"/>
                       <a:tailEnd type="none" w="sm" len="sm"/>
                     </a:lnR>
-                    <a:lnT w="9525" cap="flat" cmpd="sng">
+                    <a:lnT w="9525" cap="flat" cmpd="sng" algn="ctr">
                       <a:solidFill>
                         <a:srgbClr val="9E9E9E">
                           <a:alpha val="0"/>
@@ -15076,7 +14686,7 @@
                       <a:headEnd type="none" w="sm" len="sm"/>
                       <a:tailEnd type="none" w="sm" len="sm"/>
                     </a:lnT>
-                    <a:lnB w="9525" cap="flat" cmpd="sng">
+                    <a:lnB w="9525" cap="flat" cmpd="sng" algn="ctr">
                       <a:solidFill>
                         <a:srgbClr val="9E9E9E">
                           <a:alpha val="0"/>
@@ -15212,7 +14822,7 @@
                   </a:ext>
                 </a:extLst>
               </a:tr>
-              <a:tr h="505525">
+              <a:tr h="514654">
                 <a:tc>
                   <a:txBody>
                     <a:bodyPr/>
@@ -15312,12 +14922,18 @@
                           <a:cs typeface="Proxima Nova"/>
                           <a:sym typeface="Proxima Nova"/>
                         </a:rPr>
-                        <a:t>10/9</a:t>
+                        <a:t>LASSO</a:t>
                       </a:r>
+                      <a:endParaRPr dirty="0">
+                        <a:latin typeface="Proxima Nova"/>
+                        <a:ea typeface="Proxima Nova"/>
+                        <a:cs typeface="Proxima Nova"/>
+                        <a:sym typeface="Proxima Nova"/>
+                      </a:endParaRPr>
                     </a:p>
                   </a:txBody>
                   <a:tcPr marL="91425" marR="91425" marT="91425" marB="91425" anchor="ctr">
-                    <a:lnL w="9525" cap="flat" cmpd="sng">
+                    <a:lnL w="9525" cap="flat" cmpd="sng" algn="ctr">
                       <a:solidFill>
                         <a:srgbClr val="9E9E9E">
                           <a:alpha val="0"/>
@@ -15339,7 +14955,7 @@
                       <a:headEnd type="none" w="sm" len="sm"/>
                       <a:tailEnd type="none" w="sm" len="sm"/>
                     </a:lnR>
-                    <a:lnT w="9525" cap="flat" cmpd="sng">
+                    <a:lnT w="9525" cap="flat" cmpd="sng" algn="ctr">
                       <a:solidFill>
                         <a:srgbClr val="9E9E9E">
                           <a:alpha val="0"/>
@@ -15350,7 +14966,7 @@
                       <a:headEnd type="none" w="sm" len="sm"/>
                       <a:tailEnd type="none" w="sm" len="sm"/>
                     </a:lnT>
-                    <a:lnB w="9525" cap="flat" cmpd="sng">
+                    <a:lnB w="9525" cap="flat" cmpd="sng" algn="ctr">
                       <a:solidFill>
                         <a:srgbClr val="9E9E9E">
                           <a:alpha val="0"/>
@@ -15378,109 +14994,13 @@
                         <a:buNone/>
                       </a:pPr>
                       <a:r>
-                        <a:rPr lang="en-GB" dirty="0" err="1">
-                          <a:latin typeface="Proxima Nova"/>
-                          <a:ea typeface="Proxima Nova"/>
-                          <a:cs typeface="Proxima Nova"/>
-                          <a:sym typeface="Proxima Nova"/>
-                        </a:rPr>
-                        <a:t>Clasificación</a:t>
-                      </a:r>
-                      <a:r>
-                        <a:rPr lang="en-GB" dirty="0">
-                          <a:latin typeface="Proxima Nova"/>
-                          <a:ea typeface="Proxima Nova"/>
-                          <a:cs typeface="Proxima Nova"/>
-                          <a:sym typeface="Proxima Nova"/>
-                        </a:rPr>
-                        <a:t> 2 – KNN y LDA</a:t>
-                      </a:r>
-                      <a:endParaRPr dirty="0">
-                        <a:latin typeface="Proxima Nova"/>
-                        <a:ea typeface="Proxima Nova"/>
-                        <a:cs typeface="Proxima Nova"/>
-                        <a:sym typeface="Proxima Nova"/>
-                      </a:endParaRPr>
-                    </a:p>
-                  </a:txBody>
-                  <a:tcPr marL="91425" marR="91425" marT="91425" marB="91425" anchor="ctr">
-                    <a:lnL w="9525" cap="flat" cmpd="sng">
-                      <a:solidFill>
-                        <a:srgbClr val="9E9E9E">
-                          <a:alpha val="0"/>
-                        </a:srgbClr>
-                      </a:solidFill>
-                      <a:prstDash val="solid"/>
-                      <a:round/>
-                      <a:headEnd type="none" w="sm" len="sm"/>
-                      <a:tailEnd type="none" w="sm" len="sm"/>
-                    </a:lnL>
-                    <a:lnR w="9525" cap="flat" cmpd="sng">
-                      <a:solidFill>
-                        <a:srgbClr val="9E9E9E">
-                          <a:alpha val="0"/>
-                        </a:srgbClr>
-                      </a:solidFill>
-                      <a:prstDash val="solid"/>
-                      <a:round/>
-                      <a:headEnd type="none" w="sm" len="sm"/>
-                      <a:tailEnd type="none" w="sm" len="sm"/>
-                    </a:lnR>
-                    <a:lnT w="9525" cap="flat" cmpd="sng">
-                      <a:solidFill>
-                        <a:srgbClr val="9E9E9E">
-                          <a:alpha val="0"/>
-                        </a:srgbClr>
-                      </a:solidFill>
-                      <a:prstDash val="solid"/>
-                      <a:round/>
-                      <a:headEnd type="none" w="sm" len="sm"/>
-                      <a:tailEnd type="none" w="sm" len="sm"/>
-                    </a:lnT>
-                    <a:lnB w="9525" cap="flat" cmpd="sng">
-                      <a:solidFill>
-                        <a:srgbClr val="9E9E9E">
-                          <a:alpha val="0"/>
-                        </a:srgbClr>
-                      </a:solidFill>
-                      <a:prstDash val="solid"/>
-                      <a:round/>
-                      <a:headEnd type="none" w="sm" len="sm"/>
-                      <a:tailEnd type="none" w="sm" len="sm"/>
-                    </a:lnB>
-                  </a:tcPr>
-                </a:tc>
-                <a:tc>
-                  <a:txBody>
-                    <a:bodyPr/>
-                    <a:lstStyle/>
-                    <a:p>
-                      <a:pPr marL="0" lvl="0" indent="0" algn="ctr" rtl="0">
-                        <a:spcBef>
-                          <a:spcPts val="0"/>
-                        </a:spcBef>
-                        <a:spcAft>
-                          <a:spcPts val="0"/>
-                        </a:spcAft>
-                        <a:buNone/>
-                      </a:pPr>
-                      <a:r>
-                        <a:rPr lang="es-AR" sz="1200" dirty="0" err="1">
-                          <a:latin typeface="Proxima Nova"/>
-                          <a:ea typeface="Proxima Nova"/>
-                          <a:cs typeface="Proxima Nova"/>
-                          <a:sym typeface="Proxima Nova"/>
-                        </a:rPr>
-                        <a:t>Cap</a:t>
-                      </a:r>
-                      <a:r>
                         <a:rPr lang="es-AR" sz="1200" dirty="0">
                           <a:latin typeface="Proxima Nova"/>
                           <a:ea typeface="Proxima Nova"/>
                           <a:cs typeface="Proxima Nova"/>
                           <a:sym typeface="Proxima Nova"/>
                         </a:rPr>
-                        <a:t> 4.4 </a:t>
+                        <a:t>Cap 6.1 a 6.2 </a:t>
                       </a:r>
                       <a:r>
                         <a:rPr lang="en-GB" sz="1200" dirty="0">
@@ -15552,7 +15072,7 @@
                   </a:ext>
                 </a:extLst>
               </a:tr>
-              <a:tr h="505525">
+              <a:tr h="514654">
                 <a:tc>
                   <a:txBody>
                     <a:bodyPr/>
@@ -15577,84 +15097,6 @@
                         <a:t>6</a:t>
                       </a:r>
                       <a:endParaRPr>
-                        <a:latin typeface="Proxima Nova"/>
-                        <a:ea typeface="Proxima Nova"/>
-                        <a:cs typeface="Proxima Nova"/>
-                        <a:sym typeface="Proxima Nova"/>
-                      </a:endParaRPr>
-                    </a:p>
-                  </a:txBody>
-                  <a:tcPr marL="91425" marR="91425" marT="91425" marB="91425" anchor="ctr">
-                    <a:lnL w="9525" cap="flat" cmpd="sng">
-                      <a:solidFill>
-                        <a:srgbClr val="9E9E9E">
-                          <a:alpha val="0"/>
-                        </a:srgbClr>
-                      </a:solidFill>
-                      <a:prstDash val="solid"/>
-                      <a:round/>
-                      <a:headEnd type="none" w="sm" len="sm"/>
-                      <a:tailEnd type="none" w="sm" len="sm"/>
-                    </a:lnL>
-                    <a:lnR w="9525" cap="flat" cmpd="sng">
-                      <a:solidFill>
-                        <a:srgbClr val="9E9E9E">
-                          <a:alpha val="0"/>
-                        </a:srgbClr>
-                      </a:solidFill>
-                      <a:prstDash val="solid"/>
-                      <a:round/>
-                      <a:headEnd type="none" w="sm" len="sm"/>
-                      <a:tailEnd type="none" w="sm" len="sm"/>
-                    </a:lnR>
-                    <a:lnT w="9525" cap="flat" cmpd="sng">
-                      <a:solidFill>
-                        <a:srgbClr val="9E9E9E">
-                          <a:alpha val="0"/>
-                        </a:srgbClr>
-                      </a:solidFill>
-                      <a:prstDash val="solid"/>
-                      <a:round/>
-                      <a:headEnd type="none" w="sm" len="sm"/>
-                      <a:tailEnd type="none" w="sm" len="sm"/>
-                    </a:lnT>
-                    <a:lnB w="9525" cap="flat" cmpd="sng">
-                      <a:solidFill>
-                        <a:srgbClr val="9E9E9E">
-                          <a:alpha val="0"/>
-                        </a:srgbClr>
-                      </a:solidFill>
-                      <a:prstDash val="solid"/>
-                      <a:round/>
-                      <a:headEnd type="none" w="sm" len="sm"/>
-                      <a:tailEnd type="none" w="sm" len="sm"/>
-                    </a:lnB>
-                  </a:tcPr>
-                </a:tc>
-                <a:tc>
-                  <a:txBody>
-                    <a:bodyPr/>
-                    <a:lstStyle/>
-                    <a:p>
-                      <a:pPr marL="0" lvl="0" indent="0" algn="ctr" rtl="0">
-                        <a:spcBef>
-                          <a:spcPts val="0"/>
-                        </a:spcBef>
-                        <a:spcAft>
-                          <a:spcPts val="0"/>
-                        </a:spcAft>
-                        <a:buNone/>
-                      </a:pPr>
-                      <a:r>
-                        <a:rPr lang="en-GB">
-                          <a:latin typeface="Proxima Nova"/>
-                          <a:ea typeface="Proxima Nova"/>
-                          <a:cs typeface="Proxima Nova"/>
-                          <a:sym typeface="Proxima Nova"/>
-                        </a:rPr>
-                        <a:t>17/9</a:t>
-                      </a:r>
-                      <a:endParaRPr lang="en-GB" dirty="0">
                         <a:latin typeface="Proxima Nova"/>
                         <a:ea typeface="Proxima Nova"/>
                         <a:cs typeface="Proxima Nova"/>
@@ -15750,7 +15192,7 @@
                     </a:p>
                   </a:txBody>
                   <a:tcPr marL="91425" marR="91425" marT="91425" marB="91425" anchor="ctr">
-                    <a:lnL w="9525" cap="flat" cmpd="sng">
+                    <a:lnL w="9525" cap="flat" cmpd="sng" algn="ctr">
                       <a:solidFill>
                         <a:srgbClr val="9E9E9E">
                           <a:alpha val="0"/>
@@ -15772,7 +15214,7 @@
                       <a:headEnd type="none" w="sm" len="sm"/>
                       <a:tailEnd type="none" w="sm" len="sm"/>
                     </a:lnR>
-                    <a:lnT w="9525" cap="flat" cmpd="sng">
+                    <a:lnT w="9525" cap="flat" cmpd="sng" algn="ctr">
                       <a:solidFill>
                         <a:srgbClr val="9E9E9E">
                           <a:alpha val="0"/>
@@ -18831,8 +18273,8 @@
           <a:chExt cx="0" cy="0"/>
         </a:xfrm>
       </p:grpSpPr>
-      <mc:AlternateContent xmlns:mc="http://schemas.openxmlformats.org/markup-compatibility/2006">
-        <mc:Choice xmlns:a14="http://schemas.microsoft.com/office/drawing/2010/main" Requires="a14">
+      <mc:AlternateContent xmlns:mc="http://schemas.openxmlformats.org/markup-compatibility/2006" xmlns:a14="http://schemas.microsoft.com/office/drawing/2010/main">
+        <mc:Choice Requires="a14">
           <p:sp>
             <p:nvSpPr>
               <p:cNvPr id="6" name="Google Shape;182;p31">
@@ -19250,7 +18692,7 @@
             </p:txBody>
           </p:sp>
         </mc:Choice>
-        <mc:Fallback>
+        <mc:Fallback xmlns="">
           <p:sp>
             <p:nvSpPr>
               <p:cNvPr id="6" name="Google Shape;182;p31">
@@ -23421,7 +22863,7 @@
             <a:avLst/>
           </a:prstGeom>
           <a:noFill/>
-          <a:ln w="12700">
+          <a:ln w="19050">
             <a:solidFill>
               <a:schemeClr val="accent4"/>
             </a:solidFill>
@@ -23487,7 +22929,7 @@
             <a:avLst/>
           </a:prstGeom>
           <a:noFill/>
-          <a:ln w="12700">
+          <a:ln w="19050">
             <a:solidFill>
               <a:schemeClr val="accent4"/>
             </a:solidFill>
@@ -23546,14 +22988,14 @@
         </p:nvSpPr>
         <p:spPr>
           <a:xfrm>
-            <a:off x="6138472" y="1400935"/>
+            <a:off x="6977913" y="1400935"/>
             <a:ext cx="1828800" cy="457200"/>
           </a:xfrm>
           <a:prstGeom prst="roundRect">
             <a:avLst/>
           </a:prstGeom>
           <a:noFill/>
-          <a:ln w="12700">
+          <a:ln w="19050">
             <a:solidFill>
               <a:schemeClr val="accent4"/>
             </a:solidFill>
@@ -23612,14 +23054,14 @@
         </p:nvSpPr>
         <p:spPr>
           <a:xfrm>
-            <a:off x="367259" y="2115487"/>
+            <a:off x="367259" y="2033042"/>
             <a:ext cx="1828800" cy="457200"/>
           </a:xfrm>
           <a:prstGeom prst="roundRect">
             <a:avLst/>
           </a:prstGeom>
           <a:noFill/>
-          <a:ln w="12700">
+          <a:ln w="19050">
             <a:solidFill>
               <a:schemeClr val="accent4"/>
             </a:solidFill>
@@ -23678,14 +23120,14 @@
         </p:nvSpPr>
         <p:spPr>
           <a:xfrm>
-            <a:off x="3395272" y="2114550"/>
+            <a:off x="4736879" y="2032105"/>
             <a:ext cx="1828800" cy="457200"/>
           </a:xfrm>
           <a:prstGeom prst="roundRect">
             <a:avLst/>
           </a:prstGeom>
           <a:noFill/>
-          <a:ln w="12700">
+          <a:ln w="19050">
             <a:solidFill>
               <a:schemeClr val="accent4"/>
             </a:solidFill>
@@ -23744,8 +23186,8 @@
         </p:nvSpPr>
         <p:spPr>
           <a:xfrm>
-            <a:off x="244542" y="2946366"/>
-            <a:ext cx="1008000" cy="720000"/>
+            <a:off x="2180183" y="3527498"/>
+            <a:ext cx="1080000" cy="720000"/>
           </a:xfrm>
           <a:prstGeom prst="hexagon">
             <a:avLst/>
@@ -23785,73 +23227,7 @@
                 </a:solidFill>
                 <a:latin typeface="Proxima Nova" panose="020B0604020202020204" charset="0"/>
               </a:rPr>
-              <a:t>Simple</a:t>
-            </a:r>
-            <a:endParaRPr lang="es-AR" sz="1050" dirty="0">
-              <a:solidFill>
-                <a:schemeClr val="accent2"/>
-              </a:solidFill>
-              <a:latin typeface="Proxima Nova" panose="020B0604020202020204" charset="0"/>
-            </a:endParaRPr>
-          </a:p>
-        </p:txBody>
-      </p:sp>
-      <p:sp>
-        <p:nvSpPr>
-          <p:cNvPr id="16" name="Hexágono 15">
-            <a:extLst>
-              <a:ext uri="{FF2B5EF4-FFF2-40B4-BE49-F238E27FC236}">
-                <a16:creationId xmlns:a16="http://schemas.microsoft.com/office/drawing/2014/main" id="{9961A3D7-B739-4884-8B84-3074ECF546FC}"/>
-              </a:ext>
-            </a:extLst>
-          </p:cNvPr>
-          <p:cNvSpPr/>
-          <p:nvPr/>
-        </p:nvSpPr>
-        <p:spPr>
-          <a:xfrm>
-            <a:off x="1315476" y="2946366"/>
-            <a:ext cx="1008000" cy="720000"/>
-          </a:xfrm>
-          <a:prstGeom prst="hexagon">
-            <a:avLst/>
-          </a:prstGeom>
-          <a:noFill/>
-          <a:ln w="12700">
-            <a:solidFill>
-              <a:schemeClr val="accent4"/>
-            </a:solidFill>
-          </a:ln>
-        </p:spPr>
-        <p:style>
-          <a:lnRef idx="2">
-            <a:schemeClr val="accent1">
-              <a:shade val="50000"/>
-            </a:schemeClr>
-          </a:lnRef>
-          <a:fillRef idx="1">
-            <a:schemeClr val="accent1"/>
-          </a:fillRef>
-          <a:effectRef idx="0">
-            <a:schemeClr val="accent1"/>
-          </a:effectRef>
-          <a:fontRef idx="minor">
-            <a:schemeClr val="lt1"/>
-          </a:fontRef>
-        </p:style>
-        <p:txBody>
-          <a:bodyPr rtlCol="0" anchor="ctr"/>
-          <a:lstStyle/>
-          <a:p>
-            <a:pPr algn="ctr"/>
-            <a:r>
-              <a:rPr lang="es-MX" sz="1050" dirty="0">
-                <a:solidFill>
-                  <a:schemeClr val="accent2"/>
-                </a:solidFill>
-                <a:latin typeface="Proxima Nova" panose="020B0604020202020204" charset="0"/>
-              </a:rPr>
-              <a:t>Múltiple</a:t>
+              <a:t>Regresión lineal</a:t>
             </a:r>
             <a:endParaRPr lang="es-AR" sz="1050" dirty="0">
               <a:solidFill>
@@ -23876,14 +23252,14 @@
         </p:nvSpPr>
         <p:spPr>
           <a:xfrm>
-            <a:off x="6026046" y="2133912"/>
+            <a:off x="7457079" y="2114550"/>
             <a:ext cx="1087946" cy="720000"/>
           </a:xfrm>
           <a:prstGeom prst="hexagon">
             <a:avLst/>
           </a:prstGeom>
           <a:noFill/>
-          <a:ln w="12700">
+          <a:ln w="19050">
             <a:solidFill>
               <a:schemeClr val="accent4"/>
             </a:solidFill>
@@ -23930,10 +23306,10 @@
       </p:sp>
       <p:sp>
         <p:nvSpPr>
-          <p:cNvPr id="19" name="Hexágono 18">
+          <p:cNvPr id="23" name="Rectángulo: esquinas redondeadas 22">
             <a:extLst>
               <a:ext uri="{FF2B5EF4-FFF2-40B4-BE49-F238E27FC236}">
-                <a16:creationId xmlns:a16="http://schemas.microsoft.com/office/drawing/2014/main" id="{29BDC7DB-4962-4B47-83B4-B72C48164E29}"/>
+                <a16:creationId xmlns:a16="http://schemas.microsoft.com/office/drawing/2014/main" id="{B9A89CBC-6B47-41DB-9701-F40FC126C137}"/>
               </a:ext>
             </a:extLst>
           </p:cNvPr>
@@ -23942,14 +23318,14 @@
         </p:nvSpPr>
         <p:spPr>
           <a:xfrm>
-            <a:off x="7199411" y="2133912"/>
-            <a:ext cx="1008000" cy="720000"/>
+            <a:off x="3974879" y="2798833"/>
+            <a:ext cx="1584000" cy="457200"/>
           </a:xfrm>
-          <a:prstGeom prst="hexagon">
+          <a:prstGeom prst="roundRect">
             <a:avLst/>
           </a:prstGeom>
           <a:noFill/>
-          <a:ln w="12700">
+          <a:ln w="19050">
             <a:solidFill>
               <a:schemeClr val="accent4"/>
             </a:solidFill>
@@ -23977,15 +23353,15 @@
           <a:p>
             <a:pPr algn="ctr"/>
             <a:r>
-              <a:rPr lang="es-MX" sz="1050" dirty="0">
+              <a:rPr lang="es-MX" dirty="0">
                 <a:solidFill>
                   <a:schemeClr val="accent2"/>
                 </a:solidFill>
                 <a:latin typeface="Proxima Nova" panose="020B0604020202020204" charset="0"/>
               </a:rPr>
-              <a:t>PCA</a:t>
+              <a:t>Paramétricos</a:t>
             </a:r>
-            <a:endParaRPr lang="es-AR" sz="1050" dirty="0">
+            <a:endParaRPr lang="es-AR" dirty="0">
               <a:solidFill>
                 <a:schemeClr val="accent2"/>
               </a:solidFill>
@@ -23996,10 +23372,10 @@
       </p:sp>
       <p:sp>
         <p:nvSpPr>
-          <p:cNvPr id="23" name="Rectángulo: esquinas redondeadas 22">
+          <p:cNvPr id="24" name="Rectángulo: esquinas redondeadas 23">
             <a:extLst>
               <a:ext uri="{FF2B5EF4-FFF2-40B4-BE49-F238E27FC236}">
-                <a16:creationId xmlns:a16="http://schemas.microsoft.com/office/drawing/2014/main" id="{B9A89CBC-6B47-41DB-9701-F40FC126C137}"/>
+                <a16:creationId xmlns:a16="http://schemas.microsoft.com/office/drawing/2014/main" id="{39E022CC-60EF-4D14-A8D8-A2272C00939F}"/>
               </a:ext>
             </a:extLst>
           </p:cNvPr>
@@ -24008,14 +23384,14 @@
         </p:nvSpPr>
         <p:spPr>
           <a:xfrm>
-            <a:off x="2633272" y="3211058"/>
-            <a:ext cx="1828800" cy="457200"/>
+            <a:off x="5963575" y="2796941"/>
+            <a:ext cx="1584000" cy="457200"/>
           </a:xfrm>
           <a:prstGeom prst="roundRect">
             <a:avLst/>
           </a:prstGeom>
           <a:noFill/>
-          <a:ln w="12700">
+          <a:ln w="19050">
             <a:solidFill>
               <a:schemeClr val="accent4"/>
             </a:solidFill>
@@ -24060,12 +23436,415 @@
           </a:p>
         </p:txBody>
       </p:sp>
+      <p:cxnSp>
+        <p:nvCxnSpPr>
+          <p:cNvPr id="27" name="Conector recto 26">
+            <a:extLst>
+              <a:ext uri="{FF2B5EF4-FFF2-40B4-BE49-F238E27FC236}">
+                <a16:creationId xmlns:a16="http://schemas.microsoft.com/office/drawing/2014/main" id="{77E1FACB-771C-4678-8AEC-39BF517E1D99}"/>
+              </a:ext>
+            </a:extLst>
+          </p:cNvPr>
+          <p:cNvCxnSpPr>
+            <a:cxnSpLocks/>
+            <a:stCxn id="11" idx="2"/>
+            <a:endCxn id="46" idx="0"/>
+          </p:cNvCxnSpPr>
+          <p:nvPr/>
+        </p:nvCxnSpPr>
+        <p:spPr>
+          <a:xfrm flipH="1">
+            <a:off x="934597" y="2490242"/>
+            <a:ext cx="347062" cy="328090"/>
+          </a:xfrm>
+          <a:prstGeom prst="line">
+            <a:avLst/>
+          </a:prstGeom>
+          <a:ln w="19050">
+            <a:solidFill>
+              <a:schemeClr val="accent4"/>
+            </a:solidFill>
+          </a:ln>
+        </p:spPr>
+        <p:style>
+          <a:lnRef idx="1">
+            <a:schemeClr val="accent1"/>
+          </a:lnRef>
+          <a:fillRef idx="0">
+            <a:schemeClr val="accent1"/>
+          </a:fillRef>
+          <a:effectRef idx="0">
+            <a:schemeClr val="accent1"/>
+          </a:effectRef>
+          <a:fontRef idx="minor">
+            <a:schemeClr val="tx1"/>
+          </a:fontRef>
+        </p:style>
+      </p:cxnSp>
+      <p:cxnSp>
+        <p:nvCxnSpPr>
+          <p:cNvPr id="30" name="Conector recto 29">
+            <a:extLst>
+              <a:ext uri="{FF2B5EF4-FFF2-40B4-BE49-F238E27FC236}">
+                <a16:creationId xmlns:a16="http://schemas.microsoft.com/office/drawing/2014/main" id="{0F40D13E-8445-47B1-A87F-A5950F6CF87E}"/>
+              </a:ext>
+            </a:extLst>
+          </p:cNvPr>
+          <p:cNvCxnSpPr>
+            <a:cxnSpLocks/>
+            <a:stCxn id="11" idx="2"/>
+            <a:endCxn id="44" idx="0"/>
+          </p:cNvCxnSpPr>
+          <p:nvPr/>
+        </p:nvCxnSpPr>
+        <p:spPr>
+          <a:xfrm>
+            <a:off x="1281659" y="2490242"/>
+            <a:ext cx="1430895" cy="331749"/>
+          </a:xfrm>
+          <a:prstGeom prst="line">
+            <a:avLst/>
+          </a:prstGeom>
+          <a:ln w="19050">
+            <a:solidFill>
+              <a:schemeClr val="accent4"/>
+            </a:solidFill>
+          </a:ln>
+        </p:spPr>
+        <p:style>
+          <a:lnRef idx="1">
+            <a:schemeClr val="accent1"/>
+          </a:lnRef>
+          <a:fillRef idx="0">
+            <a:schemeClr val="accent1"/>
+          </a:fillRef>
+          <a:effectRef idx="0">
+            <a:schemeClr val="accent1"/>
+          </a:effectRef>
+          <a:fontRef idx="minor">
+            <a:schemeClr val="tx1"/>
+          </a:fontRef>
+        </p:style>
+      </p:cxnSp>
+      <p:cxnSp>
+        <p:nvCxnSpPr>
+          <p:cNvPr id="33" name="Conector recto 32">
+            <a:extLst>
+              <a:ext uri="{FF2B5EF4-FFF2-40B4-BE49-F238E27FC236}">
+                <a16:creationId xmlns:a16="http://schemas.microsoft.com/office/drawing/2014/main" id="{7CEEF7BB-59F9-4FD2-B3AB-532406514BF7}"/>
+              </a:ext>
+            </a:extLst>
+          </p:cNvPr>
+          <p:cNvCxnSpPr>
+            <a:cxnSpLocks/>
+            <a:stCxn id="9" idx="2"/>
+            <a:endCxn id="11" idx="0"/>
+          </p:cNvCxnSpPr>
+          <p:nvPr/>
+        </p:nvCxnSpPr>
+        <p:spPr>
+          <a:xfrm flipH="1">
+            <a:off x="1281659" y="1858135"/>
+            <a:ext cx="2113613" cy="174907"/>
+          </a:xfrm>
+          <a:prstGeom prst="line">
+            <a:avLst/>
+          </a:prstGeom>
+          <a:ln w="19050">
+            <a:solidFill>
+              <a:schemeClr val="accent4"/>
+            </a:solidFill>
+          </a:ln>
+        </p:spPr>
+        <p:style>
+          <a:lnRef idx="1">
+            <a:schemeClr val="accent1"/>
+          </a:lnRef>
+          <a:fillRef idx="0">
+            <a:schemeClr val="accent1"/>
+          </a:fillRef>
+          <a:effectRef idx="0">
+            <a:schemeClr val="accent1"/>
+          </a:effectRef>
+          <a:fontRef idx="minor">
+            <a:schemeClr val="tx1"/>
+          </a:fontRef>
+        </p:style>
+      </p:cxnSp>
+      <p:cxnSp>
+        <p:nvCxnSpPr>
+          <p:cNvPr id="36" name="Conector recto 35">
+            <a:extLst>
+              <a:ext uri="{FF2B5EF4-FFF2-40B4-BE49-F238E27FC236}">
+                <a16:creationId xmlns:a16="http://schemas.microsoft.com/office/drawing/2014/main" id="{E6DF477B-E1A1-420E-99FE-F4FEFB8B0159}"/>
+              </a:ext>
+            </a:extLst>
+          </p:cNvPr>
+          <p:cNvCxnSpPr>
+            <a:cxnSpLocks/>
+            <a:stCxn id="9" idx="2"/>
+            <a:endCxn id="12" idx="0"/>
+          </p:cNvCxnSpPr>
+          <p:nvPr/>
+        </p:nvCxnSpPr>
+        <p:spPr>
+          <a:xfrm>
+            <a:off x="3395272" y="1858135"/>
+            <a:ext cx="2256007" cy="173970"/>
+          </a:xfrm>
+          <a:prstGeom prst="line">
+            <a:avLst/>
+          </a:prstGeom>
+          <a:ln w="19050">
+            <a:solidFill>
+              <a:schemeClr val="accent4"/>
+            </a:solidFill>
+          </a:ln>
+        </p:spPr>
+        <p:style>
+          <a:lnRef idx="1">
+            <a:schemeClr val="accent1"/>
+          </a:lnRef>
+          <a:fillRef idx="0">
+            <a:schemeClr val="accent1"/>
+          </a:fillRef>
+          <a:effectRef idx="0">
+            <a:schemeClr val="accent1"/>
+          </a:effectRef>
+          <a:fontRef idx="minor">
+            <a:schemeClr val="tx1"/>
+          </a:fontRef>
+        </p:style>
+      </p:cxnSp>
+      <p:cxnSp>
+        <p:nvCxnSpPr>
+          <p:cNvPr id="39" name="Conector recto 38">
+            <a:extLst>
+              <a:ext uri="{FF2B5EF4-FFF2-40B4-BE49-F238E27FC236}">
+                <a16:creationId xmlns:a16="http://schemas.microsoft.com/office/drawing/2014/main" id="{8DED36CA-EBB0-4414-9220-3514866BE20E}"/>
+              </a:ext>
+            </a:extLst>
+          </p:cNvPr>
+          <p:cNvCxnSpPr>
+            <a:cxnSpLocks/>
+            <a:stCxn id="5" idx="2"/>
+            <a:endCxn id="9" idx="0"/>
+          </p:cNvCxnSpPr>
+          <p:nvPr/>
+        </p:nvCxnSpPr>
+        <p:spPr>
+          <a:xfrm flipH="1">
+            <a:off x="3395272" y="1170442"/>
+            <a:ext cx="1828800" cy="230493"/>
+          </a:xfrm>
+          <a:prstGeom prst="line">
+            <a:avLst/>
+          </a:prstGeom>
+          <a:ln w="19050">
+            <a:solidFill>
+              <a:schemeClr val="accent4"/>
+            </a:solidFill>
+          </a:ln>
+        </p:spPr>
+        <p:style>
+          <a:lnRef idx="1">
+            <a:schemeClr val="accent1"/>
+          </a:lnRef>
+          <a:fillRef idx="0">
+            <a:schemeClr val="accent1"/>
+          </a:fillRef>
+          <a:effectRef idx="0">
+            <a:schemeClr val="accent1"/>
+          </a:effectRef>
+          <a:fontRef idx="minor">
+            <a:schemeClr val="tx1"/>
+          </a:fontRef>
+        </p:style>
+      </p:cxnSp>
+      <p:cxnSp>
+        <p:nvCxnSpPr>
+          <p:cNvPr id="42" name="Conector recto 41">
+            <a:extLst>
+              <a:ext uri="{FF2B5EF4-FFF2-40B4-BE49-F238E27FC236}">
+                <a16:creationId xmlns:a16="http://schemas.microsoft.com/office/drawing/2014/main" id="{36296CC0-4538-4702-BAE5-618BF6EC547F}"/>
+              </a:ext>
+            </a:extLst>
+          </p:cNvPr>
+          <p:cNvCxnSpPr>
+            <a:cxnSpLocks/>
+            <a:stCxn id="5" idx="2"/>
+            <a:endCxn id="10" idx="0"/>
+          </p:cNvCxnSpPr>
+          <p:nvPr/>
+        </p:nvCxnSpPr>
+        <p:spPr>
+          <a:xfrm>
+            <a:off x="5224072" y="1170442"/>
+            <a:ext cx="2668241" cy="230493"/>
+          </a:xfrm>
+          <a:prstGeom prst="line">
+            <a:avLst/>
+          </a:prstGeom>
+          <a:ln w="19050">
+            <a:solidFill>
+              <a:schemeClr val="accent4"/>
+            </a:solidFill>
+          </a:ln>
+        </p:spPr>
+        <p:style>
+          <a:lnRef idx="1">
+            <a:schemeClr val="accent1"/>
+          </a:lnRef>
+          <a:fillRef idx="0">
+            <a:schemeClr val="accent1"/>
+          </a:fillRef>
+          <a:effectRef idx="0">
+            <a:schemeClr val="accent1"/>
+          </a:effectRef>
+          <a:fontRef idx="minor">
+            <a:schemeClr val="tx1"/>
+          </a:fontRef>
+        </p:style>
+      </p:cxnSp>
+      <p:cxnSp>
+        <p:nvCxnSpPr>
+          <p:cNvPr id="45" name="Conector recto 44">
+            <a:extLst>
+              <a:ext uri="{FF2B5EF4-FFF2-40B4-BE49-F238E27FC236}">
+                <a16:creationId xmlns:a16="http://schemas.microsoft.com/office/drawing/2014/main" id="{0A0F49A6-13A2-455D-BE09-F1DA863A84CA}"/>
+              </a:ext>
+            </a:extLst>
+          </p:cNvPr>
+          <p:cNvCxnSpPr>
+            <a:cxnSpLocks/>
+            <a:stCxn id="12" idx="2"/>
+            <a:endCxn id="23" idx="0"/>
+          </p:cNvCxnSpPr>
+          <p:nvPr/>
+        </p:nvCxnSpPr>
+        <p:spPr>
+          <a:xfrm flipH="1">
+            <a:off x="4766879" y="2489305"/>
+            <a:ext cx="884400" cy="309528"/>
+          </a:xfrm>
+          <a:prstGeom prst="line">
+            <a:avLst/>
+          </a:prstGeom>
+          <a:ln w="19050">
+            <a:solidFill>
+              <a:schemeClr val="accent4"/>
+            </a:solidFill>
+          </a:ln>
+        </p:spPr>
+        <p:style>
+          <a:lnRef idx="1">
+            <a:schemeClr val="accent1"/>
+          </a:lnRef>
+          <a:fillRef idx="0">
+            <a:schemeClr val="accent1"/>
+          </a:fillRef>
+          <a:effectRef idx="0">
+            <a:schemeClr val="accent1"/>
+          </a:effectRef>
+          <a:fontRef idx="minor">
+            <a:schemeClr val="tx1"/>
+          </a:fontRef>
+        </p:style>
+      </p:cxnSp>
+      <p:cxnSp>
+        <p:nvCxnSpPr>
+          <p:cNvPr id="48" name="Conector recto 47">
+            <a:extLst>
+              <a:ext uri="{FF2B5EF4-FFF2-40B4-BE49-F238E27FC236}">
+                <a16:creationId xmlns:a16="http://schemas.microsoft.com/office/drawing/2014/main" id="{CE8EE3FF-AC20-4199-88E8-E4E59FB51FDC}"/>
+              </a:ext>
+            </a:extLst>
+          </p:cNvPr>
+          <p:cNvCxnSpPr>
+            <a:cxnSpLocks/>
+            <a:stCxn id="12" idx="2"/>
+            <a:endCxn id="24" idx="0"/>
+          </p:cNvCxnSpPr>
+          <p:nvPr/>
+        </p:nvCxnSpPr>
+        <p:spPr>
+          <a:xfrm>
+            <a:off x="5651279" y="2489305"/>
+            <a:ext cx="1104296" cy="307636"/>
+          </a:xfrm>
+          <a:prstGeom prst="line">
+            <a:avLst/>
+          </a:prstGeom>
+          <a:ln w="19050">
+            <a:solidFill>
+              <a:schemeClr val="accent4"/>
+            </a:solidFill>
+          </a:ln>
+        </p:spPr>
+        <p:style>
+          <a:lnRef idx="1">
+            <a:schemeClr val="accent1"/>
+          </a:lnRef>
+          <a:fillRef idx="0">
+            <a:schemeClr val="accent1"/>
+          </a:fillRef>
+          <a:effectRef idx="0">
+            <a:schemeClr val="accent1"/>
+          </a:effectRef>
+          <a:fontRef idx="minor">
+            <a:schemeClr val="tx1"/>
+          </a:fontRef>
+        </p:style>
+      </p:cxnSp>
+      <p:cxnSp>
+        <p:nvCxnSpPr>
+          <p:cNvPr id="60" name="Conector recto 59">
+            <a:extLst>
+              <a:ext uri="{FF2B5EF4-FFF2-40B4-BE49-F238E27FC236}">
+                <a16:creationId xmlns:a16="http://schemas.microsoft.com/office/drawing/2014/main" id="{3E819977-5368-4D96-9F5B-91B50EC716FF}"/>
+              </a:ext>
+            </a:extLst>
+          </p:cNvPr>
+          <p:cNvCxnSpPr>
+            <a:cxnSpLocks/>
+          </p:cNvCxnSpPr>
+          <p:nvPr/>
+        </p:nvCxnSpPr>
+        <p:spPr>
+          <a:xfrm>
+            <a:off x="7989748" y="1858135"/>
+            <a:ext cx="0" cy="255478"/>
+          </a:xfrm>
+          <a:prstGeom prst="line">
+            <a:avLst/>
+          </a:prstGeom>
+          <a:ln w="19050">
+            <a:solidFill>
+              <a:schemeClr val="accent4"/>
+            </a:solidFill>
+          </a:ln>
+        </p:spPr>
+        <p:style>
+          <a:lnRef idx="1">
+            <a:schemeClr val="accent1"/>
+          </a:lnRef>
+          <a:fillRef idx="0">
+            <a:schemeClr val="accent1"/>
+          </a:fillRef>
+          <a:effectRef idx="0">
+            <a:schemeClr val="accent1"/>
+          </a:effectRef>
+          <a:fontRef idx="minor">
+            <a:schemeClr val="tx1"/>
+          </a:fontRef>
+        </p:style>
+      </p:cxnSp>
       <p:sp>
         <p:nvSpPr>
-          <p:cNvPr id="24" name="Rectángulo: esquinas redondeadas 23">
+          <p:cNvPr id="32" name="Hexágono 31">
             <a:extLst>
               <a:ext uri="{FF2B5EF4-FFF2-40B4-BE49-F238E27FC236}">
-                <a16:creationId xmlns:a16="http://schemas.microsoft.com/office/drawing/2014/main" id="{39E022CC-60EF-4D14-A8D8-A2272C00939F}"/>
+                <a16:creationId xmlns:a16="http://schemas.microsoft.com/office/drawing/2014/main" id="{A78DF77B-EFC4-4CCD-B18D-08C8C8F8473D}"/>
               </a:ext>
             </a:extLst>
           </p:cNvPr>
@@ -24074,14 +23853,232 @@
         </p:nvSpPr>
         <p:spPr>
           <a:xfrm>
-            <a:off x="4621968" y="3209166"/>
-            <a:ext cx="1828800" cy="457200"/>
+            <a:off x="4239730" y="3527498"/>
+            <a:ext cx="1080000" cy="720000"/>
+          </a:xfrm>
+          <a:prstGeom prst="hexagon">
+            <a:avLst/>
+          </a:prstGeom>
+          <a:noFill/>
+          <a:ln w="19050">
+            <a:solidFill>
+              <a:schemeClr val="accent4"/>
+            </a:solidFill>
+          </a:ln>
+        </p:spPr>
+        <p:style>
+          <a:lnRef idx="2">
+            <a:schemeClr val="accent1">
+              <a:shade val="50000"/>
+            </a:schemeClr>
+          </a:lnRef>
+          <a:fillRef idx="1">
+            <a:schemeClr val="accent1"/>
+          </a:fillRef>
+          <a:effectRef idx="0">
+            <a:schemeClr val="accent1"/>
+          </a:effectRef>
+          <a:fontRef idx="minor">
+            <a:schemeClr val="lt1"/>
+          </a:fontRef>
+        </p:style>
+        <p:txBody>
+          <a:bodyPr rtlCol="0" anchor="ctr"/>
+          <a:lstStyle/>
+          <a:p>
+            <a:pPr algn="ctr"/>
+            <a:r>
+              <a:rPr lang="es-MX" sz="1050" dirty="0">
+                <a:solidFill>
+                  <a:schemeClr val="accent2"/>
+                </a:solidFill>
+                <a:latin typeface="Proxima Nova" panose="020B0604020202020204" charset="0"/>
+              </a:rPr>
+              <a:t>Regresión logística</a:t>
+            </a:r>
+            <a:endParaRPr lang="es-AR" sz="1050" dirty="0">
+              <a:solidFill>
+                <a:schemeClr val="accent2"/>
+              </a:solidFill>
+              <a:latin typeface="Proxima Nova" panose="020B0604020202020204" charset="0"/>
+            </a:endParaRPr>
+          </a:p>
+        </p:txBody>
+      </p:sp>
+      <p:sp>
+        <p:nvSpPr>
+          <p:cNvPr id="34" name="Hexágono 33">
+            <a:extLst>
+              <a:ext uri="{FF2B5EF4-FFF2-40B4-BE49-F238E27FC236}">
+                <a16:creationId xmlns:a16="http://schemas.microsoft.com/office/drawing/2014/main" id="{2FD35B72-9731-44C8-9702-7B02D2407CF5}"/>
+              </a:ext>
+            </a:extLst>
+          </p:cNvPr>
+          <p:cNvSpPr/>
+          <p:nvPr/>
+        </p:nvSpPr>
+        <p:spPr>
+          <a:xfrm>
+            <a:off x="6339144" y="3510556"/>
+            <a:ext cx="1087946" cy="720000"/>
+          </a:xfrm>
+          <a:prstGeom prst="hexagon">
+            <a:avLst/>
+          </a:prstGeom>
+          <a:noFill/>
+          <a:ln w="19050">
+            <a:solidFill>
+              <a:schemeClr val="accent4"/>
+            </a:solidFill>
+          </a:ln>
+        </p:spPr>
+        <p:style>
+          <a:lnRef idx="2">
+            <a:schemeClr val="accent1">
+              <a:shade val="50000"/>
+            </a:schemeClr>
+          </a:lnRef>
+          <a:fillRef idx="1">
+            <a:schemeClr val="accent1"/>
+          </a:fillRef>
+          <a:effectRef idx="0">
+            <a:schemeClr val="accent1"/>
+          </a:effectRef>
+          <a:fontRef idx="minor">
+            <a:schemeClr val="lt1"/>
+          </a:fontRef>
+        </p:style>
+        <p:txBody>
+          <a:bodyPr rtlCol="0" anchor="ctr"/>
+          <a:lstStyle/>
+          <a:p>
+            <a:pPr algn="ctr"/>
+            <a:r>
+              <a:rPr lang="es-MX" sz="1050" dirty="0">
+                <a:solidFill>
+                  <a:schemeClr val="accent2"/>
+                </a:solidFill>
+                <a:latin typeface="Proxima Nova" panose="020B0604020202020204" charset="0"/>
+              </a:rPr>
+              <a:t>KNN</a:t>
+            </a:r>
+            <a:endParaRPr lang="es-AR" sz="1050" dirty="0">
+              <a:solidFill>
+                <a:schemeClr val="accent2"/>
+              </a:solidFill>
+              <a:latin typeface="Proxima Nova" panose="020B0604020202020204" charset="0"/>
+            </a:endParaRPr>
+          </a:p>
+        </p:txBody>
+      </p:sp>
+      <p:cxnSp>
+        <p:nvCxnSpPr>
+          <p:cNvPr id="37" name="Conector recto 36">
+            <a:extLst>
+              <a:ext uri="{FF2B5EF4-FFF2-40B4-BE49-F238E27FC236}">
+                <a16:creationId xmlns:a16="http://schemas.microsoft.com/office/drawing/2014/main" id="{B8981D67-8D8A-49B9-BD78-B0097DA717E4}"/>
+              </a:ext>
+            </a:extLst>
+          </p:cNvPr>
+          <p:cNvCxnSpPr>
+            <a:cxnSpLocks/>
+          </p:cNvCxnSpPr>
+          <p:nvPr/>
+        </p:nvCxnSpPr>
+        <p:spPr>
+          <a:xfrm flipH="1">
+            <a:off x="4776208" y="3256033"/>
+            <a:ext cx="0" cy="270528"/>
+          </a:xfrm>
+          <a:prstGeom prst="line">
+            <a:avLst/>
+          </a:prstGeom>
+          <a:ln w="19050">
+            <a:solidFill>
+              <a:schemeClr val="accent4"/>
+            </a:solidFill>
+          </a:ln>
+        </p:spPr>
+        <p:style>
+          <a:lnRef idx="1">
+            <a:schemeClr val="accent1"/>
+          </a:lnRef>
+          <a:fillRef idx="0">
+            <a:schemeClr val="accent1"/>
+          </a:fillRef>
+          <a:effectRef idx="0">
+            <a:schemeClr val="accent1"/>
+          </a:effectRef>
+          <a:fontRef idx="minor">
+            <a:schemeClr val="tx1"/>
+          </a:fontRef>
+        </p:style>
+      </p:cxnSp>
+      <p:cxnSp>
+        <p:nvCxnSpPr>
+          <p:cNvPr id="38" name="Conector recto 37">
+            <a:extLst>
+              <a:ext uri="{FF2B5EF4-FFF2-40B4-BE49-F238E27FC236}">
+                <a16:creationId xmlns:a16="http://schemas.microsoft.com/office/drawing/2014/main" id="{8675A32A-54E3-49E2-B6EA-F57A43BAE636}"/>
+              </a:ext>
+            </a:extLst>
+          </p:cNvPr>
+          <p:cNvCxnSpPr>
+            <a:cxnSpLocks/>
+          </p:cNvCxnSpPr>
+          <p:nvPr/>
+        </p:nvCxnSpPr>
+        <p:spPr>
+          <a:xfrm flipH="1">
+            <a:off x="6872872" y="3254141"/>
+            <a:ext cx="0" cy="256415"/>
+          </a:xfrm>
+          <a:prstGeom prst="line">
+            <a:avLst/>
+          </a:prstGeom>
+          <a:ln w="19050">
+            <a:solidFill>
+              <a:schemeClr val="accent4"/>
+            </a:solidFill>
+          </a:ln>
+        </p:spPr>
+        <p:style>
+          <a:lnRef idx="1">
+            <a:schemeClr val="accent1"/>
+          </a:lnRef>
+          <a:fillRef idx="0">
+            <a:schemeClr val="accent1"/>
+          </a:fillRef>
+          <a:effectRef idx="0">
+            <a:schemeClr val="accent1"/>
+          </a:effectRef>
+          <a:fontRef idx="minor">
+            <a:schemeClr val="tx1"/>
+          </a:fontRef>
+        </p:style>
+      </p:cxnSp>
+      <p:sp>
+        <p:nvSpPr>
+          <p:cNvPr id="44" name="Rectángulo: esquinas redondeadas 43">
+            <a:extLst>
+              <a:ext uri="{FF2B5EF4-FFF2-40B4-BE49-F238E27FC236}">
+                <a16:creationId xmlns:a16="http://schemas.microsoft.com/office/drawing/2014/main" id="{0ABF2D76-8778-4E03-A65F-8B886B3D5DDC}"/>
+              </a:ext>
+            </a:extLst>
+          </p:cNvPr>
+          <p:cNvSpPr/>
+          <p:nvPr/>
+        </p:nvSpPr>
+        <p:spPr>
+          <a:xfrm>
+            <a:off x="1920554" y="2821991"/>
+            <a:ext cx="1584000" cy="457200"/>
           </a:xfrm>
           <a:prstGeom prst="roundRect">
             <a:avLst/>
           </a:prstGeom>
           <a:noFill/>
-          <a:ln w="12700">
+          <a:ln w="19050">
             <a:solidFill>
               <a:schemeClr val="accent4"/>
             </a:solidFill>
@@ -24126,29 +24123,95 @@
           </a:p>
         </p:txBody>
       </p:sp>
+      <p:sp>
+        <p:nvSpPr>
+          <p:cNvPr id="46" name="Rectángulo: esquinas redondeadas 45">
+            <a:extLst>
+              <a:ext uri="{FF2B5EF4-FFF2-40B4-BE49-F238E27FC236}">
+                <a16:creationId xmlns:a16="http://schemas.microsoft.com/office/drawing/2014/main" id="{DE43DF11-E945-4BA6-B83D-F1135911F0D5}"/>
+              </a:ext>
+            </a:extLst>
+          </p:cNvPr>
+          <p:cNvSpPr/>
+          <p:nvPr/>
+        </p:nvSpPr>
+        <p:spPr>
+          <a:xfrm>
+            <a:off x="142597" y="2818332"/>
+            <a:ext cx="1584000" cy="457200"/>
+          </a:xfrm>
+          <a:prstGeom prst="roundRect">
+            <a:avLst/>
+          </a:prstGeom>
+          <a:noFill/>
+          <a:ln w="19050">
+            <a:solidFill>
+              <a:schemeClr val="accent4"/>
+            </a:solidFill>
+          </a:ln>
+        </p:spPr>
+        <p:style>
+          <a:lnRef idx="2">
+            <a:schemeClr val="accent1">
+              <a:shade val="50000"/>
+            </a:schemeClr>
+          </a:lnRef>
+          <a:fillRef idx="1">
+            <a:schemeClr val="accent1"/>
+          </a:fillRef>
+          <a:effectRef idx="0">
+            <a:schemeClr val="accent1"/>
+          </a:effectRef>
+          <a:fontRef idx="minor">
+            <a:schemeClr val="lt1"/>
+          </a:fontRef>
+        </p:style>
+        <p:txBody>
+          <a:bodyPr rtlCol="0" anchor="ctr"/>
+          <a:lstStyle/>
+          <a:p>
+            <a:pPr algn="ctr"/>
+            <a:r>
+              <a:rPr lang="es-MX" dirty="0">
+                <a:solidFill>
+                  <a:schemeClr val="accent2"/>
+                </a:solidFill>
+                <a:latin typeface="Proxima Nova" panose="020B0604020202020204" charset="0"/>
+              </a:rPr>
+              <a:t>No paramétricos</a:t>
+            </a:r>
+            <a:endParaRPr lang="es-AR" dirty="0">
+              <a:solidFill>
+                <a:schemeClr val="accent2"/>
+              </a:solidFill>
+              <a:latin typeface="Proxima Nova" panose="020B0604020202020204" charset="0"/>
+            </a:endParaRPr>
+          </a:p>
+        </p:txBody>
+      </p:sp>
       <p:cxnSp>
         <p:nvCxnSpPr>
-          <p:cNvPr id="27" name="Conector recto 26">
+          <p:cNvPr id="47" name="Conector recto 46">
             <a:extLst>
               <a:ext uri="{FF2B5EF4-FFF2-40B4-BE49-F238E27FC236}">
-                <a16:creationId xmlns:a16="http://schemas.microsoft.com/office/drawing/2014/main" id="{77E1FACB-771C-4678-8AEC-39BF517E1D99}"/>
+                <a16:creationId xmlns:a16="http://schemas.microsoft.com/office/drawing/2014/main" id="{F07607E4-6E57-420C-953B-899797D0B314}"/>
               </a:ext>
             </a:extLst>
           </p:cNvPr>
           <p:cNvCxnSpPr>
-            <a:stCxn id="11" idx="2"/>
+            <a:cxnSpLocks/>
           </p:cNvCxnSpPr>
           <p:nvPr/>
         </p:nvCxnSpPr>
         <p:spPr>
-          <a:xfrm flipH="1">
-            <a:off x="748542" y="2572687"/>
-            <a:ext cx="533117" cy="373679"/>
+          <a:xfrm>
+            <a:off x="2712554" y="3279191"/>
+            <a:ext cx="0" cy="247370"/>
           </a:xfrm>
           <a:prstGeom prst="line">
             <a:avLst/>
           </a:prstGeom>
-          <a:ln w="12700">
+          <a:ln w="19050">
             <a:solidFill>
               <a:schemeClr val="accent4"/>
             </a:solidFill>
@@ -24169,30 +24232,95 @@
           </a:fontRef>
         </p:style>
       </p:cxnSp>
+      <p:sp>
+        <p:nvSpPr>
+          <p:cNvPr id="50" name="Hexágono 49">
+            <a:extLst>
+              <a:ext uri="{FF2B5EF4-FFF2-40B4-BE49-F238E27FC236}">
+                <a16:creationId xmlns:a16="http://schemas.microsoft.com/office/drawing/2014/main" id="{135B1211-C838-4C20-BDDF-1C4257FDEB2A}"/>
+              </a:ext>
+            </a:extLst>
+          </p:cNvPr>
+          <p:cNvSpPr/>
+          <p:nvPr/>
+        </p:nvSpPr>
+        <p:spPr>
+          <a:xfrm>
+            <a:off x="405051" y="3541867"/>
+            <a:ext cx="1087946" cy="720000"/>
+          </a:xfrm>
+          <a:prstGeom prst="hexagon">
+            <a:avLst/>
+          </a:prstGeom>
+          <a:noFill/>
+          <a:ln w="19050">
+            <a:solidFill>
+              <a:schemeClr val="accent4"/>
+            </a:solidFill>
+          </a:ln>
+        </p:spPr>
+        <p:style>
+          <a:lnRef idx="2">
+            <a:schemeClr val="accent1">
+              <a:shade val="50000"/>
+            </a:schemeClr>
+          </a:lnRef>
+          <a:fillRef idx="1">
+            <a:schemeClr val="accent1"/>
+          </a:fillRef>
+          <a:effectRef idx="0">
+            <a:schemeClr val="accent1"/>
+          </a:effectRef>
+          <a:fontRef idx="minor">
+            <a:schemeClr val="lt1"/>
+          </a:fontRef>
+        </p:style>
+        <p:txBody>
+          <a:bodyPr rtlCol="0" anchor="ctr"/>
+          <a:lstStyle/>
+          <a:p>
+            <a:pPr algn="ctr"/>
+            <a:r>
+              <a:rPr lang="es-MX" sz="1050" dirty="0" err="1">
+                <a:solidFill>
+                  <a:schemeClr val="accent2"/>
+                </a:solidFill>
+                <a:latin typeface="Proxima Nova" panose="020B0604020202020204" charset="0"/>
+              </a:rPr>
+              <a:t>Splines</a:t>
+            </a:r>
+            <a:endParaRPr lang="es-AR" sz="1050" dirty="0">
+              <a:solidFill>
+                <a:schemeClr val="accent2"/>
+              </a:solidFill>
+              <a:latin typeface="Proxima Nova" panose="020B0604020202020204" charset="0"/>
+            </a:endParaRPr>
+          </a:p>
+        </p:txBody>
+      </p:sp>
       <p:cxnSp>
         <p:nvCxnSpPr>
-          <p:cNvPr id="30" name="Conector recto 29">
+          <p:cNvPr id="51" name="Conector recto 50">
             <a:extLst>
               <a:ext uri="{FF2B5EF4-FFF2-40B4-BE49-F238E27FC236}">
-                <a16:creationId xmlns:a16="http://schemas.microsoft.com/office/drawing/2014/main" id="{0F40D13E-8445-47B1-A87F-A5950F6CF87E}"/>
+                <a16:creationId xmlns:a16="http://schemas.microsoft.com/office/drawing/2014/main" id="{EFE217A9-08AF-49BA-9AB4-D631A29A9D8D}"/>
               </a:ext>
             </a:extLst>
           </p:cNvPr>
           <p:cNvCxnSpPr>
             <a:cxnSpLocks/>
-            <a:stCxn id="11" idx="2"/>
           </p:cNvCxnSpPr>
           <p:nvPr/>
         </p:nvCxnSpPr>
         <p:spPr>
           <a:xfrm>
-            <a:off x="1281659" y="2572687"/>
-            <a:ext cx="547038" cy="373679"/>
+            <a:off x="947106" y="3267612"/>
+            <a:ext cx="0" cy="274255"/>
           </a:xfrm>
           <a:prstGeom prst="line">
             <a:avLst/>
           </a:prstGeom>
-          <a:ln w="12700">
+          <a:ln w="19050">
             <a:solidFill>
               <a:schemeClr val="accent4"/>
             </a:solidFill>
@@ -24213,34 +24341,153 @@
           </a:fontRef>
         </p:style>
       </p:cxnSp>
+      <p:sp>
+        <p:nvSpPr>
+          <p:cNvPr id="49" name="Rectángulo: esquinas redondeadas 48">
+            <a:extLst>
+              <a:ext uri="{FF2B5EF4-FFF2-40B4-BE49-F238E27FC236}">
+                <a16:creationId xmlns:a16="http://schemas.microsoft.com/office/drawing/2014/main" id="{C4F8BF29-2D4F-4DDB-9887-90F0F3D0A277}"/>
+              </a:ext>
+            </a:extLst>
+          </p:cNvPr>
+          <p:cNvSpPr/>
+          <p:nvPr/>
+        </p:nvSpPr>
+        <p:spPr>
+          <a:xfrm>
+            <a:off x="2023672" y="3432749"/>
+            <a:ext cx="3477717" cy="922560"/>
+          </a:xfrm>
+          <a:prstGeom prst="roundRect">
+            <a:avLst/>
+          </a:prstGeom>
+          <a:noFill/>
+          <a:ln>
+            <a:solidFill>
+              <a:schemeClr val="accent4"/>
+            </a:solidFill>
+            <a:prstDash val="dash"/>
+          </a:ln>
+        </p:spPr>
+        <p:style>
+          <a:lnRef idx="2">
+            <a:schemeClr val="accent1">
+              <a:shade val="50000"/>
+            </a:schemeClr>
+          </a:lnRef>
+          <a:fillRef idx="1">
+            <a:schemeClr val="accent1"/>
+          </a:fillRef>
+          <a:effectRef idx="0">
+            <a:schemeClr val="accent1"/>
+          </a:effectRef>
+          <a:fontRef idx="minor">
+            <a:schemeClr val="lt1"/>
+          </a:fontRef>
+        </p:style>
+        <p:txBody>
+          <a:bodyPr rtlCol="0" anchor="ctr"/>
+          <a:lstStyle/>
+          <a:p>
+            <a:pPr algn="ctr"/>
+            <a:endParaRPr lang="es-AR"/>
+          </a:p>
+        </p:txBody>
+      </p:sp>
+      <p:sp>
+        <p:nvSpPr>
+          <p:cNvPr id="57" name="Hexágono 56">
+            <a:extLst>
+              <a:ext uri="{FF2B5EF4-FFF2-40B4-BE49-F238E27FC236}">
+                <a16:creationId xmlns:a16="http://schemas.microsoft.com/office/drawing/2014/main" id="{075E4624-6159-4D88-B99C-4BAE0492B27D}"/>
+              </a:ext>
+            </a:extLst>
+          </p:cNvPr>
+          <p:cNvSpPr/>
+          <p:nvPr/>
+        </p:nvSpPr>
+        <p:spPr>
+          <a:xfrm>
+            <a:off x="5512130" y="4268154"/>
+            <a:ext cx="1080000" cy="720000"/>
+          </a:xfrm>
+          <a:prstGeom prst="hexagon">
+            <a:avLst/>
+          </a:prstGeom>
+          <a:noFill/>
+          <a:ln w="19050">
+            <a:solidFill>
+              <a:schemeClr val="accent4"/>
+            </a:solidFill>
+          </a:ln>
+        </p:spPr>
+        <p:style>
+          <a:lnRef idx="2">
+            <a:schemeClr val="accent1">
+              <a:shade val="50000"/>
+            </a:schemeClr>
+          </a:lnRef>
+          <a:fillRef idx="1">
+            <a:schemeClr val="accent1"/>
+          </a:fillRef>
+          <a:effectRef idx="0">
+            <a:schemeClr val="accent1"/>
+          </a:effectRef>
+          <a:fontRef idx="minor">
+            <a:schemeClr val="lt1"/>
+          </a:fontRef>
+        </p:style>
+        <p:txBody>
+          <a:bodyPr rtlCol="0" anchor="ctr"/>
+          <a:lstStyle/>
+          <a:p>
+            <a:pPr algn="ctr"/>
+            <a:r>
+              <a:rPr lang="es-MX" sz="1050" dirty="0">
+                <a:solidFill>
+                  <a:schemeClr val="accent2"/>
+                </a:solidFill>
+                <a:latin typeface="Proxima Nova" panose="020B0604020202020204" charset="0"/>
+              </a:rPr>
+              <a:t>LASSO</a:t>
+            </a:r>
+            <a:endParaRPr lang="es-AR" sz="1050" dirty="0">
+              <a:solidFill>
+                <a:schemeClr val="accent2"/>
+              </a:solidFill>
+              <a:latin typeface="Proxima Nova" panose="020B0604020202020204" charset="0"/>
+            </a:endParaRPr>
+          </a:p>
+        </p:txBody>
+      </p:sp>
       <p:cxnSp>
         <p:nvCxnSpPr>
-          <p:cNvPr id="33" name="Conector recto 32">
+          <p:cNvPr id="53" name="Conector: angular 52">
             <a:extLst>
               <a:ext uri="{FF2B5EF4-FFF2-40B4-BE49-F238E27FC236}">
-                <a16:creationId xmlns:a16="http://schemas.microsoft.com/office/drawing/2014/main" id="{7CEEF7BB-59F9-4FD2-B3AB-532406514BF7}"/>
+                <a16:creationId xmlns:a16="http://schemas.microsoft.com/office/drawing/2014/main" id="{FF24B52B-AE9A-42DC-BAE2-53BE82F50593}"/>
               </a:ext>
             </a:extLst>
           </p:cNvPr>
           <p:cNvCxnSpPr>
-            <a:cxnSpLocks/>
-            <a:stCxn id="9" idx="2"/>
-            <a:endCxn id="11" idx="0"/>
+            <a:stCxn id="57" idx="3"/>
+            <a:endCxn id="49" idx="2"/>
           </p:cNvCxnSpPr>
           <p:nvPr/>
         </p:nvCxnSpPr>
         <p:spPr>
-          <a:xfrm flipH="1">
-            <a:off x="1281659" y="1858135"/>
-            <a:ext cx="2113613" cy="257352"/>
+          <a:xfrm rot="10800000">
+            <a:off x="3762532" y="4355310"/>
+            <a:ext cx="1749599" cy="272845"/>
           </a:xfrm>
-          <a:prstGeom prst="line">
+          <a:prstGeom prst="bentConnector2">
             <a:avLst/>
           </a:prstGeom>
-          <a:ln w="12700">
+          <a:ln w="19050">
             <a:solidFill>
               <a:schemeClr val="accent4"/>
             </a:solidFill>
+            <a:tailEnd type="triangle"/>
           </a:ln>
         </p:spPr>
         <p:style>
@@ -24258,788 +24505,10 @@
           </a:fontRef>
         </p:style>
       </p:cxnSp>
-      <p:cxnSp>
-        <p:nvCxnSpPr>
-          <p:cNvPr id="36" name="Conector recto 35">
-            <a:extLst>
-              <a:ext uri="{FF2B5EF4-FFF2-40B4-BE49-F238E27FC236}">
-                <a16:creationId xmlns:a16="http://schemas.microsoft.com/office/drawing/2014/main" id="{E6DF477B-E1A1-420E-99FE-F4FEFB8B0159}"/>
-              </a:ext>
-            </a:extLst>
-          </p:cNvPr>
-          <p:cNvCxnSpPr>
-            <a:cxnSpLocks/>
-            <a:stCxn id="9" idx="2"/>
-            <a:endCxn id="12" idx="0"/>
-          </p:cNvCxnSpPr>
-          <p:nvPr/>
-        </p:nvCxnSpPr>
-        <p:spPr>
-          <a:xfrm>
-            <a:off x="3395272" y="1858135"/>
-            <a:ext cx="914400" cy="256415"/>
-          </a:xfrm>
-          <a:prstGeom prst="line">
-            <a:avLst/>
-          </a:prstGeom>
-          <a:ln w="12700">
-            <a:solidFill>
-              <a:schemeClr val="accent4"/>
-            </a:solidFill>
-          </a:ln>
-        </p:spPr>
-        <p:style>
-          <a:lnRef idx="1">
-            <a:schemeClr val="accent1"/>
-          </a:lnRef>
-          <a:fillRef idx="0">
-            <a:schemeClr val="accent1"/>
-          </a:fillRef>
-          <a:effectRef idx="0">
-            <a:schemeClr val="accent1"/>
-          </a:effectRef>
-          <a:fontRef idx="minor">
-            <a:schemeClr val="tx1"/>
-          </a:fontRef>
-        </p:style>
-      </p:cxnSp>
-      <p:cxnSp>
-        <p:nvCxnSpPr>
-          <p:cNvPr id="39" name="Conector recto 38">
-            <a:extLst>
-              <a:ext uri="{FF2B5EF4-FFF2-40B4-BE49-F238E27FC236}">
-                <a16:creationId xmlns:a16="http://schemas.microsoft.com/office/drawing/2014/main" id="{8DED36CA-EBB0-4414-9220-3514866BE20E}"/>
-              </a:ext>
-            </a:extLst>
-          </p:cNvPr>
-          <p:cNvCxnSpPr>
-            <a:cxnSpLocks/>
-            <a:stCxn id="5" idx="2"/>
-            <a:endCxn id="9" idx="0"/>
-          </p:cNvCxnSpPr>
-          <p:nvPr/>
-        </p:nvCxnSpPr>
-        <p:spPr>
-          <a:xfrm flipH="1">
-            <a:off x="3395272" y="1170442"/>
-            <a:ext cx="1828800" cy="230493"/>
-          </a:xfrm>
-          <a:prstGeom prst="line">
-            <a:avLst/>
-          </a:prstGeom>
-          <a:ln w="12700">
-            <a:solidFill>
-              <a:schemeClr val="accent4"/>
-            </a:solidFill>
-          </a:ln>
-        </p:spPr>
-        <p:style>
-          <a:lnRef idx="1">
-            <a:schemeClr val="accent1"/>
-          </a:lnRef>
-          <a:fillRef idx="0">
-            <a:schemeClr val="accent1"/>
-          </a:fillRef>
-          <a:effectRef idx="0">
-            <a:schemeClr val="accent1"/>
-          </a:effectRef>
-          <a:fontRef idx="minor">
-            <a:schemeClr val="tx1"/>
-          </a:fontRef>
-        </p:style>
-      </p:cxnSp>
-      <p:cxnSp>
-        <p:nvCxnSpPr>
-          <p:cNvPr id="42" name="Conector recto 41">
-            <a:extLst>
-              <a:ext uri="{FF2B5EF4-FFF2-40B4-BE49-F238E27FC236}">
-                <a16:creationId xmlns:a16="http://schemas.microsoft.com/office/drawing/2014/main" id="{36296CC0-4538-4702-BAE5-618BF6EC547F}"/>
-              </a:ext>
-            </a:extLst>
-          </p:cNvPr>
-          <p:cNvCxnSpPr>
-            <a:cxnSpLocks/>
-            <a:stCxn id="5" idx="2"/>
-            <a:endCxn id="10" idx="0"/>
-          </p:cNvCxnSpPr>
-          <p:nvPr/>
-        </p:nvCxnSpPr>
-        <p:spPr>
-          <a:xfrm>
-            <a:off x="5224072" y="1170442"/>
-            <a:ext cx="1828800" cy="230493"/>
-          </a:xfrm>
-          <a:prstGeom prst="line">
-            <a:avLst/>
-          </a:prstGeom>
-          <a:ln w="12700">
-            <a:solidFill>
-              <a:schemeClr val="accent4"/>
-            </a:solidFill>
-          </a:ln>
-        </p:spPr>
-        <p:style>
-          <a:lnRef idx="1">
-            <a:schemeClr val="accent1"/>
-          </a:lnRef>
-          <a:fillRef idx="0">
-            <a:schemeClr val="accent1"/>
-          </a:fillRef>
-          <a:effectRef idx="0">
-            <a:schemeClr val="accent1"/>
-          </a:effectRef>
-          <a:fontRef idx="minor">
-            <a:schemeClr val="tx1"/>
-          </a:fontRef>
-        </p:style>
-      </p:cxnSp>
-      <p:cxnSp>
-        <p:nvCxnSpPr>
-          <p:cNvPr id="45" name="Conector recto 44">
-            <a:extLst>
-              <a:ext uri="{FF2B5EF4-FFF2-40B4-BE49-F238E27FC236}">
-                <a16:creationId xmlns:a16="http://schemas.microsoft.com/office/drawing/2014/main" id="{0A0F49A6-13A2-455D-BE09-F1DA863A84CA}"/>
-              </a:ext>
-            </a:extLst>
-          </p:cNvPr>
-          <p:cNvCxnSpPr>
-            <a:cxnSpLocks/>
-            <a:stCxn id="12" idx="2"/>
-            <a:endCxn id="23" idx="0"/>
-          </p:cNvCxnSpPr>
-          <p:nvPr/>
-        </p:nvCxnSpPr>
-        <p:spPr>
-          <a:xfrm flipH="1">
-            <a:off x="3547672" y="2571750"/>
-            <a:ext cx="762000" cy="639308"/>
-          </a:xfrm>
-          <a:prstGeom prst="line">
-            <a:avLst/>
-          </a:prstGeom>
-          <a:ln w="12700">
-            <a:solidFill>
-              <a:schemeClr val="accent4"/>
-            </a:solidFill>
-          </a:ln>
-        </p:spPr>
-        <p:style>
-          <a:lnRef idx="1">
-            <a:schemeClr val="accent1"/>
-          </a:lnRef>
-          <a:fillRef idx="0">
-            <a:schemeClr val="accent1"/>
-          </a:fillRef>
-          <a:effectRef idx="0">
-            <a:schemeClr val="accent1"/>
-          </a:effectRef>
-          <a:fontRef idx="minor">
-            <a:schemeClr val="tx1"/>
-          </a:fontRef>
-        </p:style>
-      </p:cxnSp>
-      <p:cxnSp>
-        <p:nvCxnSpPr>
-          <p:cNvPr id="48" name="Conector recto 47">
-            <a:extLst>
-              <a:ext uri="{FF2B5EF4-FFF2-40B4-BE49-F238E27FC236}">
-                <a16:creationId xmlns:a16="http://schemas.microsoft.com/office/drawing/2014/main" id="{CE8EE3FF-AC20-4199-88E8-E4E59FB51FDC}"/>
-              </a:ext>
-            </a:extLst>
-          </p:cNvPr>
-          <p:cNvCxnSpPr>
-            <a:cxnSpLocks/>
-            <a:stCxn id="12" idx="2"/>
-            <a:endCxn id="24" idx="0"/>
-          </p:cNvCxnSpPr>
-          <p:nvPr/>
-        </p:nvCxnSpPr>
-        <p:spPr>
-          <a:xfrm>
-            <a:off x="4309672" y="2571750"/>
-            <a:ext cx="1226696" cy="637416"/>
-          </a:xfrm>
-          <a:prstGeom prst="line">
-            <a:avLst/>
-          </a:prstGeom>
-          <a:ln w="12700">
-            <a:solidFill>
-              <a:schemeClr val="accent4"/>
-            </a:solidFill>
-          </a:ln>
-        </p:spPr>
-        <p:style>
-          <a:lnRef idx="1">
-            <a:schemeClr val="accent1"/>
-          </a:lnRef>
-          <a:fillRef idx="0">
-            <a:schemeClr val="accent1"/>
-          </a:fillRef>
-          <a:effectRef idx="0">
-            <a:schemeClr val="accent1"/>
-          </a:effectRef>
-          <a:fontRef idx="minor">
-            <a:schemeClr val="tx1"/>
-          </a:fontRef>
-        </p:style>
-      </p:cxnSp>
-      <p:cxnSp>
-        <p:nvCxnSpPr>
-          <p:cNvPr id="60" name="Conector recto 59">
-            <a:extLst>
-              <a:ext uri="{FF2B5EF4-FFF2-40B4-BE49-F238E27FC236}">
-                <a16:creationId xmlns:a16="http://schemas.microsoft.com/office/drawing/2014/main" id="{3E819977-5368-4D96-9F5B-91B50EC716FF}"/>
-              </a:ext>
-            </a:extLst>
-          </p:cNvPr>
-          <p:cNvCxnSpPr>
-            <a:stCxn id="10" idx="2"/>
-          </p:cNvCxnSpPr>
-          <p:nvPr/>
-        </p:nvCxnSpPr>
-        <p:spPr>
-          <a:xfrm flipH="1">
-            <a:off x="6570019" y="1858135"/>
-            <a:ext cx="482853" cy="275777"/>
-          </a:xfrm>
-          <a:prstGeom prst="line">
-            <a:avLst/>
-          </a:prstGeom>
-          <a:ln w="12700">
-            <a:solidFill>
-              <a:schemeClr val="accent4"/>
-            </a:solidFill>
-          </a:ln>
-        </p:spPr>
-        <p:style>
-          <a:lnRef idx="1">
-            <a:schemeClr val="accent1"/>
-          </a:lnRef>
-          <a:fillRef idx="0">
-            <a:schemeClr val="accent1"/>
-          </a:fillRef>
-          <a:effectRef idx="0">
-            <a:schemeClr val="accent1"/>
-          </a:effectRef>
-          <a:fontRef idx="minor">
-            <a:schemeClr val="tx1"/>
-          </a:fontRef>
-        </p:style>
-      </p:cxnSp>
-      <p:cxnSp>
-        <p:nvCxnSpPr>
-          <p:cNvPr id="63" name="Conector recto 62">
-            <a:extLst>
-              <a:ext uri="{FF2B5EF4-FFF2-40B4-BE49-F238E27FC236}">
-                <a16:creationId xmlns:a16="http://schemas.microsoft.com/office/drawing/2014/main" id="{74C57113-C9A9-45EB-B72F-220236E69265}"/>
-              </a:ext>
-            </a:extLst>
-          </p:cNvPr>
-          <p:cNvCxnSpPr>
-            <a:cxnSpLocks/>
-            <a:stCxn id="10" idx="2"/>
-          </p:cNvCxnSpPr>
-          <p:nvPr/>
-        </p:nvCxnSpPr>
-        <p:spPr>
-          <a:xfrm>
-            <a:off x="7052872" y="1858135"/>
-            <a:ext cx="650539" cy="275777"/>
-          </a:xfrm>
-          <a:prstGeom prst="line">
-            <a:avLst/>
-          </a:prstGeom>
-          <a:ln w="12700">
-            <a:solidFill>
-              <a:schemeClr val="accent4"/>
-            </a:solidFill>
-          </a:ln>
-        </p:spPr>
-        <p:style>
-          <a:lnRef idx="1">
-            <a:schemeClr val="accent1"/>
-          </a:lnRef>
-          <a:fillRef idx="0">
-            <a:schemeClr val="accent1"/>
-          </a:fillRef>
-          <a:effectRef idx="0">
-            <a:schemeClr val="accent1"/>
-          </a:effectRef>
-          <a:fontRef idx="minor">
-            <a:schemeClr val="tx1"/>
-          </a:fontRef>
-        </p:style>
-      </p:cxnSp>
-      <p:grpSp>
-        <p:nvGrpSpPr>
-          <p:cNvPr id="2" name="Grupo 1">
-            <a:extLst>
-              <a:ext uri="{FF2B5EF4-FFF2-40B4-BE49-F238E27FC236}">
-                <a16:creationId xmlns:a16="http://schemas.microsoft.com/office/drawing/2014/main" id="{518A2968-D1FB-435F-AED1-91757E506662}"/>
-              </a:ext>
-            </a:extLst>
-          </p:cNvPr>
-          <p:cNvGrpSpPr/>
-          <p:nvPr/>
-        </p:nvGrpSpPr>
-        <p:grpSpPr>
-          <a:xfrm>
-            <a:off x="2300992" y="3659971"/>
-            <a:ext cx="4451377" cy="993357"/>
-            <a:chOff x="4746885" y="1644448"/>
-            <a:chExt cx="4451377" cy="993357"/>
-          </a:xfrm>
-        </p:grpSpPr>
-        <p:sp>
-          <p:nvSpPr>
-            <p:cNvPr id="31" name="Hexágono 30">
-              <a:extLst>
-                <a:ext uri="{FF2B5EF4-FFF2-40B4-BE49-F238E27FC236}">
-                  <a16:creationId xmlns:a16="http://schemas.microsoft.com/office/drawing/2014/main" id="{8FB0198F-6CF8-4578-A58E-64372591AA55}"/>
-                </a:ext>
-              </a:extLst>
-            </p:cNvPr>
-            <p:cNvSpPr/>
-            <p:nvPr/>
-          </p:nvSpPr>
-          <p:spPr>
-            <a:xfrm>
-              <a:off x="4746885" y="1917805"/>
-              <a:ext cx="1087946" cy="720000"/>
-            </a:xfrm>
-            <a:prstGeom prst="hexagon">
-              <a:avLst/>
-            </a:prstGeom>
-            <a:noFill/>
-            <a:ln w="12700">
-              <a:solidFill>
-                <a:schemeClr val="accent4"/>
-              </a:solidFill>
-            </a:ln>
-          </p:spPr>
-          <p:style>
-            <a:lnRef idx="2">
-              <a:schemeClr val="accent1">
-                <a:shade val="50000"/>
-              </a:schemeClr>
-            </a:lnRef>
-            <a:fillRef idx="1">
-              <a:schemeClr val="accent1"/>
-            </a:fillRef>
-            <a:effectRef idx="0">
-              <a:schemeClr val="accent1"/>
-            </a:effectRef>
-            <a:fontRef idx="minor">
-              <a:schemeClr val="lt1"/>
-            </a:fontRef>
-          </p:style>
-          <p:txBody>
-            <a:bodyPr rtlCol="0" anchor="ctr"/>
-            <a:lstStyle/>
-            <a:p>
-              <a:pPr algn="ctr"/>
-              <a:r>
-                <a:rPr lang="es-MX" sz="1050">
-                  <a:solidFill>
-                    <a:schemeClr val="accent2"/>
-                  </a:solidFill>
-                  <a:latin typeface="Proxima Nova" panose="020B0604020202020204" charset="0"/>
-                </a:rPr>
-                <a:t>KNN</a:t>
-              </a:r>
-              <a:endParaRPr lang="es-AR" sz="1050" dirty="0">
-                <a:solidFill>
-                  <a:schemeClr val="accent2"/>
-                </a:solidFill>
-                <a:latin typeface="Proxima Nova" panose="020B0604020202020204" charset="0"/>
-              </a:endParaRPr>
-            </a:p>
-          </p:txBody>
-        </p:sp>
-        <p:sp>
-          <p:nvSpPr>
-            <p:cNvPr id="32" name="Hexágono 31">
-              <a:extLst>
-                <a:ext uri="{FF2B5EF4-FFF2-40B4-BE49-F238E27FC236}">
-                  <a16:creationId xmlns:a16="http://schemas.microsoft.com/office/drawing/2014/main" id="{36D773E7-EECA-4E55-AFA2-5A2A5BF3EF25}"/>
-                </a:ext>
-              </a:extLst>
-            </p:cNvPr>
-            <p:cNvSpPr/>
-            <p:nvPr/>
-          </p:nvSpPr>
-          <p:spPr>
-            <a:xfrm>
-              <a:off x="6981726" y="1917805"/>
-              <a:ext cx="1087946" cy="720000"/>
-            </a:xfrm>
-            <a:prstGeom prst="hexagon">
-              <a:avLst/>
-            </a:prstGeom>
-            <a:noFill/>
-            <a:ln w="12700">
-              <a:solidFill>
-                <a:schemeClr val="accent4"/>
-              </a:solidFill>
-            </a:ln>
-          </p:spPr>
-          <p:style>
-            <a:lnRef idx="2">
-              <a:schemeClr val="accent1">
-                <a:shade val="50000"/>
-              </a:schemeClr>
-            </a:lnRef>
-            <a:fillRef idx="1">
-              <a:schemeClr val="accent1"/>
-            </a:fillRef>
-            <a:effectRef idx="0">
-              <a:schemeClr val="accent1"/>
-            </a:effectRef>
-            <a:fontRef idx="minor">
-              <a:schemeClr val="lt1"/>
-            </a:fontRef>
-          </p:style>
-          <p:txBody>
-            <a:bodyPr rtlCol="0" anchor="ctr"/>
-            <a:lstStyle/>
-            <a:p>
-              <a:pPr algn="ctr"/>
-              <a:r>
-                <a:rPr lang="es-MX" sz="1050" dirty="0">
-                  <a:solidFill>
-                    <a:schemeClr val="accent2"/>
-                  </a:solidFill>
-                  <a:latin typeface="Proxima Nova" panose="020B0604020202020204" charset="0"/>
-                </a:rPr>
-                <a:t>Regresión logística</a:t>
-              </a:r>
-              <a:endParaRPr lang="es-AR" sz="1050" dirty="0">
-                <a:solidFill>
-                  <a:schemeClr val="accent2"/>
-                </a:solidFill>
-                <a:latin typeface="Proxima Nova" panose="020B0604020202020204" charset="0"/>
-              </a:endParaRPr>
-            </a:p>
-          </p:txBody>
-        </p:sp>
-        <p:sp>
-          <p:nvSpPr>
-            <p:cNvPr id="34" name="Hexágono 33">
-              <a:extLst>
-                <a:ext uri="{FF2B5EF4-FFF2-40B4-BE49-F238E27FC236}">
-                  <a16:creationId xmlns:a16="http://schemas.microsoft.com/office/drawing/2014/main" id="{C0E3A9EE-F3A4-4CAA-B9D5-CD4A262C3BF3}"/>
-                </a:ext>
-              </a:extLst>
-            </p:cNvPr>
-            <p:cNvSpPr/>
-            <p:nvPr/>
-          </p:nvSpPr>
-          <p:spPr>
-            <a:xfrm>
-              <a:off x="8110316" y="1917805"/>
-              <a:ext cx="1087946" cy="720000"/>
-            </a:xfrm>
-            <a:prstGeom prst="hexagon">
-              <a:avLst/>
-            </a:prstGeom>
-            <a:noFill/>
-            <a:ln w="12700">
-              <a:solidFill>
-                <a:schemeClr val="accent4"/>
-              </a:solidFill>
-            </a:ln>
-          </p:spPr>
-          <p:style>
-            <a:lnRef idx="2">
-              <a:schemeClr val="accent1">
-                <a:shade val="50000"/>
-              </a:schemeClr>
-            </a:lnRef>
-            <a:fillRef idx="1">
-              <a:schemeClr val="accent1"/>
-            </a:fillRef>
-            <a:effectRef idx="0">
-              <a:schemeClr val="accent1"/>
-            </a:effectRef>
-            <a:fontRef idx="minor">
-              <a:schemeClr val="lt1"/>
-            </a:fontRef>
-          </p:style>
-          <p:txBody>
-            <a:bodyPr rtlCol="0" anchor="ctr"/>
-            <a:lstStyle/>
-            <a:p>
-              <a:pPr algn="ctr"/>
-              <a:r>
-                <a:rPr lang="es-MX" sz="1050" dirty="0">
-                  <a:solidFill>
-                    <a:schemeClr val="accent2"/>
-                  </a:solidFill>
-                  <a:latin typeface="Proxima Nova" panose="020B0604020202020204" charset="0"/>
-                </a:rPr>
-                <a:t>LDA/QDA</a:t>
-              </a:r>
-              <a:endParaRPr lang="es-AR" sz="1050" dirty="0">
-                <a:solidFill>
-                  <a:schemeClr val="accent2"/>
-                </a:solidFill>
-                <a:latin typeface="Proxima Nova" panose="020B0604020202020204" charset="0"/>
-              </a:endParaRPr>
-            </a:p>
-          </p:txBody>
-        </p:sp>
-        <p:cxnSp>
-          <p:nvCxnSpPr>
-            <p:cNvPr id="35" name="Conector recto 34">
-              <a:extLst>
-                <a:ext uri="{FF2B5EF4-FFF2-40B4-BE49-F238E27FC236}">
-                  <a16:creationId xmlns:a16="http://schemas.microsoft.com/office/drawing/2014/main" id="{A38937FB-1D48-4CD5-8BC7-6FA3CC0337C9}"/>
-                </a:ext>
-              </a:extLst>
-            </p:cNvPr>
-            <p:cNvCxnSpPr>
-              <a:cxnSpLocks/>
-            </p:cNvCxnSpPr>
-            <p:nvPr/>
-          </p:nvCxnSpPr>
-          <p:spPr>
-            <a:xfrm flipH="1">
-              <a:off x="5301547" y="1646340"/>
-              <a:ext cx="761942" cy="258700"/>
-            </a:xfrm>
-            <a:prstGeom prst="line">
-              <a:avLst/>
-            </a:prstGeom>
-            <a:ln w="12700">
-              <a:solidFill>
-                <a:schemeClr val="accent4"/>
-              </a:solidFill>
-            </a:ln>
-          </p:spPr>
-          <p:style>
-            <a:lnRef idx="1">
-              <a:schemeClr val="accent1"/>
-            </a:lnRef>
-            <a:fillRef idx="0">
-              <a:schemeClr val="accent1"/>
-            </a:fillRef>
-            <a:effectRef idx="0">
-              <a:schemeClr val="accent1"/>
-            </a:effectRef>
-            <a:fontRef idx="minor">
-              <a:schemeClr val="tx1"/>
-            </a:fontRef>
-          </p:style>
-        </p:cxnSp>
-        <p:cxnSp>
-          <p:nvCxnSpPr>
-            <p:cNvPr id="37" name="Conector recto 36">
-              <a:extLst>
-                <a:ext uri="{FF2B5EF4-FFF2-40B4-BE49-F238E27FC236}">
-                  <a16:creationId xmlns:a16="http://schemas.microsoft.com/office/drawing/2014/main" id="{9FED54A3-961E-4111-B779-96E141C4412C}"/>
-                </a:ext>
-              </a:extLst>
-            </p:cNvPr>
-            <p:cNvCxnSpPr>
-              <a:cxnSpLocks/>
-            </p:cNvCxnSpPr>
-            <p:nvPr/>
-          </p:nvCxnSpPr>
-          <p:spPr>
-            <a:xfrm flipH="1">
-              <a:off x="7525699" y="1644448"/>
-              <a:ext cx="526486" cy="275524"/>
-            </a:xfrm>
-            <a:prstGeom prst="line">
-              <a:avLst/>
-            </a:prstGeom>
-            <a:ln w="12700">
-              <a:solidFill>
-                <a:schemeClr val="accent4"/>
-              </a:solidFill>
-            </a:ln>
-          </p:spPr>
-          <p:style>
-            <a:lnRef idx="1">
-              <a:schemeClr val="accent1"/>
-            </a:lnRef>
-            <a:fillRef idx="0">
-              <a:schemeClr val="accent1"/>
-            </a:fillRef>
-            <a:effectRef idx="0">
-              <a:schemeClr val="accent1"/>
-            </a:effectRef>
-            <a:fontRef idx="minor">
-              <a:schemeClr val="tx1"/>
-            </a:fontRef>
-          </p:style>
-        </p:cxnSp>
-        <p:cxnSp>
-          <p:nvCxnSpPr>
-            <p:cNvPr id="38" name="Conector recto 37">
-              <a:extLst>
-                <a:ext uri="{FF2B5EF4-FFF2-40B4-BE49-F238E27FC236}">
-                  <a16:creationId xmlns:a16="http://schemas.microsoft.com/office/drawing/2014/main" id="{66CF836B-7232-4695-857F-820032DFF868}"/>
-                </a:ext>
-              </a:extLst>
-            </p:cNvPr>
-            <p:cNvCxnSpPr>
-              <a:cxnSpLocks/>
-            </p:cNvCxnSpPr>
-            <p:nvPr/>
-          </p:nvCxnSpPr>
-          <p:spPr>
-            <a:xfrm>
-              <a:off x="8052185" y="1644448"/>
-              <a:ext cx="602104" cy="275524"/>
-            </a:xfrm>
-            <a:prstGeom prst="line">
-              <a:avLst/>
-            </a:prstGeom>
-            <a:ln w="12700">
-              <a:solidFill>
-                <a:schemeClr val="accent4"/>
-              </a:solidFill>
-            </a:ln>
-          </p:spPr>
-          <p:style>
-            <a:lnRef idx="1">
-              <a:schemeClr val="accent1"/>
-            </a:lnRef>
-            <a:fillRef idx="0">
-              <a:schemeClr val="accent1"/>
-            </a:fillRef>
-            <a:effectRef idx="0">
-              <a:schemeClr val="accent1"/>
-            </a:effectRef>
-            <a:fontRef idx="minor">
-              <a:schemeClr val="tx1"/>
-            </a:fontRef>
-          </p:style>
-        </p:cxnSp>
-        <p:sp>
-          <p:nvSpPr>
-            <p:cNvPr id="40" name="Hexágono 39">
-              <a:extLst>
-                <a:ext uri="{FF2B5EF4-FFF2-40B4-BE49-F238E27FC236}">
-                  <a16:creationId xmlns:a16="http://schemas.microsoft.com/office/drawing/2014/main" id="{621A4E4F-2505-473A-BB89-D588FFD48DE2}"/>
-                </a:ext>
-              </a:extLst>
-            </p:cNvPr>
-            <p:cNvSpPr/>
-            <p:nvPr/>
-          </p:nvSpPr>
-          <p:spPr>
-            <a:xfrm>
-              <a:off x="5864305" y="1917805"/>
-              <a:ext cx="1087946" cy="720000"/>
-            </a:xfrm>
-            <a:prstGeom prst="hexagon">
-              <a:avLst/>
-            </a:prstGeom>
-            <a:noFill/>
-            <a:ln w="12700">
-              <a:solidFill>
-                <a:schemeClr val="accent4"/>
-              </a:solidFill>
-            </a:ln>
-          </p:spPr>
-          <p:style>
-            <a:lnRef idx="2">
-              <a:schemeClr val="accent1">
-                <a:shade val="50000"/>
-              </a:schemeClr>
-            </a:lnRef>
-            <a:fillRef idx="1">
-              <a:schemeClr val="accent1"/>
-            </a:fillRef>
-            <a:effectRef idx="0">
-              <a:schemeClr val="accent1"/>
-            </a:effectRef>
-            <a:fontRef idx="minor">
-              <a:schemeClr val="lt1"/>
-            </a:fontRef>
-          </p:style>
-          <p:txBody>
-            <a:bodyPr rtlCol="0" anchor="ctr"/>
-            <a:lstStyle/>
-            <a:p>
-              <a:pPr algn="ctr"/>
-              <a:r>
-                <a:rPr lang="es-MX" sz="1050" dirty="0" err="1">
-                  <a:solidFill>
-                    <a:schemeClr val="accent2"/>
-                  </a:solidFill>
-                  <a:latin typeface="Proxima Nova" panose="020B0604020202020204" charset="0"/>
-                </a:rPr>
-                <a:t>Naive</a:t>
-              </a:r>
-              <a:r>
-                <a:rPr lang="es-MX" sz="1050" dirty="0">
-                  <a:solidFill>
-                    <a:schemeClr val="accent2"/>
-                  </a:solidFill>
-                  <a:latin typeface="Proxima Nova" panose="020B0604020202020204" charset="0"/>
-                </a:rPr>
-                <a:t> Bayes</a:t>
-              </a:r>
-              <a:endParaRPr lang="es-AR" sz="1050" dirty="0">
-                <a:solidFill>
-                  <a:schemeClr val="accent2"/>
-                </a:solidFill>
-                <a:latin typeface="Proxima Nova" panose="020B0604020202020204" charset="0"/>
-              </a:endParaRPr>
-            </a:p>
-          </p:txBody>
-        </p:sp>
-        <p:cxnSp>
-          <p:nvCxnSpPr>
-            <p:cNvPr id="41" name="Conector recto 40">
-              <a:extLst>
-                <a:ext uri="{FF2B5EF4-FFF2-40B4-BE49-F238E27FC236}">
-                  <a16:creationId xmlns:a16="http://schemas.microsoft.com/office/drawing/2014/main" id="{5F5E0D86-0F0F-44BA-9889-CFA96B45CED6}"/>
-                </a:ext>
-              </a:extLst>
-            </p:cNvPr>
-            <p:cNvCxnSpPr>
-              <a:cxnSpLocks/>
-            </p:cNvCxnSpPr>
-            <p:nvPr/>
-          </p:nvCxnSpPr>
-          <p:spPr>
-            <a:xfrm>
-              <a:off x="6063489" y="1646340"/>
-              <a:ext cx="344789" cy="270528"/>
-            </a:xfrm>
-            <a:prstGeom prst="line">
-              <a:avLst/>
-            </a:prstGeom>
-            <a:ln w="12700">
-              <a:solidFill>
-                <a:schemeClr val="accent4"/>
-              </a:solidFill>
-            </a:ln>
-          </p:spPr>
-          <p:style>
-            <a:lnRef idx="1">
-              <a:schemeClr val="accent1"/>
-            </a:lnRef>
-            <a:fillRef idx="0">
-              <a:schemeClr val="accent1"/>
-            </a:fillRef>
-            <a:effectRef idx="0">
-              <a:schemeClr val="accent1"/>
-            </a:effectRef>
-            <a:fontRef idx="minor">
-              <a:schemeClr val="tx1"/>
-            </a:fontRef>
-          </p:style>
-        </p:cxnSp>
-      </p:grpSp>
     </p:spTree>
     <p:extLst>
       <p:ext uri="{BB962C8B-B14F-4D97-AF65-F5344CB8AC3E}">
-        <p14:creationId xmlns:p14="http://schemas.microsoft.com/office/powerpoint/2010/main" val="1640414692"/>
+        <p14:creationId xmlns:p14="http://schemas.microsoft.com/office/powerpoint/2010/main" val="4111567153"/>
       </p:ext>
     </p:extLst>
   </p:cSld>
@@ -25574,8 +25043,8 @@
           </a:extLst>
         </p:spPr>
       </p:pic>
-      <mc:AlternateContent xmlns:mc="http://schemas.openxmlformats.org/markup-compatibility/2006">
-        <mc:Choice xmlns:a14="http://schemas.microsoft.com/office/drawing/2010/main" Requires="a14">
+      <mc:AlternateContent xmlns:mc="http://schemas.openxmlformats.org/markup-compatibility/2006" xmlns:a14="http://schemas.microsoft.com/office/drawing/2010/main">
+        <mc:Choice Requires="a14">
           <p:sp>
             <p:nvSpPr>
               <p:cNvPr id="32" name="CuadroTexto 31">
@@ -25761,7 +25230,7 @@
             </p:txBody>
           </p:sp>
         </mc:Choice>
-        <mc:Fallback>
+        <mc:Fallback xmlns="">
           <p:sp>
             <p:nvSpPr>
               <p:cNvPr id="32" name="CuadroTexto 31">
@@ -26006,7 +25475,15 @@
             </a:r>
             <a:r>
               <a:rPr lang="es-MX" dirty="0"/>
-              <a:t>Regresión lineal múltiple</a:t>
+              <a:t>Regresión lineal </a:t>
+            </a:r>
+            <a:r>
+              <a:rPr lang="es-MX" b="1" dirty="0">
+                <a:solidFill>
+                  <a:schemeClr val="tx2"/>
+                </a:solidFill>
+              </a:rPr>
+              <a:t>múltiple</a:t>
             </a:r>
           </a:p>
           <a:p>
@@ -26068,741 +25545,12 @@
           </a:p>
         </p:txBody>
       </p:sp>
-      <p:sp>
-        <p:nvSpPr>
-          <p:cNvPr id="4" name="Rectángulo: esquinas redondeadas 3">
+      <p:grpSp>
+        <p:nvGrpSpPr>
+          <p:cNvPr id="31" name="Grupo 30">
             <a:extLst>
               <a:ext uri="{FF2B5EF4-FFF2-40B4-BE49-F238E27FC236}">
-                <a16:creationId xmlns:a16="http://schemas.microsoft.com/office/drawing/2014/main" id="{C0B8BED8-D254-4E6B-9DDB-40AD10572EE9}"/>
-              </a:ext>
-            </a:extLst>
-          </p:cNvPr>
-          <p:cNvSpPr/>
-          <p:nvPr/>
-        </p:nvSpPr>
-        <p:spPr>
-          <a:xfrm>
-            <a:off x="3290341" y="1723993"/>
-            <a:ext cx="1828800" cy="457200"/>
-          </a:xfrm>
-          <a:prstGeom prst="roundRect">
-            <a:avLst/>
-          </a:prstGeom>
-          <a:noFill/>
-          <a:ln w="12700">
-            <a:solidFill>
-              <a:schemeClr val="accent4"/>
-            </a:solidFill>
-          </a:ln>
-        </p:spPr>
-        <p:style>
-          <a:lnRef idx="2">
-            <a:schemeClr val="accent1">
-              <a:shade val="50000"/>
-            </a:schemeClr>
-          </a:lnRef>
-          <a:fillRef idx="1">
-            <a:schemeClr val="accent1"/>
-          </a:fillRef>
-          <a:effectRef idx="0">
-            <a:schemeClr val="accent1"/>
-          </a:effectRef>
-          <a:fontRef idx="minor">
-            <a:schemeClr val="lt1"/>
-          </a:fontRef>
-        </p:style>
-        <p:txBody>
-          <a:bodyPr rtlCol="0" anchor="ctr"/>
-          <a:lstStyle/>
-          <a:p>
-            <a:pPr algn="ctr"/>
-            <a:r>
-              <a:rPr lang="es-MX" dirty="0">
-                <a:solidFill>
-                  <a:schemeClr val="accent2"/>
-                </a:solidFill>
-                <a:latin typeface="Proxima Nova" panose="020B0604020202020204" charset="0"/>
-              </a:rPr>
-              <a:t>Aprendizaje supervisado</a:t>
-            </a:r>
-            <a:endParaRPr lang="es-AR" dirty="0">
-              <a:solidFill>
-                <a:schemeClr val="accent2"/>
-              </a:solidFill>
-              <a:latin typeface="Proxima Nova" panose="020B0604020202020204" charset="0"/>
-            </a:endParaRPr>
-          </a:p>
-        </p:txBody>
-      </p:sp>
-      <p:sp>
-        <p:nvSpPr>
-          <p:cNvPr id="5" name="Rectángulo: esquinas redondeadas 4">
-            <a:extLst>
-              <a:ext uri="{FF2B5EF4-FFF2-40B4-BE49-F238E27FC236}">
-                <a16:creationId xmlns:a16="http://schemas.microsoft.com/office/drawing/2014/main" id="{F2F46C68-3E03-442B-9A56-B12FA84CA524}"/>
-              </a:ext>
-            </a:extLst>
-          </p:cNvPr>
-          <p:cNvSpPr/>
-          <p:nvPr/>
-        </p:nvSpPr>
-        <p:spPr>
-          <a:xfrm>
-            <a:off x="1176728" y="2438545"/>
-            <a:ext cx="1828800" cy="457200"/>
-          </a:xfrm>
-          <a:prstGeom prst="roundRect">
-            <a:avLst/>
-          </a:prstGeom>
-          <a:noFill/>
-          <a:ln w="12700">
-            <a:solidFill>
-              <a:schemeClr val="accent4"/>
-            </a:solidFill>
-          </a:ln>
-        </p:spPr>
-        <p:style>
-          <a:lnRef idx="2">
-            <a:schemeClr val="accent1">
-              <a:shade val="50000"/>
-            </a:schemeClr>
-          </a:lnRef>
-          <a:fillRef idx="1">
-            <a:schemeClr val="accent1"/>
-          </a:fillRef>
-          <a:effectRef idx="0">
-            <a:schemeClr val="accent1"/>
-          </a:effectRef>
-          <a:fontRef idx="minor">
-            <a:schemeClr val="lt1"/>
-          </a:fontRef>
-        </p:style>
-        <p:txBody>
-          <a:bodyPr rtlCol="0" anchor="ctr"/>
-          <a:lstStyle/>
-          <a:p>
-            <a:pPr algn="ctr"/>
-            <a:r>
-              <a:rPr lang="es-MX" dirty="0">
-                <a:solidFill>
-                  <a:schemeClr val="accent2"/>
-                </a:solidFill>
-                <a:latin typeface="Proxima Nova" panose="020B0604020202020204" charset="0"/>
-              </a:rPr>
-              <a:t>Regresión</a:t>
-            </a:r>
-            <a:endParaRPr lang="es-AR" dirty="0">
-              <a:solidFill>
-                <a:schemeClr val="accent2"/>
-              </a:solidFill>
-              <a:latin typeface="Proxima Nova" panose="020B0604020202020204" charset="0"/>
-            </a:endParaRPr>
-          </a:p>
-        </p:txBody>
-      </p:sp>
-      <p:sp>
-        <p:nvSpPr>
-          <p:cNvPr id="6" name="Rectángulo: esquinas redondeadas 5">
-            <a:extLst>
-              <a:ext uri="{FF2B5EF4-FFF2-40B4-BE49-F238E27FC236}">
-                <a16:creationId xmlns:a16="http://schemas.microsoft.com/office/drawing/2014/main" id="{A8629497-6CB1-4AA8-BE40-795E6EC997F7}"/>
-              </a:ext>
-            </a:extLst>
-          </p:cNvPr>
-          <p:cNvSpPr/>
-          <p:nvPr/>
-        </p:nvSpPr>
-        <p:spPr>
-          <a:xfrm>
-            <a:off x="4204741" y="2437608"/>
-            <a:ext cx="1828800" cy="457200"/>
-          </a:xfrm>
-          <a:prstGeom prst="roundRect">
-            <a:avLst/>
-          </a:prstGeom>
-          <a:noFill/>
-          <a:ln w="12700">
-            <a:solidFill>
-              <a:schemeClr val="accent4"/>
-            </a:solidFill>
-          </a:ln>
-        </p:spPr>
-        <p:style>
-          <a:lnRef idx="2">
-            <a:schemeClr val="accent1">
-              <a:shade val="50000"/>
-            </a:schemeClr>
-          </a:lnRef>
-          <a:fillRef idx="1">
-            <a:schemeClr val="accent1"/>
-          </a:fillRef>
-          <a:effectRef idx="0">
-            <a:schemeClr val="accent1"/>
-          </a:effectRef>
-          <a:fontRef idx="minor">
-            <a:schemeClr val="lt1"/>
-          </a:fontRef>
-        </p:style>
-        <p:txBody>
-          <a:bodyPr rtlCol="0" anchor="ctr"/>
-          <a:lstStyle/>
-          <a:p>
-            <a:pPr algn="ctr"/>
-            <a:r>
-              <a:rPr lang="es-MX" dirty="0">
-                <a:solidFill>
-                  <a:schemeClr val="accent2"/>
-                </a:solidFill>
-                <a:latin typeface="Proxima Nova" panose="020B0604020202020204" charset="0"/>
-              </a:rPr>
-              <a:t>Clasificación</a:t>
-            </a:r>
-            <a:endParaRPr lang="es-AR" dirty="0">
-              <a:solidFill>
-                <a:schemeClr val="accent2"/>
-              </a:solidFill>
-              <a:latin typeface="Proxima Nova" panose="020B0604020202020204" charset="0"/>
-            </a:endParaRPr>
-          </a:p>
-        </p:txBody>
-      </p:sp>
-      <p:sp>
-        <p:nvSpPr>
-          <p:cNvPr id="7" name="Hexágono 6">
-            <a:extLst>
-              <a:ext uri="{FF2B5EF4-FFF2-40B4-BE49-F238E27FC236}">
-                <a16:creationId xmlns:a16="http://schemas.microsoft.com/office/drawing/2014/main" id="{F43309B9-5A2B-4822-A565-16F0FCA701B0}"/>
-              </a:ext>
-            </a:extLst>
-          </p:cNvPr>
-          <p:cNvSpPr/>
-          <p:nvPr/>
-        </p:nvSpPr>
-        <p:spPr>
-          <a:xfrm>
-            <a:off x="1054011" y="3269424"/>
-            <a:ext cx="1008000" cy="720000"/>
-          </a:xfrm>
-          <a:prstGeom prst="hexagon">
-            <a:avLst/>
-          </a:prstGeom>
-          <a:noFill/>
-          <a:ln w="12700">
-            <a:solidFill>
-              <a:schemeClr val="accent4"/>
-            </a:solidFill>
-          </a:ln>
-        </p:spPr>
-        <p:style>
-          <a:lnRef idx="2">
-            <a:schemeClr val="accent1">
-              <a:shade val="50000"/>
-            </a:schemeClr>
-          </a:lnRef>
-          <a:fillRef idx="1">
-            <a:schemeClr val="accent1"/>
-          </a:fillRef>
-          <a:effectRef idx="0">
-            <a:schemeClr val="accent1"/>
-          </a:effectRef>
-          <a:fontRef idx="minor">
-            <a:schemeClr val="lt1"/>
-          </a:fontRef>
-        </p:style>
-        <p:txBody>
-          <a:bodyPr rtlCol="0" anchor="ctr"/>
-          <a:lstStyle/>
-          <a:p>
-            <a:pPr algn="ctr"/>
-            <a:r>
-              <a:rPr lang="es-MX" sz="1050" dirty="0">
-                <a:solidFill>
-                  <a:schemeClr val="accent2"/>
-                </a:solidFill>
-                <a:latin typeface="Proxima Nova" panose="020B0604020202020204" charset="0"/>
-              </a:rPr>
-              <a:t>Simple</a:t>
-            </a:r>
-            <a:endParaRPr lang="es-AR" sz="1050" dirty="0">
-              <a:solidFill>
-                <a:schemeClr val="accent2"/>
-              </a:solidFill>
-              <a:latin typeface="Proxima Nova" panose="020B0604020202020204" charset="0"/>
-            </a:endParaRPr>
-          </a:p>
-        </p:txBody>
-      </p:sp>
-      <p:sp>
-        <p:nvSpPr>
-          <p:cNvPr id="8" name="Hexágono 7">
-            <a:extLst>
-              <a:ext uri="{FF2B5EF4-FFF2-40B4-BE49-F238E27FC236}">
-                <a16:creationId xmlns:a16="http://schemas.microsoft.com/office/drawing/2014/main" id="{036E445B-9A9B-4EE8-AC8F-386BBF9A5CD7}"/>
-              </a:ext>
-            </a:extLst>
-          </p:cNvPr>
-          <p:cNvSpPr/>
-          <p:nvPr/>
-        </p:nvSpPr>
-        <p:spPr>
-          <a:xfrm>
-            <a:off x="2124945" y="3269424"/>
-            <a:ext cx="1008000" cy="720000"/>
-          </a:xfrm>
-          <a:prstGeom prst="hexagon">
-            <a:avLst/>
-          </a:prstGeom>
-          <a:noFill/>
-          <a:ln w="28575">
-            <a:solidFill>
-              <a:schemeClr val="tx2"/>
-            </a:solidFill>
-          </a:ln>
-        </p:spPr>
-        <p:style>
-          <a:lnRef idx="2">
-            <a:schemeClr val="accent1">
-              <a:shade val="50000"/>
-            </a:schemeClr>
-          </a:lnRef>
-          <a:fillRef idx="1">
-            <a:schemeClr val="accent1"/>
-          </a:fillRef>
-          <a:effectRef idx="0">
-            <a:schemeClr val="accent1"/>
-          </a:effectRef>
-          <a:fontRef idx="minor">
-            <a:schemeClr val="lt1"/>
-          </a:fontRef>
-        </p:style>
-        <p:txBody>
-          <a:bodyPr rtlCol="0" anchor="ctr"/>
-          <a:lstStyle/>
-          <a:p>
-            <a:pPr algn="ctr"/>
-            <a:r>
-              <a:rPr lang="es-MX" sz="1050" dirty="0">
-                <a:solidFill>
-                  <a:schemeClr val="accent2"/>
-                </a:solidFill>
-                <a:latin typeface="Proxima Nova" panose="020B0604020202020204" charset="0"/>
-              </a:rPr>
-              <a:t>Múltiple</a:t>
-            </a:r>
-            <a:endParaRPr lang="es-AR" sz="1050" dirty="0">
-              <a:solidFill>
-                <a:schemeClr val="accent2"/>
-              </a:solidFill>
-              <a:latin typeface="Proxima Nova" panose="020B0604020202020204" charset="0"/>
-            </a:endParaRPr>
-          </a:p>
-        </p:txBody>
-      </p:sp>
-      <p:sp>
-        <p:nvSpPr>
-          <p:cNvPr id="12" name="Rectángulo: esquinas redondeadas 11">
-            <a:extLst>
-              <a:ext uri="{FF2B5EF4-FFF2-40B4-BE49-F238E27FC236}">
-                <a16:creationId xmlns:a16="http://schemas.microsoft.com/office/drawing/2014/main" id="{83D520EB-FEC6-420B-A827-D2B40CD39E48}"/>
-              </a:ext>
-            </a:extLst>
-          </p:cNvPr>
-          <p:cNvSpPr/>
-          <p:nvPr/>
-        </p:nvSpPr>
-        <p:spPr>
-          <a:xfrm>
-            <a:off x="3442741" y="3534116"/>
-            <a:ext cx="1828800" cy="457200"/>
-          </a:xfrm>
-          <a:prstGeom prst="roundRect">
-            <a:avLst/>
-          </a:prstGeom>
-          <a:noFill/>
-          <a:ln w="12700">
-            <a:solidFill>
-              <a:schemeClr val="accent4"/>
-            </a:solidFill>
-          </a:ln>
-        </p:spPr>
-        <p:style>
-          <a:lnRef idx="2">
-            <a:schemeClr val="accent1">
-              <a:shade val="50000"/>
-            </a:schemeClr>
-          </a:lnRef>
-          <a:fillRef idx="1">
-            <a:schemeClr val="accent1"/>
-          </a:fillRef>
-          <a:effectRef idx="0">
-            <a:schemeClr val="accent1"/>
-          </a:effectRef>
-          <a:fontRef idx="minor">
-            <a:schemeClr val="lt1"/>
-          </a:fontRef>
-        </p:style>
-        <p:txBody>
-          <a:bodyPr rtlCol="0" anchor="ctr"/>
-          <a:lstStyle/>
-          <a:p>
-            <a:pPr algn="ctr"/>
-            <a:r>
-              <a:rPr lang="es-MX" dirty="0">
-                <a:solidFill>
-                  <a:schemeClr val="accent2"/>
-                </a:solidFill>
-                <a:latin typeface="Proxima Nova" panose="020B0604020202020204" charset="0"/>
-              </a:rPr>
-              <a:t>No paramétricos</a:t>
-            </a:r>
-            <a:endParaRPr lang="es-AR" dirty="0">
-              <a:solidFill>
-                <a:schemeClr val="accent2"/>
-              </a:solidFill>
-              <a:latin typeface="Proxima Nova" panose="020B0604020202020204" charset="0"/>
-            </a:endParaRPr>
-          </a:p>
-        </p:txBody>
-      </p:sp>
-      <p:sp>
-        <p:nvSpPr>
-          <p:cNvPr id="13" name="Rectángulo: esquinas redondeadas 12">
-            <a:extLst>
-              <a:ext uri="{FF2B5EF4-FFF2-40B4-BE49-F238E27FC236}">
-                <a16:creationId xmlns:a16="http://schemas.microsoft.com/office/drawing/2014/main" id="{15937431-A0A0-4804-9F45-F1B037BE1585}"/>
-              </a:ext>
-            </a:extLst>
-          </p:cNvPr>
-          <p:cNvSpPr/>
-          <p:nvPr/>
-        </p:nvSpPr>
-        <p:spPr>
-          <a:xfrm>
-            <a:off x="5431437" y="3532224"/>
-            <a:ext cx="1828800" cy="457200"/>
-          </a:xfrm>
-          <a:prstGeom prst="roundRect">
-            <a:avLst/>
-          </a:prstGeom>
-          <a:noFill/>
-          <a:ln w="12700">
-            <a:solidFill>
-              <a:schemeClr val="accent4"/>
-            </a:solidFill>
-          </a:ln>
-        </p:spPr>
-        <p:style>
-          <a:lnRef idx="2">
-            <a:schemeClr val="accent1">
-              <a:shade val="50000"/>
-            </a:schemeClr>
-          </a:lnRef>
-          <a:fillRef idx="1">
-            <a:schemeClr val="accent1"/>
-          </a:fillRef>
-          <a:effectRef idx="0">
-            <a:schemeClr val="accent1"/>
-          </a:effectRef>
-          <a:fontRef idx="minor">
-            <a:schemeClr val="lt1"/>
-          </a:fontRef>
-        </p:style>
-        <p:txBody>
-          <a:bodyPr rtlCol="0" anchor="ctr"/>
-          <a:lstStyle/>
-          <a:p>
-            <a:pPr algn="ctr"/>
-            <a:r>
-              <a:rPr lang="es-MX" dirty="0">
-                <a:solidFill>
-                  <a:schemeClr val="accent2"/>
-                </a:solidFill>
-                <a:latin typeface="Proxima Nova" panose="020B0604020202020204" charset="0"/>
-              </a:rPr>
-              <a:t>Paramétricos</a:t>
-            </a:r>
-            <a:endParaRPr lang="es-AR" dirty="0">
-              <a:solidFill>
-                <a:schemeClr val="accent2"/>
-              </a:solidFill>
-              <a:latin typeface="Proxima Nova" panose="020B0604020202020204" charset="0"/>
-            </a:endParaRPr>
-          </a:p>
-        </p:txBody>
-      </p:sp>
-      <p:cxnSp>
-        <p:nvCxnSpPr>
-          <p:cNvPr id="14" name="Conector recto 13">
-            <a:extLst>
-              <a:ext uri="{FF2B5EF4-FFF2-40B4-BE49-F238E27FC236}">
-                <a16:creationId xmlns:a16="http://schemas.microsoft.com/office/drawing/2014/main" id="{E89F233B-143E-4618-816C-06D07FC832CC}"/>
-              </a:ext>
-            </a:extLst>
-          </p:cNvPr>
-          <p:cNvCxnSpPr>
-            <a:stCxn id="5" idx="2"/>
-          </p:cNvCxnSpPr>
-          <p:nvPr/>
-        </p:nvCxnSpPr>
-        <p:spPr>
-          <a:xfrm flipH="1">
-            <a:off x="1558011" y="2895745"/>
-            <a:ext cx="533117" cy="373679"/>
-          </a:xfrm>
-          <a:prstGeom prst="line">
-            <a:avLst/>
-          </a:prstGeom>
-          <a:ln>
-            <a:solidFill>
-              <a:schemeClr val="accent4"/>
-            </a:solidFill>
-          </a:ln>
-        </p:spPr>
-        <p:style>
-          <a:lnRef idx="1">
-            <a:schemeClr val="accent1"/>
-          </a:lnRef>
-          <a:fillRef idx="0">
-            <a:schemeClr val="accent1"/>
-          </a:fillRef>
-          <a:effectRef idx="0">
-            <a:schemeClr val="accent1"/>
-          </a:effectRef>
-          <a:fontRef idx="minor">
-            <a:schemeClr val="tx1"/>
-          </a:fontRef>
-        </p:style>
-      </p:cxnSp>
-      <p:cxnSp>
-        <p:nvCxnSpPr>
-          <p:cNvPr id="15" name="Conector recto 14">
-            <a:extLst>
-              <a:ext uri="{FF2B5EF4-FFF2-40B4-BE49-F238E27FC236}">
-                <a16:creationId xmlns:a16="http://schemas.microsoft.com/office/drawing/2014/main" id="{38690903-32EB-4CE9-AAD6-DEBCCEBD5F0A}"/>
-              </a:ext>
-            </a:extLst>
-          </p:cNvPr>
-          <p:cNvCxnSpPr>
-            <a:cxnSpLocks/>
-            <a:stCxn id="5" idx="2"/>
-          </p:cNvCxnSpPr>
-          <p:nvPr/>
-        </p:nvCxnSpPr>
-        <p:spPr>
-          <a:xfrm>
-            <a:off x="2091128" y="2895745"/>
-            <a:ext cx="547038" cy="373679"/>
-          </a:xfrm>
-          <a:prstGeom prst="line">
-            <a:avLst/>
-          </a:prstGeom>
-          <a:ln>
-            <a:solidFill>
-              <a:schemeClr val="accent4"/>
-            </a:solidFill>
-          </a:ln>
-        </p:spPr>
-        <p:style>
-          <a:lnRef idx="1">
-            <a:schemeClr val="accent1"/>
-          </a:lnRef>
-          <a:fillRef idx="0">
-            <a:schemeClr val="accent1"/>
-          </a:fillRef>
-          <a:effectRef idx="0">
-            <a:schemeClr val="accent1"/>
-          </a:effectRef>
-          <a:fontRef idx="minor">
-            <a:schemeClr val="tx1"/>
-          </a:fontRef>
-        </p:style>
-      </p:cxnSp>
-      <p:cxnSp>
-        <p:nvCxnSpPr>
-          <p:cNvPr id="16" name="Conector recto 15">
-            <a:extLst>
-              <a:ext uri="{FF2B5EF4-FFF2-40B4-BE49-F238E27FC236}">
-                <a16:creationId xmlns:a16="http://schemas.microsoft.com/office/drawing/2014/main" id="{F6C13EB6-559B-4D06-8F5F-B7EB8D9AE999}"/>
-              </a:ext>
-            </a:extLst>
-          </p:cNvPr>
-          <p:cNvCxnSpPr>
-            <a:cxnSpLocks/>
-            <a:stCxn id="4" idx="2"/>
-            <a:endCxn id="5" idx="0"/>
-          </p:cNvCxnSpPr>
-          <p:nvPr/>
-        </p:nvCxnSpPr>
-        <p:spPr>
-          <a:xfrm flipH="1">
-            <a:off x="2091128" y="2181193"/>
-            <a:ext cx="2113613" cy="257352"/>
-          </a:xfrm>
-          <a:prstGeom prst="line">
-            <a:avLst/>
-          </a:prstGeom>
-          <a:ln>
-            <a:solidFill>
-              <a:schemeClr val="accent4"/>
-            </a:solidFill>
-          </a:ln>
-        </p:spPr>
-        <p:style>
-          <a:lnRef idx="1">
-            <a:schemeClr val="accent1"/>
-          </a:lnRef>
-          <a:fillRef idx="0">
-            <a:schemeClr val="accent1"/>
-          </a:fillRef>
-          <a:effectRef idx="0">
-            <a:schemeClr val="accent1"/>
-          </a:effectRef>
-          <a:fontRef idx="minor">
-            <a:schemeClr val="tx1"/>
-          </a:fontRef>
-        </p:style>
-      </p:cxnSp>
-      <p:cxnSp>
-        <p:nvCxnSpPr>
-          <p:cNvPr id="17" name="Conector recto 16">
-            <a:extLst>
-              <a:ext uri="{FF2B5EF4-FFF2-40B4-BE49-F238E27FC236}">
-                <a16:creationId xmlns:a16="http://schemas.microsoft.com/office/drawing/2014/main" id="{EA3EA973-CFF5-42C4-8989-6F5262785D99}"/>
-              </a:ext>
-            </a:extLst>
-          </p:cNvPr>
-          <p:cNvCxnSpPr>
-            <a:cxnSpLocks/>
-            <a:stCxn id="4" idx="2"/>
-            <a:endCxn id="6" idx="0"/>
-          </p:cNvCxnSpPr>
-          <p:nvPr/>
-        </p:nvCxnSpPr>
-        <p:spPr>
-          <a:xfrm>
-            <a:off x="4204741" y="2181193"/>
-            <a:ext cx="914400" cy="256415"/>
-          </a:xfrm>
-          <a:prstGeom prst="line">
-            <a:avLst/>
-          </a:prstGeom>
-          <a:ln>
-            <a:solidFill>
-              <a:schemeClr val="accent4"/>
-            </a:solidFill>
-          </a:ln>
-        </p:spPr>
-        <p:style>
-          <a:lnRef idx="1">
-            <a:schemeClr val="accent1"/>
-          </a:lnRef>
-          <a:fillRef idx="0">
-            <a:schemeClr val="accent1"/>
-          </a:fillRef>
-          <a:effectRef idx="0">
-            <a:schemeClr val="accent1"/>
-          </a:effectRef>
-          <a:fontRef idx="minor">
-            <a:schemeClr val="tx1"/>
-          </a:fontRef>
-        </p:style>
-      </p:cxnSp>
-      <p:cxnSp>
-        <p:nvCxnSpPr>
-          <p:cNvPr id="18" name="Conector recto 17">
-            <a:extLst>
-              <a:ext uri="{FF2B5EF4-FFF2-40B4-BE49-F238E27FC236}">
-                <a16:creationId xmlns:a16="http://schemas.microsoft.com/office/drawing/2014/main" id="{DF805F51-942A-4C73-9D11-E54402BE6E16}"/>
-              </a:ext>
-            </a:extLst>
-          </p:cNvPr>
-          <p:cNvCxnSpPr>
-            <a:cxnSpLocks/>
-            <a:stCxn id="6" idx="2"/>
-            <a:endCxn id="12" idx="0"/>
-          </p:cNvCxnSpPr>
-          <p:nvPr/>
-        </p:nvCxnSpPr>
-        <p:spPr>
-          <a:xfrm flipH="1">
-            <a:off x="4357141" y="2894808"/>
-            <a:ext cx="762000" cy="639308"/>
-          </a:xfrm>
-          <a:prstGeom prst="line">
-            <a:avLst/>
-          </a:prstGeom>
-          <a:ln>
-            <a:solidFill>
-              <a:schemeClr val="accent4"/>
-            </a:solidFill>
-          </a:ln>
-        </p:spPr>
-        <p:style>
-          <a:lnRef idx="1">
-            <a:schemeClr val="accent1"/>
-          </a:lnRef>
-          <a:fillRef idx="0">
-            <a:schemeClr val="accent1"/>
-          </a:fillRef>
-          <a:effectRef idx="0">
-            <a:schemeClr val="accent1"/>
-          </a:effectRef>
-          <a:fontRef idx="minor">
-            <a:schemeClr val="tx1"/>
-          </a:fontRef>
-        </p:style>
-      </p:cxnSp>
-      <p:cxnSp>
-        <p:nvCxnSpPr>
-          <p:cNvPr id="19" name="Conector recto 18">
-            <a:extLst>
-              <a:ext uri="{FF2B5EF4-FFF2-40B4-BE49-F238E27FC236}">
-                <a16:creationId xmlns:a16="http://schemas.microsoft.com/office/drawing/2014/main" id="{71454F64-421E-4A66-B8D0-84033C187374}"/>
-              </a:ext>
-            </a:extLst>
-          </p:cNvPr>
-          <p:cNvCxnSpPr>
-            <a:cxnSpLocks/>
-            <a:stCxn id="6" idx="2"/>
-            <a:endCxn id="13" idx="0"/>
-          </p:cNvCxnSpPr>
-          <p:nvPr/>
-        </p:nvCxnSpPr>
-        <p:spPr>
-          <a:xfrm>
-            <a:off x="5119141" y="2894808"/>
-            <a:ext cx="1226696" cy="637416"/>
-          </a:xfrm>
-          <a:prstGeom prst="line">
-            <a:avLst/>
-          </a:prstGeom>
-          <a:ln>
-            <a:solidFill>
-              <a:schemeClr val="accent4"/>
-            </a:solidFill>
-          </a:ln>
-        </p:spPr>
-        <p:style>
-          <a:lnRef idx="1">
-            <a:schemeClr val="accent1"/>
-          </a:lnRef>
-          <a:fillRef idx="0">
-            <a:schemeClr val="accent1"/>
-          </a:fillRef>
-          <a:effectRef idx="0">
-            <a:schemeClr val="accent1"/>
-          </a:effectRef>
-          <a:fontRef idx="minor">
-            <a:schemeClr val="tx1"/>
-          </a:fontRef>
-        </p:style>
-      </p:cxnSp>
-      <p:grpSp>
-        <p:nvGrpSpPr>
-          <p:cNvPr id="2" name="Grupo 1">
-            <a:extLst>
-              <a:ext uri="{FF2B5EF4-FFF2-40B4-BE49-F238E27FC236}">
-                <a16:creationId xmlns:a16="http://schemas.microsoft.com/office/drawing/2014/main" id="{C2C6F19C-91BF-4E2E-8086-9E0A3329F603}"/>
+                <a16:creationId xmlns:a16="http://schemas.microsoft.com/office/drawing/2014/main" id="{4B61E38F-ABE0-4A3E-8F53-704F0A316C1D}"/>
               </a:ext>
             </a:extLst>
           </p:cNvPr>
@@ -26811,440 +25559,908 @@
         </p:nvGrpSpPr>
         <p:grpSpPr>
           <a:xfrm>
-            <a:off x="3045852" y="3989424"/>
-            <a:ext cx="4451377" cy="993357"/>
-            <a:chOff x="2231068" y="3666366"/>
-            <a:chExt cx="4451377" cy="993357"/>
+            <a:off x="1069512" y="1825828"/>
+            <a:ext cx="6988459" cy="2954374"/>
+            <a:chOff x="1069512" y="1825828"/>
+            <a:chExt cx="6988459" cy="2954374"/>
           </a:xfrm>
         </p:grpSpPr>
-        <p:sp>
-          <p:nvSpPr>
-            <p:cNvPr id="23" name="Hexágono 22">
+        <p:grpSp>
+          <p:nvGrpSpPr>
+            <p:cNvPr id="32" name="Grupo 31">
               <a:extLst>
                 <a:ext uri="{FF2B5EF4-FFF2-40B4-BE49-F238E27FC236}">
-                  <a16:creationId xmlns:a16="http://schemas.microsoft.com/office/drawing/2014/main" id="{7AF39F0C-3029-48E2-BD56-CFB78482E3E6}"/>
+                  <a16:creationId xmlns:a16="http://schemas.microsoft.com/office/drawing/2014/main" id="{179F599C-43D0-4195-93CD-562D326ECAAD}"/>
                 </a:ext>
               </a:extLst>
             </p:cNvPr>
-            <p:cNvSpPr/>
+            <p:cNvGrpSpPr/>
             <p:nvPr/>
-          </p:nvSpPr>
-          <p:spPr>
+          </p:nvGrpSpPr>
+          <p:grpSpPr>
             <a:xfrm>
-              <a:off x="2231068" y="3939723"/>
-              <a:ext cx="1087946" cy="720000"/>
+              <a:off x="1069512" y="1825828"/>
+              <a:ext cx="6988459" cy="2954374"/>
+              <a:chOff x="367259" y="1400935"/>
+              <a:chExt cx="6988459" cy="2954374"/>
             </a:xfrm>
-            <a:prstGeom prst="hexagon">
-              <a:avLst/>
-            </a:prstGeom>
-            <a:noFill/>
-            <a:ln w="12700">
-              <a:solidFill>
-                <a:schemeClr val="accent4"/>
-              </a:solidFill>
-            </a:ln>
-          </p:spPr>
-          <p:style>
-            <a:lnRef idx="2">
-              <a:schemeClr val="accent1">
-                <a:shade val="50000"/>
-              </a:schemeClr>
-            </a:lnRef>
-            <a:fillRef idx="1">
-              <a:schemeClr val="accent1"/>
-            </a:fillRef>
-            <a:effectRef idx="0">
-              <a:schemeClr val="accent1"/>
-            </a:effectRef>
-            <a:fontRef idx="minor">
-              <a:schemeClr val="lt1"/>
-            </a:fontRef>
-          </p:style>
-          <p:txBody>
-            <a:bodyPr rtlCol="0" anchor="ctr"/>
-            <a:lstStyle/>
-            <a:p>
-              <a:pPr algn="ctr"/>
-              <a:r>
-                <a:rPr lang="es-MX" sz="1050">
+          </p:grpSpPr>
+          <p:sp>
+            <p:nvSpPr>
+              <p:cNvPr id="34" name="Rectángulo: esquinas redondeadas 33">
+                <a:extLst>
+                  <a:ext uri="{FF2B5EF4-FFF2-40B4-BE49-F238E27FC236}">
+                    <a16:creationId xmlns:a16="http://schemas.microsoft.com/office/drawing/2014/main" id="{53793E14-190F-4D44-BC22-765870C74836}"/>
+                  </a:ext>
+                </a:extLst>
+              </p:cNvPr>
+              <p:cNvSpPr/>
+              <p:nvPr/>
+            </p:nvSpPr>
+            <p:spPr>
+              <a:xfrm>
+                <a:off x="2480872" y="1400935"/>
+                <a:ext cx="1828800" cy="457200"/>
+              </a:xfrm>
+              <a:prstGeom prst="roundRect">
+                <a:avLst/>
+              </a:prstGeom>
+              <a:noFill/>
+              <a:ln w="19050">
+                <a:solidFill>
+                  <a:schemeClr val="accent4"/>
+                </a:solidFill>
+              </a:ln>
+            </p:spPr>
+            <p:style>
+              <a:lnRef idx="2">
+                <a:schemeClr val="accent1">
+                  <a:shade val="50000"/>
+                </a:schemeClr>
+              </a:lnRef>
+              <a:fillRef idx="1">
+                <a:schemeClr val="accent1"/>
+              </a:fillRef>
+              <a:effectRef idx="0">
+                <a:schemeClr val="accent1"/>
+              </a:effectRef>
+              <a:fontRef idx="minor">
+                <a:schemeClr val="lt1"/>
+              </a:fontRef>
+            </p:style>
+            <p:txBody>
+              <a:bodyPr rtlCol="0" anchor="ctr"/>
+              <a:lstStyle/>
+              <a:p>
+                <a:pPr algn="ctr"/>
+                <a:r>
+                  <a:rPr lang="es-MX" dirty="0">
+                    <a:solidFill>
+                      <a:schemeClr val="accent2"/>
+                    </a:solidFill>
+                    <a:latin typeface="Proxima Nova" panose="020B0604020202020204" charset="0"/>
+                  </a:rPr>
+                  <a:t>Aprendizaje supervisado</a:t>
+                </a:r>
+                <a:endParaRPr lang="es-AR" dirty="0">
                   <a:solidFill>
                     <a:schemeClr val="accent2"/>
                   </a:solidFill>
                   <a:latin typeface="Proxima Nova" panose="020B0604020202020204" charset="0"/>
-                </a:rPr>
-                <a:t>KNN</a:t>
-              </a:r>
-              <a:endParaRPr lang="es-AR" sz="1050" dirty="0">
+                </a:endParaRPr>
+              </a:p>
+            </p:txBody>
+          </p:sp>
+          <p:sp>
+            <p:nvSpPr>
+              <p:cNvPr id="35" name="Rectángulo: esquinas redondeadas 34">
+                <a:extLst>
+                  <a:ext uri="{FF2B5EF4-FFF2-40B4-BE49-F238E27FC236}">
+                    <a16:creationId xmlns:a16="http://schemas.microsoft.com/office/drawing/2014/main" id="{C3BC2170-EA8B-4CD4-84B6-4F5DF7149B90}"/>
+                  </a:ext>
+                </a:extLst>
+              </p:cNvPr>
+              <p:cNvSpPr/>
+              <p:nvPr/>
+            </p:nvSpPr>
+            <p:spPr>
+              <a:xfrm>
+                <a:off x="367259" y="2033042"/>
+                <a:ext cx="1828800" cy="457200"/>
+              </a:xfrm>
+              <a:prstGeom prst="roundRect">
+                <a:avLst/>
+              </a:prstGeom>
+              <a:noFill/>
+              <a:ln w="19050">
                 <a:solidFill>
-                  <a:schemeClr val="accent2"/>
+                  <a:schemeClr val="accent4"/>
                 </a:solidFill>
-                <a:latin typeface="Proxima Nova" panose="020B0604020202020204" charset="0"/>
-              </a:endParaRPr>
-            </a:p>
-          </p:txBody>
-        </p:sp>
-        <p:sp>
-          <p:nvSpPr>
-            <p:cNvPr id="24" name="Hexágono 23">
-              <a:extLst>
-                <a:ext uri="{FF2B5EF4-FFF2-40B4-BE49-F238E27FC236}">
-                  <a16:creationId xmlns:a16="http://schemas.microsoft.com/office/drawing/2014/main" id="{73FAB9E0-98CB-4FC1-8EF0-06DA1F39ADFF}"/>
-                </a:ext>
-              </a:extLst>
-            </p:cNvPr>
-            <p:cNvSpPr/>
-            <p:nvPr/>
-          </p:nvSpPr>
-          <p:spPr>
-            <a:xfrm>
-              <a:off x="4465909" y="3939723"/>
-              <a:ext cx="1087946" cy="720000"/>
-            </a:xfrm>
-            <a:prstGeom prst="hexagon">
-              <a:avLst/>
-            </a:prstGeom>
-            <a:noFill/>
-            <a:ln w="12700">
-              <a:solidFill>
-                <a:schemeClr val="accent4"/>
-              </a:solidFill>
-            </a:ln>
-          </p:spPr>
-          <p:style>
-            <a:lnRef idx="2">
-              <a:schemeClr val="accent1">
-                <a:shade val="50000"/>
-              </a:schemeClr>
-            </a:lnRef>
-            <a:fillRef idx="1">
-              <a:schemeClr val="accent1"/>
-            </a:fillRef>
-            <a:effectRef idx="0">
-              <a:schemeClr val="accent1"/>
-            </a:effectRef>
-            <a:fontRef idx="minor">
-              <a:schemeClr val="lt1"/>
-            </a:fontRef>
-          </p:style>
-          <p:txBody>
-            <a:bodyPr rtlCol="0" anchor="ctr"/>
-            <a:lstStyle/>
-            <a:p>
-              <a:pPr algn="ctr"/>
-              <a:r>
-                <a:rPr lang="es-MX" sz="1050" dirty="0">
+              </a:ln>
+            </p:spPr>
+            <p:style>
+              <a:lnRef idx="2">
+                <a:schemeClr val="accent1">
+                  <a:shade val="50000"/>
+                </a:schemeClr>
+              </a:lnRef>
+              <a:fillRef idx="1">
+                <a:schemeClr val="accent1"/>
+              </a:fillRef>
+              <a:effectRef idx="0">
+                <a:schemeClr val="accent1"/>
+              </a:effectRef>
+              <a:fontRef idx="minor">
+                <a:schemeClr val="lt1"/>
+              </a:fontRef>
+            </p:style>
+            <p:txBody>
+              <a:bodyPr rtlCol="0" anchor="ctr"/>
+              <a:lstStyle/>
+              <a:p>
+                <a:pPr algn="ctr"/>
+                <a:r>
+                  <a:rPr lang="es-MX" dirty="0">
+                    <a:solidFill>
+                      <a:schemeClr val="accent2"/>
+                    </a:solidFill>
+                    <a:latin typeface="Proxima Nova" panose="020B0604020202020204" charset="0"/>
+                  </a:rPr>
+                  <a:t>Regresión</a:t>
+                </a:r>
+                <a:endParaRPr lang="es-AR" dirty="0">
                   <a:solidFill>
                     <a:schemeClr val="accent2"/>
                   </a:solidFill>
                   <a:latin typeface="Proxima Nova" panose="020B0604020202020204" charset="0"/>
-                </a:rPr>
-                <a:t>Regresión logística</a:t>
-              </a:r>
-              <a:endParaRPr lang="es-AR" sz="1050" dirty="0">
+                </a:endParaRPr>
+              </a:p>
+            </p:txBody>
+          </p:sp>
+          <p:sp>
+            <p:nvSpPr>
+              <p:cNvPr id="36" name="Rectángulo: esquinas redondeadas 35">
+                <a:extLst>
+                  <a:ext uri="{FF2B5EF4-FFF2-40B4-BE49-F238E27FC236}">
+                    <a16:creationId xmlns:a16="http://schemas.microsoft.com/office/drawing/2014/main" id="{C52AB482-1EB6-4C9A-8760-801A428F0A80}"/>
+                  </a:ext>
+                </a:extLst>
+              </p:cNvPr>
+              <p:cNvSpPr/>
+              <p:nvPr/>
+            </p:nvSpPr>
+            <p:spPr>
+              <a:xfrm>
+                <a:off x="4736879" y="2032105"/>
+                <a:ext cx="1828800" cy="457200"/>
+              </a:xfrm>
+              <a:prstGeom prst="roundRect">
+                <a:avLst/>
+              </a:prstGeom>
+              <a:noFill/>
+              <a:ln w="19050">
                 <a:solidFill>
-                  <a:schemeClr val="accent2"/>
+                  <a:schemeClr val="accent4"/>
                 </a:solidFill>
-                <a:latin typeface="Proxima Nova" panose="020B0604020202020204" charset="0"/>
-              </a:endParaRPr>
-            </a:p>
-          </p:txBody>
-        </p:sp>
-        <p:sp>
-          <p:nvSpPr>
-            <p:cNvPr id="25" name="Hexágono 24">
-              <a:extLst>
-                <a:ext uri="{FF2B5EF4-FFF2-40B4-BE49-F238E27FC236}">
-                  <a16:creationId xmlns:a16="http://schemas.microsoft.com/office/drawing/2014/main" id="{E37E2F96-F8E0-4F65-82A5-AE5F7A9076E1}"/>
-                </a:ext>
-              </a:extLst>
-            </p:cNvPr>
-            <p:cNvSpPr/>
-            <p:nvPr/>
-          </p:nvSpPr>
-          <p:spPr>
-            <a:xfrm>
-              <a:off x="5594499" y="3939723"/>
-              <a:ext cx="1087946" cy="720000"/>
-            </a:xfrm>
-            <a:prstGeom prst="hexagon">
-              <a:avLst/>
-            </a:prstGeom>
-            <a:noFill/>
-            <a:ln w="12700">
-              <a:solidFill>
-                <a:schemeClr val="accent4"/>
-              </a:solidFill>
-            </a:ln>
-          </p:spPr>
-          <p:style>
-            <a:lnRef idx="2">
-              <a:schemeClr val="accent1">
-                <a:shade val="50000"/>
-              </a:schemeClr>
-            </a:lnRef>
-            <a:fillRef idx="1">
-              <a:schemeClr val="accent1"/>
-            </a:fillRef>
-            <a:effectRef idx="0">
-              <a:schemeClr val="accent1"/>
-            </a:effectRef>
-            <a:fontRef idx="minor">
-              <a:schemeClr val="lt1"/>
-            </a:fontRef>
-          </p:style>
-          <p:txBody>
-            <a:bodyPr rtlCol="0" anchor="ctr"/>
-            <a:lstStyle/>
-            <a:p>
-              <a:pPr algn="ctr"/>
-              <a:r>
-                <a:rPr lang="es-MX" sz="1050" dirty="0">
+              </a:ln>
+            </p:spPr>
+            <p:style>
+              <a:lnRef idx="2">
+                <a:schemeClr val="accent1">
+                  <a:shade val="50000"/>
+                </a:schemeClr>
+              </a:lnRef>
+              <a:fillRef idx="1">
+                <a:schemeClr val="accent1"/>
+              </a:fillRef>
+              <a:effectRef idx="0">
+                <a:schemeClr val="accent1"/>
+              </a:effectRef>
+              <a:fontRef idx="minor">
+                <a:schemeClr val="lt1"/>
+              </a:fontRef>
+            </p:style>
+            <p:txBody>
+              <a:bodyPr rtlCol="0" anchor="ctr"/>
+              <a:lstStyle/>
+              <a:p>
+                <a:pPr algn="ctr"/>
+                <a:r>
+                  <a:rPr lang="es-MX" dirty="0">
+                    <a:solidFill>
+                      <a:schemeClr val="accent2"/>
+                    </a:solidFill>
+                    <a:latin typeface="Proxima Nova" panose="020B0604020202020204" charset="0"/>
+                  </a:rPr>
+                  <a:t>Clasificación</a:t>
+                </a:r>
+                <a:endParaRPr lang="es-AR" dirty="0">
                   <a:solidFill>
                     <a:schemeClr val="accent2"/>
                   </a:solidFill>
                   <a:latin typeface="Proxima Nova" panose="020B0604020202020204" charset="0"/>
-                </a:rPr>
-                <a:t>LDA/QDA</a:t>
-              </a:r>
-              <a:endParaRPr lang="es-AR" sz="1050" dirty="0">
+                </a:endParaRPr>
+              </a:p>
+            </p:txBody>
+          </p:sp>
+          <p:sp>
+            <p:nvSpPr>
+              <p:cNvPr id="37" name="Hexágono 36">
+                <a:extLst>
+                  <a:ext uri="{FF2B5EF4-FFF2-40B4-BE49-F238E27FC236}">
+                    <a16:creationId xmlns:a16="http://schemas.microsoft.com/office/drawing/2014/main" id="{C5EAEFB1-BD55-4D2C-8FDD-39EAC4E37669}"/>
+                  </a:ext>
+                </a:extLst>
+              </p:cNvPr>
+              <p:cNvSpPr/>
+              <p:nvPr/>
+            </p:nvSpPr>
+            <p:spPr>
+              <a:xfrm>
+                <a:off x="2180183" y="3527498"/>
+                <a:ext cx="1080000" cy="720000"/>
+              </a:xfrm>
+              <a:prstGeom prst="hexagon">
+                <a:avLst/>
+              </a:prstGeom>
+              <a:noFill/>
+              <a:ln w="28575">
                 <a:solidFill>
-                  <a:schemeClr val="accent2"/>
+                  <a:schemeClr val="tx2"/>
                 </a:solidFill>
-                <a:latin typeface="Proxima Nova" panose="020B0604020202020204" charset="0"/>
-              </a:endParaRPr>
-            </a:p>
-          </p:txBody>
-        </p:sp>
+              </a:ln>
+            </p:spPr>
+            <p:style>
+              <a:lnRef idx="2">
+                <a:schemeClr val="accent1">
+                  <a:shade val="50000"/>
+                </a:schemeClr>
+              </a:lnRef>
+              <a:fillRef idx="1">
+                <a:schemeClr val="accent1"/>
+              </a:fillRef>
+              <a:effectRef idx="0">
+                <a:schemeClr val="accent1"/>
+              </a:effectRef>
+              <a:fontRef idx="minor">
+                <a:schemeClr val="lt1"/>
+              </a:fontRef>
+            </p:style>
+            <p:txBody>
+              <a:bodyPr rtlCol="0" anchor="ctr"/>
+              <a:lstStyle/>
+              <a:p>
+                <a:pPr algn="ctr"/>
+                <a:r>
+                  <a:rPr lang="es-MX" sz="1050" dirty="0">
+                    <a:solidFill>
+                      <a:schemeClr val="accent2"/>
+                    </a:solidFill>
+                    <a:latin typeface="Proxima Nova" panose="020B0604020202020204" charset="0"/>
+                  </a:rPr>
+                  <a:t>Regresión lineal</a:t>
+                </a:r>
+                <a:endParaRPr lang="es-AR" sz="1050" dirty="0">
+                  <a:solidFill>
+                    <a:schemeClr val="accent2"/>
+                  </a:solidFill>
+                  <a:latin typeface="Proxima Nova" panose="020B0604020202020204" charset="0"/>
+                </a:endParaRPr>
+              </a:p>
+            </p:txBody>
+          </p:sp>
+          <p:sp>
+            <p:nvSpPr>
+              <p:cNvPr id="38" name="Rectángulo: esquinas redondeadas 37">
+                <a:extLst>
+                  <a:ext uri="{FF2B5EF4-FFF2-40B4-BE49-F238E27FC236}">
+                    <a16:creationId xmlns:a16="http://schemas.microsoft.com/office/drawing/2014/main" id="{B3778C00-F5DE-4656-A409-B9160CE4E90E}"/>
+                  </a:ext>
+                </a:extLst>
+              </p:cNvPr>
+              <p:cNvSpPr/>
+              <p:nvPr/>
+            </p:nvSpPr>
+            <p:spPr>
+              <a:xfrm>
+                <a:off x="3974879" y="2798833"/>
+                <a:ext cx="1584000" cy="457200"/>
+              </a:xfrm>
+              <a:prstGeom prst="roundRect">
+                <a:avLst/>
+              </a:prstGeom>
+              <a:noFill/>
+              <a:ln w="19050">
+                <a:solidFill>
+                  <a:schemeClr val="accent4"/>
+                </a:solidFill>
+              </a:ln>
+            </p:spPr>
+            <p:style>
+              <a:lnRef idx="2">
+                <a:schemeClr val="accent1">
+                  <a:shade val="50000"/>
+                </a:schemeClr>
+              </a:lnRef>
+              <a:fillRef idx="1">
+                <a:schemeClr val="accent1"/>
+              </a:fillRef>
+              <a:effectRef idx="0">
+                <a:schemeClr val="accent1"/>
+              </a:effectRef>
+              <a:fontRef idx="minor">
+                <a:schemeClr val="lt1"/>
+              </a:fontRef>
+            </p:style>
+            <p:txBody>
+              <a:bodyPr rtlCol="0" anchor="ctr"/>
+              <a:lstStyle/>
+              <a:p>
+                <a:pPr algn="ctr"/>
+                <a:r>
+                  <a:rPr lang="es-MX" dirty="0">
+                    <a:solidFill>
+                      <a:schemeClr val="accent2"/>
+                    </a:solidFill>
+                    <a:latin typeface="Proxima Nova" panose="020B0604020202020204" charset="0"/>
+                  </a:rPr>
+                  <a:t>Paramétricos</a:t>
+                </a:r>
+                <a:endParaRPr lang="es-AR" dirty="0">
+                  <a:solidFill>
+                    <a:schemeClr val="accent2"/>
+                  </a:solidFill>
+                  <a:latin typeface="Proxima Nova" panose="020B0604020202020204" charset="0"/>
+                </a:endParaRPr>
+              </a:p>
+            </p:txBody>
+          </p:sp>
+          <p:cxnSp>
+            <p:nvCxnSpPr>
+              <p:cNvPr id="39" name="Conector recto 38">
+                <a:extLst>
+                  <a:ext uri="{FF2B5EF4-FFF2-40B4-BE49-F238E27FC236}">
+                    <a16:creationId xmlns:a16="http://schemas.microsoft.com/office/drawing/2014/main" id="{6A4B271A-86B4-4E8A-ABEA-970308612227}"/>
+                  </a:ext>
+                </a:extLst>
+              </p:cNvPr>
+              <p:cNvCxnSpPr>
+                <a:cxnSpLocks/>
+                <a:stCxn id="35" idx="2"/>
+                <a:endCxn id="45" idx="0"/>
+              </p:cNvCxnSpPr>
+              <p:nvPr/>
+            </p:nvCxnSpPr>
+            <p:spPr>
+              <a:xfrm>
+                <a:off x="1281659" y="2490242"/>
+                <a:ext cx="1430895" cy="331749"/>
+              </a:xfrm>
+              <a:prstGeom prst="line">
+                <a:avLst/>
+              </a:prstGeom>
+              <a:ln w="19050">
+                <a:solidFill>
+                  <a:schemeClr val="accent4"/>
+                </a:solidFill>
+              </a:ln>
+            </p:spPr>
+            <p:style>
+              <a:lnRef idx="1">
+                <a:schemeClr val="accent1"/>
+              </a:lnRef>
+              <a:fillRef idx="0">
+                <a:schemeClr val="accent1"/>
+              </a:fillRef>
+              <a:effectRef idx="0">
+                <a:schemeClr val="accent1"/>
+              </a:effectRef>
+              <a:fontRef idx="minor">
+                <a:schemeClr val="tx1"/>
+              </a:fontRef>
+            </p:style>
+          </p:cxnSp>
+          <p:cxnSp>
+            <p:nvCxnSpPr>
+              <p:cNvPr id="40" name="Conector recto 39">
+                <a:extLst>
+                  <a:ext uri="{FF2B5EF4-FFF2-40B4-BE49-F238E27FC236}">
+                    <a16:creationId xmlns:a16="http://schemas.microsoft.com/office/drawing/2014/main" id="{12D55257-1D95-4BA5-9082-74768E7899A2}"/>
+                  </a:ext>
+                </a:extLst>
+              </p:cNvPr>
+              <p:cNvCxnSpPr>
+                <a:cxnSpLocks/>
+                <a:stCxn id="34" idx="2"/>
+                <a:endCxn id="35" idx="0"/>
+              </p:cNvCxnSpPr>
+              <p:nvPr/>
+            </p:nvCxnSpPr>
+            <p:spPr>
+              <a:xfrm flipH="1">
+                <a:off x="1281659" y="1858135"/>
+                <a:ext cx="2113613" cy="174907"/>
+              </a:xfrm>
+              <a:prstGeom prst="line">
+                <a:avLst/>
+              </a:prstGeom>
+              <a:ln w="19050">
+                <a:solidFill>
+                  <a:schemeClr val="accent4"/>
+                </a:solidFill>
+              </a:ln>
+            </p:spPr>
+            <p:style>
+              <a:lnRef idx="1">
+                <a:schemeClr val="accent1"/>
+              </a:lnRef>
+              <a:fillRef idx="0">
+                <a:schemeClr val="accent1"/>
+              </a:fillRef>
+              <a:effectRef idx="0">
+                <a:schemeClr val="accent1"/>
+              </a:effectRef>
+              <a:fontRef idx="minor">
+                <a:schemeClr val="tx1"/>
+              </a:fontRef>
+            </p:style>
+          </p:cxnSp>
+          <p:cxnSp>
+            <p:nvCxnSpPr>
+              <p:cNvPr id="41" name="Conector recto 40">
+                <a:extLst>
+                  <a:ext uri="{FF2B5EF4-FFF2-40B4-BE49-F238E27FC236}">
+                    <a16:creationId xmlns:a16="http://schemas.microsoft.com/office/drawing/2014/main" id="{7F54D539-C551-48C9-9491-937CFB14711A}"/>
+                  </a:ext>
+                </a:extLst>
+              </p:cNvPr>
+              <p:cNvCxnSpPr>
+                <a:cxnSpLocks/>
+                <a:stCxn id="34" idx="2"/>
+                <a:endCxn id="36" idx="0"/>
+              </p:cNvCxnSpPr>
+              <p:nvPr/>
+            </p:nvCxnSpPr>
+            <p:spPr>
+              <a:xfrm>
+                <a:off x="3395272" y="1858135"/>
+                <a:ext cx="2256007" cy="173970"/>
+              </a:xfrm>
+              <a:prstGeom prst="line">
+                <a:avLst/>
+              </a:prstGeom>
+              <a:ln w="19050">
+                <a:solidFill>
+                  <a:schemeClr val="accent4"/>
+                </a:solidFill>
+              </a:ln>
+            </p:spPr>
+            <p:style>
+              <a:lnRef idx="1">
+                <a:schemeClr val="accent1"/>
+              </a:lnRef>
+              <a:fillRef idx="0">
+                <a:schemeClr val="accent1"/>
+              </a:fillRef>
+              <a:effectRef idx="0">
+                <a:schemeClr val="accent1"/>
+              </a:effectRef>
+              <a:fontRef idx="minor">
+                <a:schemeClr val="tx1"/>
+              </a:fontRef>
+            </p:style>
+          </p:cxnSp>
+          <p:cxnSp>
+            <p:nvCxnSpPr>
+              <p:cNvPr id="42" name="Conector recto 41">
+                <a:extLst>
+                  <a:ext uri="{FF2B5EF4-FFF2-40B4-BE49-F238E27FC236}">
+                    <a16:creationId xmlns:a16="http://schemas.microsoft.com/office/drawing/2014/main" id="{553F3A52-4E62-431F-808F-2FFC4B9081AE}"/>
+                  </a:ext>
+                </a:extLst>
+              </p:cNvPr>
+              <p:cNvCxnSpPr>
+                <a:cxnSpLocks/>
+                <a:stCxn id="36" idx="2"/>
+                <a:endCxn id="38" idx="0"/>
+              </p:cNvCxnSpPr>
+              <p:nvPr/>
+            </p:nvCxnSpPr>
+            <p:spPr>
+              <a:xfrm flipH="1">
+                <a:off x="4766879" y="2489305"/>
+                <a:ext cx="884400" cy="309528"/>
+              </a:xfrm>
+              <a:prstGeom prst="line">
+                <a:avLst/>
+              </a:prstGeom>
+              <a:ln w="19050">
+                <a:solidFill>
+                  <a:schemeClr val="accent4"/>
+                </a:solidFill>
+              </a:ln>
+            </p:spPr>
+            <p:style>
+              <a:lnRef idx="1">
+                <a:schemeClr val="accent1"/>
+              </a:lnRef>
+              <a:fillRef idx="0">
+                <a:schemeClr val="accent1"/>
+              </a:fillRef>
+              <a:effectRef idx="0">
+                <a:schemeClr val="accent1"/>
+              </a:effectRef>
+              <a:fontRef idx="minor">
+                <a:schemeClr val="tx1"/>
+              </a:fontRef>
+            </p:style>
+          </p:cxnSp>
+          <p:sp>
+            <p:nvSpPr>
+              <p:cNvPr id="43" name="Hexágono 42">
+                <a:extLst>
+                  <a:ext uri="{FF2B5EF4-FFF2-40B4-BE49-F238E27FC236}">
+                    <a16:creationId xmlns:a16="http://schemas.microsoft.com/office/drawing/2014/main" id="{304B94B3-5058-4952-AFA9-168CC21357C0}"/>
+                  </a:ext>
+                </a:extLst>
+              </p:cNvPr>
+              <p:cNvSpPr/>
+              <p:nvPr/>
+            </p:nvSpPr>
+            <p:spPr>
+              <a:xfrm>
+                <a:off x="4239730" y="3527498"/>
+                <a:ext cx="1080000" cy="720000"/>
+              </a:xfrm>
+              <a:prstGeom prst="hexagon">
+                <a:avLst/>
+              </a:prstGeom>
+              <a:noFill/>
+              <a:ln w="19050">
+                <a:solidFill>
+                  <a:schemeClr val="accent4"/>
+                </a:solidFill>
+              </a:ln>
+            </p:spPr>
+            <p:style>
+              <a:lnRef idx="2">
+                <a:schemeClr val="accent1">
+                  <a:shade val="50000"/>
+                </a:schemeClr>
+              </a:lnRef>
+              <a:fillRef idx="1">
+                <a:schemeClr val="accent1"/>
+              </a:fillRef>
+              <a:effectRef idx="0">
+                <a:schemeClr val="accent1"/>
+              </a:effectRef>
+              <a:fontRef idx="minor">
+                <a:schemeClr val="lt1"/>
+              </a:fontRef>
+            </p:style>
+            <p:txBody>
+              <a:bodyPr rtlCol="0" anchor="ctr"/>
+              <a:lstStyle/>
+              <a:p>
+                <a:pPr algn="ctr"/>
+                <a:r>
+                  <a:rPr lang="es-MX" sz="1050" dirty="0">
+                    <a:solidFill>
+                      <a:schemeClr val="accent2"/>
+                    </a:solidFill>
+                    <a:latin typeface="Proxima Nova" panose="020B0604020202020204" charset="0"/>
+                  </a:rPr>
+                  <a:t>Regresión logística</a:t>
+                </a:r>
+                <a:endParaRPr lang="es-AR" sz="1050" dirty="0">
+                  <a:solidFill>
+                    <a:schemeClr val="accent2"/>
+                  </a:solidFill>
+                  <a:latin typeface="Proxima Nova" panose="020B0604020202020204" charset="0"/>
+                </a:endParaRPr>
+              </a:p>
+            </p:txBody>
+          </p:sp>
+          <p:cxnSp>
+            <p:nvCxnSpPr>
+              <p:cNvPr id="44" name="Conector recto 43">
+                <a:extLst>
+                  <a:ext uri="{FF2B5EF4-FFF2-40B4-BE49-F238E27FC236}">
+                    <a16:creationId xmlns:a16="http://schemas.microsoft.com/office/drawing/2014/main" id="{9D52E412-F8BF-400E-96BA-718DD2FA2619}"/>
+                  </a:ext>
+                </a:extLst>
+              </p:cNvPr>
+              <p:cNvCxnSpPr>
+                <a:cxnSpLocks/>
+              </p:cNvCxnSpPr>
+              <p:nvPr/>
+            </p:nvCxnSpPr>
+            <p:spPr>
+              <a:xfrm flipH="1">
+                <a:off x="4776208" y="3256033"/>
+                <a:ext cx="0" cy="270528"/>
+              </a:xfrm>
+              <a:prstGeom prst="line">
+                <a:avLst/>
+              </a:prstGeom>
+              <a:ln w="19050">
+                <a:solidFill>
+                  <a:schemeClr val="accent4"/>
+                </a:solidFill>
+              </a:ln>
+            </p:spPr>
+            <p:style>
+              <a:lnRef idx="1">
+                <a:schemeClr val="accent1"/>
+              </a:lnRef>
+              <a:fillRef idx="0">
+                <a:schemeClr val="accent1"/>
+              </a:fillRef>
+              <a:effectRef idx="0">
+                <a:schemeClr val="accent1"/>
+              </a:effectRef>
+              <a:fontRef idx="minor">
+                <a:schemeClr val="tx1"/>
+              </a:fontRef>
+            </p:style>
+          </p:cxnSp>
+          <p:sp>
+            <p:nvSpPr>
+              <p:cNvPr id="45" name="Rectángulo: esquinas redondeadas 44">
+                <a:extLst>
+                  <a:ext uri="{FF2B5EF4-FFF2-40B4-BE49-F238E27FC236}">
+                    <a16:creationId xmlns:a16="http://schemas.microsoft.com/office/drawing/2014/main" id="{86BE4BA6-7774-41B6-A4F1-ABF7C5AEB5DB}"/>
+                  </a:ext>
+                </a:extLst>
+              </p:cNvPr>
+              <p:cNvSpPr/>
+              <p:nvPr/>
+            </p:nvSpPr>
+            <p:spPr>
+              <a:xfrm>
+                <a:off x="1920554" y="2821991"/>
+                <a:ext cx="1584000" cy="457200"/>
+              </a:xfrm>
+              <a:prstGeom prst="roundRect">
+                <a:avLst/>
+              </a:prstGeom>
+              <a:noFill/>
+              <a:ln w="19050">
+                <a:solidFill>
+                  <a:schemeClr val="accent4"/>
+                </a:solidFill>
+              </a:ln>
+            </p:spPr>
+            <p:style>
+              <a:lnRef idx="2">
+                <a:schemeClr val="accent1">
+                  <a:shade val="50000"/>
+                </a:schemeClr>
+              </a:lnRef>
+              <a:fillRef idx="1">
+                <a:schemeClr val="accent1"/>
+              </a:fillRef>
+              <a:effectRef idx="0">
+                <a:schemeClr val="accent1"/>
+              </a:effectRef>
+              <a:fontRef idx="minor">
+                <a:schemeClr val="lt1"/>
+              </a:fontRef>
+            </p:style>
+            <p:txBody>
+              <a:bodyPr rtlCol="0" anchor="ctr"/>
+              <a:lstStyle/>
+              <a:p>
+                <a:pPr algn="ctr"/>
+                <a:r>
+                  <a:rPr lang="es-MX" dirty="0">
+                    <a:solidFill>
+                      <a:schemeClr val="accent2"/>
+                    </a:solidFill>
+                    <a:latin typeface="Proxima Nova" panose="020B0604020202020204" charset="0"/>
+                  </a:rPr>
+                  <a:t>Paramétricos</a:t>
+                </a:r>
+                <a:endParaRPr lang="es-AR" dirty="0">
+                  <a:solidFill>
+                    <a:schemeClr val="accent2"/>
+                  </a:solidFill>
+                  <a:latin typeface="Proxima Nova" panose="020B0604020202020204" charset="0"/>
+                </a:endParaRPr>
+              </a:p>
+            </p:txBody>
+          </p:sp>
+          <p:cxnSp>
+            <p:nvCxnSpPr>
+              <p:cNvPr id="46" name="Conector recto 45">
+                <a:extLst>
+                  <a:ext uri="{FF2B5EF4-FFF2-40B4-BE49-F238E27FC236}">
+                    <a16:creationId xmlns:a16="http://schemas.microsoft.com/office/drawing/2014/main" id="{58524BC4-B226-4865-8DBC-185AE05B3500}"/>
+                  </a:ext>
+                </a:extLst>
+              </p:cNvPr>
+              <p:cNvCxnSpPr>
+                <a:cxnSpLocks/>
+              </p:cNvCxnSpPr>
+              <p:nvPr/>
+            </p:nvCxnSpPr>
+            <p:spPr>
+              <a:xfrm>
+                <a:off x="2712554" y="3279191"/>
+                <a:ext cx="0" cy="247370"/>
+              </a:xfrm>
+              <a:prstGeom prst="line">
+                <a:avLst/>
+              </a:prstGeom>
+              <a:ln w="19050">
+                <a:solidFill>
+                  <a:schemeClr val="accent4"/>
+                </a:solidFill>
+              </a:ln>
+            </p:spPr>
+            <p:style>
+              <a:lnRef idx="1">
+                <a:schemeClr val="accent1"/>
+              </a:lnRef>
+              <a:fillRef idx="0">
+                <a:schemeClr val="accent1"/>
+              </a:fillRef>
+              <a:effectRef idx="0">
+                <a:schemeClr val="accent1"/>
+              </a:effectRef>
+              <a:fontRef idx="minor">
+                <a:schemeClr val="tx1"/>
+              </a:fontRef>
+            </p:style>
+          </p:cxnSp>
+          <p:sp>
+            <p:nvSpPr>
+              <p:cNvPr id="47" name="Rectángulo: esquinas redondeadas 46">
+                <a:extLst>
+                  <a:ext uri="{FF2B5EF4-FFF2-40B4-BE49-F238E27FC236}">
+                    <a16:creationId xmlns:a16="http://schemas.microsoft.com/office/drawing/2014/main" id="{891CA54C-FDE8-450E-8238-10F8E0417D5E}"/>
+                  </a:ext>
+                </a:extLst>
+              </p:cNvPr>
+              <p:cNvSpPr/>
+              <p:nvPr/>
+            </p:nvSpPr>
+            <p:spPr>
+              <a:xfrm>
+                <a:off x="2023672" y="3432749"/>
+                <a:ext cx="3477717" cy="922560"/>
+              </a:xfrm>
+              <a:prstGeom prst="roundRect">
+                <a:avLst/>
+              </a:prstGeom>
+              <a:noFill/>
+              <a:ln>
+                <a:solidFill>
+                  <a:schemeClr val="accent4"/>
+                </a:solidFill>
+                <a:prstDash val="dash"/>
+              </a:ln>
+            </p:spPr>
+            <p:style>
+              <a:lnRef idx="2">
+                <a:schemeClr val="accent1">
+                  <a:shade val="50000"/>
+                </a:schemeClr>
+              </a:lnRef>
+              <a:fillRef idx="1">
+                <a:schemeClr val="accent1"/>
+              </a:fillRef>
+              <a:effectRef idx="0">
+                <a:schemeClr val="accent1"/>
+              </a:effectRef>
+              <a:fontRef idx="minor">
+                <a:schemeClr val="lt1"/>
+              </a:fontRef>
+            </p:style>
+            <p:txBody>
+              <a:bodyPr rtlCol="0" anchor="ctr"/>
+              <a:lstStyle/>
+              <a:p>
+                <a:pPr algn="ctr"/>
+                <a:endParaRPr lang="es-AR"/>
+              </a:p>
+            </p:txBody>
+          </p:sp>
+          <p:sp>
+            <p:nvSpPr>
+              <p:cNvPr id="48" name="Hexágono 47">
+                <a:extLst>
+                  <a:ext uri="{FF2B5EF4-FFF2-40B4-BE49-F238E27FC236}">
+                    <a16:creationId xmlns:a16="http://schemas.microsoft.com/office/drawing/2014/main" id="{3EC6F134-4A20-4EC9-B976-3848A0E485C3}"/>
+                  </a:ext>
+                </a:extLst>
+              </p:cNvPr>
+              <p:cNvSpPr/>
+              <p:nvPr/>
+            </p:nvSpPr>
+            <p:spPr>
+              <a:xfrm>
+                <a:off x="6275718" y="3526561"/>
+                <a:ext cx="1080000" cy="720000"/>
+              </a:xfrm>
+              <a:prstGeom prst="hexagon">
+                <a:avLst/>
+              </a:prstGeom>
+              <a:noFill/>
+              <a:ln w="19050">
+                <a:solidFill>
+                  <a:schemeClr val="accent4"/>
+                </a:solidFill>
+              </a:ln>
+            </p:spPr>
+            <p:style>
+              <a:lnRef idx="2">
+                <a:schemeClr val="accent1">
+                  <a:shade val="50000"/>
+                </a:schemeClr>
+              </a:lnRef>
+              <a:fillRef idx="1">
+                <a:schemeClr val="accent1"/>
+              </a:fillRef>
+              <a:effectRef idx="0">
+                <a:schemeClr val="accent1"/>
+              </a:effectRef>
+              <a:fontRef idx="minor">
+                <a:schemeClr val="lt1"/>
+              </a:fontRef>
+            </p:style>
+            <p:txBody>
+              <a:bodyPr rtlCol="0" anchor="ctr"/>
+              <a:lstStyle/>
+              <a:p>
+                <a:pPr algn="ctr"/>
+                <a:r>
+                  <a:rPr lang="es-MX" sz="1050" dirty="0">
+                    <a:solidFill>
+                      <a:schemeClr val="accent2"/>
+                    </a:solidFill>
+                    <a:latin typeface="Proxima Nova" panose="020B0604020202020204" charset="0"/>
+                  </a:rPr>
+                  <a:t>LASSO</a:t>
+                </a:r>
+                <a:endParaRPr lang="es-AR" sz="1050" dirty="0">
+                  <a:solidFill>
+                    <a:schemeClr val="accent2"/>
+                  </a:solidFill>
+                  <a:latin typeface="Proxima Nova" panose="020B0604020202020204" charset="0"/>
+                </a:endParaRPr>
+              </a:p>
+            </p:txBody>
+          </p:sp>
+        </p:grpSp>
         <p:cxnSp>
           <p:nvCxnSpPr>
-            <p:cNvPr id="26" name="Conector recto 25">
+            <p:cNvPr id="33" name="Conector recto de flecha 32">
               <a:extLst>
                 <a:ext uri="{FF2B5EF4-FFF2-40B4-BE49-F238E27FC236}">
-                  <a16:creationId xmlns:a16="http://schemas.microsoft.com/office/drawing/2014/main" id="{11B53604-76A8-4003-95E4-505F8233BE03}"/>
+                  <a16:creationId xmlns:a16="http://schemas.microsoft.com/office/drawing/2014/main" id="{FE6C59C9-328B-4438-9908-A42165BEC79C}"/>
                 </a:ext>
               </a:extLst>
             </p:cNvPr>
             <p:cNvCxnSpPr>
-              <a:cxnSpLocks/>
+              <a:stCxn id="48" idx="3"/>
+              <a:endCxn id="47" idx="3"/>
             </p:cNvCxnSpPr>
             <p:nvPr/>
           </p:nvCxnSpPr>
           <p:spPr>
             <a:xfrm flipH="1">
-              <a:off x="2785730" y="3668258"/>
-              <a:ext cx="761942" cy="258700"/>
+              <a:off x="6203642" y="4311454"/>
+              <a:ext cx="774329" cy="7468"/>
             </a:xfrm>
-            <a:prstGeom prst="line">
+            <a:prstGeom prst="straightConnector1">
               <a:avLst/>
             </a:prstGeom>
             <a:ln w="12700">
               <a:solidFill>
                 <a:schemeClr val="accent4"/>
               </a:solidFill>
-            </a:ln>
-          </p:spPr>
-          <p:style>
-            <a:lnRef idx="1">
-              <a:schemeClr val="accent1"/>
-            </a:lnRef>
-            <a:fillRef idx="0">
-              <a:schemeClr val="accent1"/>
-            </a:fillRef>
-            <a:effectRef idx="0">
-              <a:schemeClr val="accent1"/>
-            </a:effectRef>
-            <a:fontRef idx="minor">
-              <a:schemeClr val="tx1"/>
-            </a:fontRef>
-          </p:style>
-        </p:cxnSp>
-        <p:cxnSp>
-          <p:nvCxnSpPr>
-            <p:cNvPr id="27" name="Conector recto 26">
-              <a:extLst>
-                <a:ext uri="{FF2B5EF4-FFF2-40B4-BE49-F238E27FC236}">
-                  <a16:creationId xmlns:a16="http://schemas.microsoft.com/office/drawing/2014/main" id="{F333DE06-9C68-4B6A-9CF9-FB9042077FD2}"/>
-                </a:ext>
-              </a:extLst>
-            </p:cNvPr>
-            <p:cNvCxnSpPr>
-              <a:cxnSpLocks/>
-            </p:cNvCxnSpPr>
-            <p:nvPr/>
-          </p:nvCxnSpPr>
-          <p:spPr>
-            <a:xfrm flipH="1">
-              <a:off x="5009882" y="3666366"/>
-              <a:ext cx="526486" cy="275524"/>
-            </a:xfrm>
-            <a:prstGeom prst="line">
-              <a:avLst/>
-            </a:prstGeom>
-            <a:ln w="12700">
-              <a:solidFill>
-                <a:schemeClr val="accent4"/>
-              </a:solidFill>
-            </a:ln>
-          </p:spPr>
-          <p:style>
-            <a:lnRef idx="1">
-              <a:schemeClr val="accent1"/>
-            </a:lnRef>
-            <a:fillRef idx="0">
-              <a:schemeClr val="accent1"/>
-            </a:fillRef>
-            <a:effectRef idx="0">
-              <a:schemeClr val="accent1"/>
-            </a:effectRef>
-            <a:fontRef idx="minor">
-              <a:schemeClr val="tx1"/>
-            </a:fontRef>
-          </p:style>
-        </p:cxnSp>
-        <p:cxnSp>
-          <p:nvCxnSpPr>
-            <p:cNvPr id="28" name="Conector recto 27">
-              <a:extLst>
-                <a:ext uri="{FF2B5EF4-FFF2-40B4-BE49-F238E27FC236}">
-                  <a16:creationId xmlns:a16="http://schemas.microsoft.com/office/drawing/2014/main" id="{D4609DFE-5A86-431E-A84C-6546212CD2C2}"/>
-                </a:ext>
-              </a:extLst>
-            </p:cNvPr>
-            <p:cNvCxnSpPr>
-              <a:cxnSpLocks/>
-            </p:cNvCxnSpPr>
-            <p:nvPr/>
-          </p:nvCxnSpPr>
-          <p:spPr>
-            <a:xfrm>
-              <a:off x="5536368" y="3666366"/>
-              <a:ext cx="602104" cy="275524"/>
-            </a:xfrm>
-            <a:prstGeom prst="line">
-              <a:avLst/>
-            </a:prstGeom>
-            <a:ln w="12700">
-              <a:solidFill>
-                <a:schemeClr val="accent4"/>
-              </a:solidFill>
-            </a:ln>
-          </p:spPr>
-          <p:style>
-            <a:lnRef idx="1">
-              <a:schemeClr val="accent1"/>
-            </a:lnRef>
-            <a:fillRef idx="0">
-              <a:schemeClr val="accent1"/>
-            </a:fillRef>
-            <a:effectRef idx="0">
-              <a:schemeClr val="accent1"/>
-            </a:effectRef>
-            <a:fontRef idx="minor">
-              <a:schemeClr val="tx1"/>
-            </a:fontRef>
-          </p:style>
-        </p:cxnSp>
-        <p:sp>
-          <p:nvSpPr>
-            <p:cNvPr id="29" name="Hexágono 28">
-              <a:extLst>
-                <a:ext uri="{FF2B5EF4-FFF2-40B4-BE49-F238E27FC236}">
-                  <a16:creationId xmlns:a16="http://schemas.microsoft.com/office/drawing/2014/main" id="{0F83ACC8-E409-4C9C-BE1E-9198012EBB14}"/>
-                </a:ext>
-              </a:extLst>
-            </p:cNvPr>
-            <p:cNvSpPr/>
-            <p:nvPr/>
-          </p:nvSpPr>
-          <p:spPr>
-            <a:xfrm>
-              <a:off x="3348488" y="3939723"/>
-              <a:ext cx="1087946" cy="720000"/>
-            </a:xfrm>
-            <a:prstGeom prst="hexagon">
-              <a:avLst/>
-            </a:prstGeom>
-            <a:noFill/>
-            <a:ln w="12700">
-              <a:solidFill>
-                <a:schemeClr val="accent4"/>
-              </a:solidFill>
-            </a:ln>
-          </p:spPr>
-          <p:style>
-            <a:lnRef idx="2">
-              <a:schemeClr val="accent1">
-                <a:shade val="50000"/>
-              </a:schemeClr>
-            </a:lnRef>
-            <a:fillRef idx="1">
-              <a:schemeClr val="accent1"/>
-            </a:fillRef>
-            <a:effectRef idx="0">
-              <a:schemeClr val="accent1"/>
-            </a:effectRef>
-            <a:fontRef idx="minor">
-              <a:schemeClr val="lt1"/>
-            </a:fontRef>
-          </p:style>
-          <p:txBody>
-            <a:bodyPr rtlCol="0" anchor="ctr"/>
-            <a:lstStyle/>
-            <a:p>
-              <a:pPr algn="ctr"/>
-              <a:r>
-                <a:rPr lang="es-MX" sz="1050" dirty="0" err="1">
-                  <a:solidFill>
-                    <a:schemeClr val="accent2"/>
-                  </a:solidFill>
-                  <a:latin typeface="Proxima Nova" panose="020B0604020202020204" charset="0"/>
-                </a:rPr>
-                <a:t>Naive</a:t>
-              </a:r>
-              <a:r>
-                <a:rPr lang="es-MX" sz="1050" dirty="0">
-                  <a:solidFill>
-                    <a:schemeClr val="accent2"/>
-                  </a:solidFill>
-                  <a:latin typeface="Proxima Nova" panose="020B0604020202020204" charset="0"/>
-                </a:rPr>
-                <a:t> Bayes</a:t>
-              </a:r>
-              <a:endParaRPr lang="es-AR" sz="1050" dirty="0">
-                <a:solidFill>
-                  <a:schemeClr val="accent2"/>
-                </a:solidFill>
-                <a:latin typeface="Proxima Nova" panose="020B0604020202020204" charset="0"/>
-              </a:endParaRPr>
-            </a:p>
-          </p:txBody>
-        </p:sp>
-        <p:cxnSp>
-          <p:nvCxnSpPr>
-            <p:cNvPr id="30" name="Conector recto 29">
-              <a:extLst>
-                <a:ext uri="{FF2B5EF4-FFF2-40B4-BE49-F238E27FC236}">
-                  <a16:creationId xmlns:a16="http://schemas.microsoft.com/office/drawing/2014/main" id="{83281128-6C14-4005-8157-0AC2518DB283}"/>
-                </a:ext>
-              </a:extLst>
-            </p:cNvPr>
-            <p:cNvCxnSpPr>
-              <a:cxnSpLocks/>
-            </p:cNvCxnSpPr>
-            <p:nvPr/>
-          </p:nvCxnSpPr>
-          <p:spPr>
-            <a:xfrm>
-              <a:off x="3547672" y="3668258"/>
-              <a:ext cx="344789" cy="270528"/>
-            </a:xfrm>
-            <a:prstGeom prst="line">
-              <a:avLst/>
-            </a:prstGeom>
-            <a:ln w="12700">
-              <a:solidFill>
-                <a:schemeClr val="accent4"/>
-              </a:solidFill>
+              <a:tailEnd type="triangle"/>
             </a:ln>
           </p:spPr>
           <p:style>
@@ -28018,8 +27234,8 @@
           </a:prstGeom>
         </p:spPr>
       </p:pic>
-      <mc:AlternateContent xmlns:mc="http://schemas.openxmlformats.org/markup-compatibility/2006">
-        <mc:Choice xmlns:a14="http://schemas.microsoft.com/office/drawing/2010/main" Requires="a14">
+      <mc:AlternateContent xmlns:mc="http://schemas.openxmlformats.org/markup-compatibility/2006" xmlns:a14="http://schemas.microsoft.com/office/drawing/2010/main">
+        <mc:Choice Requires="a14">
           <p:sp>
             <p:nvSpPr>
               <p:cNvPr id="4" name="Google Shape;182;p31">
@@ -28184,7 +27400,7 @@
             </p:txBody>
           </p:sp>
         </mc:Choice>
-        <mc:Fallback>
+        <mc:Fallback xmlns="">
           <p:sp>
             <p:nvSpPr>
               <p:cNvPr id="4" name="Google Shape;182;p31">
@@ -28303,8 +27519,8 @@
           </a:p>
         </p:txBody>
       </p:sp>
-      <mc:AlternateContent xmlns:mc="http://schemas.openxmlformats.org/markup-compatibility/2006">
-        <mc:Choice xmlns:a14="http://schemas.microsoft.com/office/drawing/2010/main" Requires="a14">
+      <mc:AlternateContent xmlns:mc="http://schemas.openxmlformats.org/markup-compatibility/2006" xmlns:a14="http://schemas.microsoft.com/office/drawing/2010/main">
+        <mc:Choice Requires="a14">
           <p:sp>
             <p:nvSpPr>
               <p:cNvPr id="6" name="Google Shape;182;p31">
@@ -28549,7 +27765,7 @@
             </p:txBody>
           </p:sp>
         </mc:Choice>
-        <mc:Fallback>
+        <mc:Fallback xmlns="">
           <p:sp>
             <p:nvSpPr>
               <p:cNvPr id="6" name="Google Shape;182;p31">
@@ -29096,8 +28312,8 @@
           </a:p>
         </p:txBody>
       </p:sp>
-      <mc:AlternateContent xmlns:mc="http://schemas.openxmlformats.org/markup-compatibility/2006">
-        <mc:Choice xmlns:a14="http://schemas.microsoft.com/office/drawing/2010/main" Requires="a14">
+      <mc:AlternateContent xmlns:mc="http://schemas.openxmlformats.org/markup-compatibility/2006" xmlns:a14="http://schemas.microsoft.com/office/drawing/2010/main">
+        <mc:Choice Requires="a14">
           <p:sp>
             <p:nvSpPr>
               <p:cNvPr id="10" name="Google Shape;199;p34">
@@ -29451,7 +28667,7 @@
             </p:txBody>
           </p:sp>
         </mc:Choice>
-        <mc:Fallback>
+        <mc:Fallback xmlns="">
           <p:sp>
             <p:nvSpPr>
               <p:cNvPr id="10" name="Google Shape;199;p34">
